--- a/민감도_장표.pptx
+++ b/민감도_장표.pptx
@@ -2895,6 +2895,74 @@
                         <a:buNone/>
                       </a:pPr>
                       <a:r>
+                        <a:rPr lang="en-US" sz="900" b="1" dirty="0">
+                          <a:solidFill>
+                            <a:srgbClr val="16305B"/>
+                          </a:solidFill>
+                          <a:latin typeface="Malgun Gothic" pitchFamily="34" charset="0"/>
+                          <a:ea typeface="Malgun Gothic" pitchFamily="34" charset="-122"/>
+                          <a:cs typeface="Malgun Gothic" pitchFamily="34" charset="-120"/>
+                        </a:rPr>
+                        <a:t>2</a:t>
+                      </a:r>
+                      <a:endParaRPr lang="en-US" sz="900" dirty="0">
+                        <a:latin typeface="Malgun Gothic" charset="0"/>
+                        <a:ea typeface="Malgun Gothic" charset="0"/>
+                        <a:cs typeface="Malgun Gothic" charset="0"/>
+                      </a:endParaRPr>
+                    </a:p>
+                  </a:txBody>
+                  <a:tcPr marL="38100" marR="38100" marT="12700" marB="12700" anchor="ctr">
+                    <a:lnL w="6350" cap="flat" cmpd="sng" algn="ctr">
+                      <a:solidFill>
+                        <a:srgbClr val="FFFFFF"/>
+                      </a:solidFill>
+                      <a:prstDash val="solid"/>
+                      <a:round/>
+                      <a:headEnd type="none" w="med" len="med"/>
+                      <a:tailEnd type="none" w="med" len="med"/>
+                    </a:lnL>
+                    <a:lnR w="6350" cap="flat" cmpd="sng" algn="ctr">
+                      <a:solidFill>
+                        <a:srgbClr val="FFFFFF"/>
+                      </a:solidFill>
+                      <a:prstDash val="solid"/>
+                      <a:round/>
+                      <a:headEnd type="none" w="med" len="med"/>
+                      <a:tailEnd type="none" w="med" len="med"/>
+                    </a:lnR>
+                    <a:lnT w="6350" cap="flat" cmpd="sng" algn="ctr">
+                      <a:solidFill>
+                        <a:srgbClr val="FFFFFF"/>
+                      </a:solidFill>
+                      <a:prstDash val="solid"/>
+                      <a:round/>
+                      <a:headEnd type="none" w="med" len="med"/>
+                      <a:tailEnd type="none" w="med" len="med"/>
+                    </a:lnT>
+                    <a:lnB w="6350" cap="flat" cmpd="sng" algn="ctr">
+                      <a:solidFill>
+                        <a:srgbClr val="DDE3EB"/>
+                      </a:solidFill>
+                      <a:prstDash val="solid"/>
+                      <a:round/>
+                      <a:headEnd type="none" w="med" len="med"/>
+                      <a:tailEnd type="none" w="med" len="med"/>
+                    </a:lnB>
+                    <a:solidFill>
+                      <a:srgbClr val="CDE1EC"/>
+                    </a:solidFill>
+                  </a:tcPr>
+                </a:tc>
+                <a:tc>
+                  <a:txBody>
+                    <a:bodyPr/>
+                    <a:lstStyle/>
+                    <a:p>
+                      <a:pPr algn="ctr" indent="0" marL="0">
+                        <a:buNone/>
+                      </a:pPr>
+                      <a:r>
                         <a:rPr lang="en-US" sz="900" dirty="0">
                           <a:solidFill>
                             <a:srgbClr val="A9B3C1"/>
@@ -2903,7 +2971,72 @@
                           <a:ea typeface="Malgun Gothic" pitchFamily="34" charset="-122"/>
                           <a:cs typeface="Malgun Gothic" pitchFamily="34" charset="-120"/>
                         </a:rPr>
-                        <a:t>2</a:t>
+                        <a:t>1</a:t>
+                      </a:r>
+                      <a:endParaRPr lang="en-US" sz="900" dirty="0">
+                        <a:latin typeface="Malgun Gothic" charset="0"/>
+                        <a:ea typeface="Malgun Gothic" charset="0"/>
+                        <a:cs typeface="Malgun Gothic" charset="0"/>
+                      </a:endParaRPr>
+                    </a:p>
+                  </a:txBody>
+                  <a:tcPr marL="38100" marR="38100" marT="12700" marB="12700" anchor="ctr">
+                    <a:lnL w="6350" cap="flat" cmpd="sng" algn="ctr">
+                      <a:solidFill>
+                        <a:srgbClr val="FFFFFF"/>
+                      </a:solidFill>
+                      <a:prstDash val="solid"/>
+                      <a:round/>
+                      <a:headEnd type="none" w="med" len="med"/>
+                      <a:tailEnd type="none" w="med" len="med"/>
+                    </a:lnL>
+                    <a:lnR w="6350" cap="flat" cmpd="sng" algn="ctr">
+                      <a:solidFill>
+                        <a:srgbClr val="FFFFFF"/>
+                      </a:solidFill>
+                      <a:prstDash val="solid"/>
+                      <a:round/>
+                      <a:headEnd type="none" w="med" len="med"/>
+                      <a:tailEnd type="none" w="med" len="med"/>
+                    </a:lnR>
+                    <a:lnT w="6350" cap="flat" cmpd="sng" algn="ctr">
+                      <a:solidFill>
+                        <a:srgbClr val="FFFFFF"/>
+                      </a:solidFill>
+                      <a:prstDash val="solid"/>
+                      <a:round/>
+                      <a:headEnd type="none" w="med" len="med"/>
+                      <a:tailEnd type="none" w="med" len="med"/>
+                    </a:lnT>
+                    <a:lnB w="6350" cap="flat" cmpd="sng" algn="ctr">
+                      <a:solidFill>
+                        <a:srgbClr val="DDE3EB"/>
+                      </a:solidFill>
+                      <a:prstDash val="solid"/>
+                      <a:round/>
+                      <a:headEnd type="none" w="med" len="med"/>
+                      <a:tailEnd type="none" w="med" len="med"/>
+                    </a:lnB>
+                  </a:tcPr>
+                </a:tc>
+                <a:tc>
+                  <a:txBody>
+                    <a:bodyPr/>
+                    <a:lstStyle/>
+                    <a:p>
+                      <a:pPr algn="ctr" indent="0" marL="0">
+                        <a:buNone/>
+                      </a:pPr>
+                      <a:r>
+                        <a:rPr lang="en-US" sz="900" dirty="0">
+                          <a:solidFill>
+                            <a:srgbClr val="A9B3C1"/>
+                          </a:solidFill>
+                          <a:latin typeface="Malgun Gothic" pitchFamily="34" charset="0"/>
+                          <a:ea typeface="Malgun Gothic" pitchFamily="34" charset="-122"/>
+                          <a:cs typeface="Malgun Gothic" pitchFamily="34" charset="-120"/>
+                        </a:rPr>
+                        <a:t>0</a:t>
                       </a:r>
                       <a:endParaRPr lang="en-US" sz="900" dirty="0">
                         <a:latin typeface="Malgun Gothic" charset="0"/>
@@ -3025,139 +3158,9 @@
                         <a:buNone/>
                       </a:pPr>
                       <a:r>
-                        <a:rPr lang="en-US" sz="900" dirty="0">
+                        <a:rPr lang="en-US" sz="900" b="1" dirty="0">
                           <a:solidFill>
-                            <a:srgbClr val="A9B3C1"/>
-                          </a:solidFill>
-                          <a:latin typeface="Malgun Gothic" pitchFamily="34" charset="0"/>
-                          <a:ea typeface="Malgun Gothic" pitchFamily="34" charset="-122"/>
-                          <a:cs typeface="Malgun Gothic" pitchFamily="34" charset="-120"/>
-                        </a:rPr>
-                        <a:t>0</a:t>
-                      </a:r>
-                      <a:endParaRPr lang="en-US" sz="900" dirty="0">
-                        <a:latin typeface="Malgun Gothic" charset="0"/>
-                        <a:ea typeface="Malgun Gothic" charset="0"/>
-                        <a:cs typeface="Malgun Gothic" charset="0"/>
-                      </a:endParaRPr>
-                    </a:p>
-                  </a:txBody>
-                  <a:tcPr marL="38100" marR="38100" marT="12700" marB="12700" anchor="ctr">
-                    <a:lnL w="6350" cap="flat" cmpd="sng" algn="ctr">
-                      <a:solidFill>
-                        <a:srgbClr val="FFFFFF"/>
-                      </a:solidFill>
-                      <a:prstDash val="solid"/>
-                      <a:round/>
-                      <a:headEnd type="none" w="med" len="med"/>
-                      <a:tailEnd type="none" w="med" len="med"/>
-                    </a:lnL>
-                    <a:lnR w="6350" cap="flat" cmpd="sng" algn="ctr">
-                      <a:solidFill>
-                        <a:srgbClr val="FFFFFF"/>
-                      </a:solidFill>
-                      <a:prstDash val="solid"/>
-                      <a:round/>
-                      <a:headEnd type="none" w="med" len="med"/>
-                      <a:tailEnd type="none" w="med" len="med"/>
-                    </a:lnR>
-                    <a:lnT w="6350" cap="flat" cmpd="sng" algn="ctr">
-                      <a:solidFill>
-                        <a:srgbClr val="FFFFFF"/>
-                      </a:solidFill>
-                      <a:prstDash val="solid"/>
-                      <a:round/>
-                      <a:headEnd type="none" w="med" len="med"/>
-                      <a:tailEnd type="none" w="med" len="med"/>
-                    </a:lnT>
-                    <a:lnB w="6350" cap="flat" cmpd="sng" algn="ctr">
-                      <a:solidFill>
-                        <a:srgbClr val="DDE3EB"/>
-                      </a:solidFill>
-                      <a:prstDash val="solid"/>
-                      <a:round/>
-                      <a:headEnd type="none" w="med" len="med"/>
-                      <a:tailEnd type="none" w="med" len="med"/>
-                    </a:lnB>
-                  </a:tcPr>
-                </a:tc>
-                <a:tc>
-                  <a:txBody>
-                    <a:bodyPr/>
-                    <a:lstStyle/>
-                    <a:p>
-                      <a:pPr algn="ctr" indent="0" marL="0">
-                        <a:buNone/>
-                      </a:pPr>
-                      <a:r>
-                        <a:rPr lang="en-US" sz="900" dirty="0">
-                          <a:solidFill>
-                            <a:srgbClr val="A9B3C1"/>
-                          </a:solidFill>
-                          <a:latin typeface="Malgun Gothic" pitchFamily="34" charset="0"/>
-                          <a:ea typeface="Malgun Gothic" pitchFamily="34" charset="-122"/>
-                          <a:cs typeface="Malgun Gothic" pitchFamily="34" charset="-120"/>
-                        </a:rPr>
-                        <a:t>1</a:t>
-                      </a:r>
-                      <a:endParaRPr lang="en-US" sz="900" dirty="0">
-                        <a:latin typeface="Malgun Gothic" charset="0"/>
-                        <a:ea typeface="Malgun Gothic" charset="0"/>
-                        <a:cs typeface="Malgun Gothic" charset="0"/>
-                      </a:endParaRPr>
-                    </a:p>
-                  </a:txBody>
-                  <a:tcPr marL="38100" marR="38100" marT="12700" marB="12700" anchor="ctr">
-                    <a:lnL w="6350" cap="flat" cmpd="sng" algn="ctr">
-                      <a:solidFill>
-                        <a:srgbClr val="FFFFFF"/>
-                      </a:solidFill>
-                      <a:prstDash val="solid"/>
-                      <a:round/>
-                      <a:headEnd type="none" w="med" len="med"/>
-                      <a:tailEnd type="none" w="med" len="med"/>
-                    </a:lnL>
-                    <a:lnR w="6350" cap="flat" cmpd="sng" algn="ctr">
-                      <a:solidFill>
-                        <a:srgbClr val="FFFFFF"/>
-                      </a:solidFill>
-                      <a:prstDash val="solid"/>
-                      <a:round/>
-                      <a:headEnd type="none" w="med" len="med"/>
-                      <a:tailEnd type="none" w="med" len="med"/>
-                    </a:lnR>
-                    <a:lnT w="6350" cap="flat" cmpd="sng" algn="ctr">
-                      <a:solidFill>
-                        <a:srgbClr val="FFFFFF"/>
-                      </a:solidFill>
-                      <a:prstDash val="solid"/>
-                      <a:round/>
-                      <a:headEnd type="none" w="med" len="med"/>
-                      <a:tailEnd type="none" w="med" len="med"/>
-                    </a:lnT>
-                    <a:lnB w="6350" cap="flat" cmpd="sng" algn="ctr">
-                      <a:solidFill>
-                        <a:srgbClr val="DDE3EB"/>
-                      </a:solidFill>
-                      <a:prstDash val="solid"/>
-                      <a:round/>
-                      <a:headEnd type="none" w="med" len="med"/>
-                      <a:tailEnd type="none" w="med" len="med"/>
-                    </a:lnB>
-                  </a:tcPr>
-                </a:tc>
-                <a:tc>
-                  <a:txBody>
-                    <a:bodyPr/>
-                    <a:lstStyle/>
-                    <a:p>
-                      <a:pPr algn="ctr" indent="0" marL="0">
-                        <a:buNone/>
-                      </a:pPr>
-                      <a:r>
-                        <a:rPr lang="en-US" sz="900" dirty="0">
-                          <a:solidFill>
-                            <a:srgbClr val="A9B3C1"/>
+                            <a:srgbClr val="16305B"/>
                           </a:solidFill>
                           <a:latin typeface="Malgun Gothic" pitchFamily="34" charset="0"/>
                           <a:ea typeface="Malgun Gothic" pitchFamily="34" charset="-122"/>
@@ -3209,6 +3212,9 @@
                       <a:headEnd type="none" w="med" len="med"/>
                       <a:tailEnd type="none" w="med" len="med"/>
                     </a:lnB>
+                    <a:solidFill>
+                      <a:srgbClr val="CADEEA"/>
+                    </a:solidFill>
                   </a:tcPr>
                 </a:tc>
                 <a:tc>
@@ -3220,9 +3226,9 @@
                         <a:buNone/>
                       </a:pPr>
                       <a:r>
-                        <a:rPr lang="en-US" sz="900" dirty="0">
+                        <a:rPr lang="en-US" sz="900" b="1" dirty="0">
                           <a:solidFill>
-                            <a:srgbClr val="A9B3C1"/>
+                            <a:srgbClr val="16305B"/>
                           </a:solidFill>
                           <a:latin typeface="Malgun Gothic" pitchFamily="34" charset="0"/>
                           <a:ea typeface="Malgun Gothic" pitchFamily="34" charset="-122"/>
@@ -3274,6 +3280,9 @@
                       <a:headEnd type="none" w="med" len="med"/>
                       <a:tailEnd type="none" w="med" len="med"/>
                     </a:lnB>
+                    <a:solidFill>
+                      <a:srgbClr val="CBE0EB"/>
+                    </a:solidFill>
                   </a:tcPr>
                 </a:tc>
               </a:tr>
@@ -3352,9 +3361,9 @@
                         <a:buNone/>
                       </a:pPr>
                       <a:r>
-                        <a:rPr lang="en-US" sz="900" dirty="0">
+                        <a:rPr lang="en-US" sz="900" b="1" dirty="0">
                           <a:solidFill>
-                            <a:srgbClr val="A9B3C1"/>
+                            <a:srgbClr val="16305B"/>
                           </a:solidFill>
                           <a:latin typeface="Malgun Gothic" pitchFamily="34" charset="0"/>
                           <a:ea typeface="Malgun Gothic" pitchFamily="34" charset="-122"/>
@@ -3406,6 +3415,9 @@
                       <a:headEnd type="none" w="med" len="med"/>
                       <a:tailEnd type="none" w="med" len="med"/>
                     </a:lnB>
+                    <a:solidFill>
+                      <a:srgbClr val="CBE0EB"/>
+                    </a:solidFill>
                   </a:tcPr>
                 </a:tc>
                 <a:tc>
@@ -3417,9 +3429,9 @@
                         <a:buNone/>
                       </a:pPr>
                       <a:r>
-                        <a:rPr lang="en-US" sz="900" dirty="0">
+                        <a:rPr lang="en-US" sz="900" b="1" dirty="0">
                           <a:solidFill>
-                            <a:srgbClr val="A9B3C1"/>
+                            <a:srgbClr val="16305B"/>
                           </a:solidFill>
                           <a:latin typeface="Malgun Gothic" pitchFamily="34" charset="0"/>
                           <a:ea typeface="Malgun Gothic" pitchFamily="34" charset="-122"/>
@@ -3471,6 +3483,9 @@
                       <a:headEnd type="none" w="med" len="med"/>
                       <a:tailEnd type="none" w="med" len="med"/>
                     </a:lnB>
+                    <a:solidFill>
+                      <a:srgbClr val="CADEEA"/>
+                    </a:solidFill>
                   </a:tcPr>
                 </a:tc>
                 <a:tc>
@@ -3482,9 +3497,9 @@
                         <a:buNone/>
                       </a:pPr>
                       <a:r>
-                        <a:rPr lang="en-US" sz="900" dirty="0">
+                        <a:rPr lang="en-US" sz="900" b="1" dirty="0">
                           <a:solidFill>
-                            <a:srgbClr val="A9B3C1"/>
+                            <a:srgbClr val="16305B"/>
                           </a:solidFill>
                           <a:latin typeface="Malgun Gothic" pitchFamily="34" charset="0"/>
                           <a:ea typeface="Malgun Gothic" pitchFamily="34" charset="-122"/>
@@ -3536,6 +3551,9 @@
                       <a:headEnd type="none" w="med" len="med"/>
                       <a:tailEnd type="none" w="med" len="med"/>
                     </a:lnB>
+                    <a:solidFill>
+                      <a:srgbClr val="CDE2ED"/>
+                    </a:solidFill>
                   </a:tcPr>
                 </a:tc>
                 <a:tc>
@@ -3615,9 +3633,9 @@
                         <a:buNone/>
                       </a:pPr>
                       <a:r>
-                        <a:rPr lang="en-US" sz="900" dirty="0">
+                        <a:rPr lang="en-US" sz="900" b="1" dirty="0">
                           <a:solidFill>
-                            <a:srgbClr val="A9B3C1"/>
+                            <a:srgbClr val="16305B"/>
                           </a:solidFill>
                           <a:latin typeface="Malgun Gothic" pitchFamily="34" charset="0"/>
                           <a:ea typeface="Malgun Gothic" pitchFamily="34" charset="-122"/>
@@ -3669,6 +3687,9 @@
                       <a:headEnd type="none" w="med" len="med"/>
                       <a:tailEnd type="none" w="med" len="med"/>
                     </a:lnB>
+                    <a:solidFill>
+                      <a:srgbClr val="C7DBE8"/>
+                    </a:solidFill>
                   </a:tcPr>
                 </a:tc>
                 <a:tc>
@@ -5476,9 +5497,9 @@
                         <a:buNone/>
                       </a:pPr>
                       <a:r>
-                        <a:rPr lang="en-US" sz="900" dirty="0">
+                        <a:rPr lang="en-US" sz="900" b="1" dirty="0">
                           <a:solidFill>
-                            <a:srgbClr val="A9B3C1"/>
+                            <a:srgbClr val="16305B"/>
                           </a:solidFill>
                           <a:latin typeface="Malgun Gothic" pitchFamily="34" charset="0"/>
                           <a:ea typeface="Malgun Gothic" pitchFamily="34" charset="-122"/>
@@ -5530,6 +5551,9 @@
                       <a:headEnd type="none" w="med" len="med"/>
                       <a:tailEnd type="none" w="med" len="med"/>
                     </a:lnB>
+                    <a:solidFill>
+                      <a:srgbClr val="C6DAE6"/>
+                    </a:solidFill>
                   </a:tcPr>
                 </a:tc>
                 <a:tc>
@@ -5978,7 +6002,7 @@
                 <a:ea typeface="Malgun Gothic" pitchFamily="34" charset="-122"/>
                 <a:cs typeface="Malgun Gothic" pitchFamily="34" charset="-120"/>
               </a:rPr>
-              <a:t>ST = 그 변수가 응답 변동에 미치는 전체 영향 (혼자 내는 효과 + 다른 변수와 얽힌 효과) · 색 칸 = 5% 이상 · GPR 모델로 계산</a:t>
+              <a:t>ST = 그 변수가 응답 변동에 미치는 전체 영향 (혼자 내는 효과 + 다른 변수와 얽힌 효과) · 색 칸 = 2% 이상 (선별 기준과 동일) · GPR 모델로 계산</a:t>
             </a:r>
             <a:endParaRPr lang="en-US" sz="850" dirty="0"/>
           </a:p>

--- a/민감도_장표.pptx
+++ b/민감도_장표.pptx
@@ -502,7 +502,7 @@
           <a:p>
             <a:r>
               <a:rPr lang="en-US" dirty="0"/>
-              <a:t>GPR 모델로 Sobol 지수를 계산해 변수별 민감도를 봤습니다. 왼쪽 표는 총효과 지수로, 변수가 혼자 내는 효과와 다른 변수와 얽혀서 내는 효과를 합친 전체 영향입니다. 1차 핀 개수는 차압·최고온도·1차 균일도를, 2차 핀 개수는 온도편차·2차 균일도를 좌우합니다. 오른쪽은 교호작용 비율로, 온도나 분기비는 대부분 변수 하나씩의 효과로 설명되지만 균일도는 13~19%가 변수끼리 얽혀서 생깁니다. 이런 복잡한 영역은 80점으로는 아직 데이터가 부족해서, 차월에는 불확실성이 큰 영역에 해석을 추가하는 적응 샘플링을 진행합니다.</a:t>
+              <a:t>GPR 대리모델로 설계 약 16만 개를 예측해서 Sobol 지수를 계산했습니다. 왼쪽 표는 총효과 지수로, 변수가 혼자 내는 효과와 다른 변수와 얽혀서 내는 효과를 합친 전체 영향입니다. 1차 핀 개수는 차압·최고온도·1차 균일도를, 2차 핀 개수는 온도편차·2차 균일도를 좌우합니다. 오른쪽은 교호작용 비율로, 온도나 분기비는 대부분 변수 하나씩의 효과로 설명되지만 균일도는 13~19%가 변수끼리 얽혀서 생깁니다. 이런 복잡한 영역은 80점으로는 아직 데이터가 부족해서, 차월에는 불확실성이 큰 영역에 해석을 추가하는 적응 샘플링을 진행합니다.</a:t>
             </a:r>
             <a:endParaRPr lang="en-US" dirty="0"/>
           </a:p>
@@ -6002,7 +6002,7 @@
                 <a:ea typeface="Malgun Gothic" pitchFamily="34" charset="-122"/>
                 <a:cs typeface="Malgun Gothic" pitchFamily="34" charset="-120"/>
               </a:rPr>
-              <a:t>ST = 그 변수가 응답 변동에 미치는 전체 영향 (혼자 내는 효과 + 다른 변수와 얽힌 효과) · 색 칸 = 2% 이상 (선별 기준과 동일) · GPR 모델로 계산</a:t>
+              <a:t>ST = 그 변수가 응답 변동에 미치는 전체 영향 (혼자 내는 효과 + 다른 변수와 얽힌 효과) · 색 칸 = 2% 이상 (선별 기준과 동일) · GPR로 설계 약 16만 개를 예측해 계산</a:t>
             </a:r>
             <a:endParaRPr lang="en-US" sz="850" dirty="0"/>
           </a:p>

--- a/민감도_장표.pptx
+++ b/민감도_장표.pptx
@@ -502,7 +502,7 @@
           <a:p>
             <a:r>
               <a:rPr lang="en-US" dirty="0"/>
-              <a:t>GPR 대리모델로 설계 약 16만 개를 예측해서 Sobol 지수를 계산했습니다. 왼쪽 표는 총효과 지수로, 변수가 혼자 내는 효과와 다른 변수와 얽혀서 내는 효과를 합친 전체 영향입니다. 1차 핀 개수는 차압·최고온도·1차 균일도를, 2차 핀 개수는 온도편차·2차 균일도를 좌우합니다. 오른쪽은 교호작용 비율로, 온도나 분기비는 대부분 변수 하나씩의 효과로 설명되지만 균일도는 13~19%가 변수끼리 얽혀서 생깁니다. 이런 복잡한 영역은 80점으로는 아직 데이터가 부족해서, 차월에는 불확실성이 큰 영역에 해석을 추가하는 적응 샘플링을 진행합니다.</a:t>
+              <a:t>변수별 민감도는 이렇게 계산했습니다. 먼저 GPR 대리모델로 설계 약 16만 개의 성능을 예측하고, 변수를 하나씩만 바꾼 설계끼리 결과를 비교해서, 응답이 변하는 몫을 변수별 퍼센트로 나눴습니다. 왼쪽 표의 숫자는 그 변수가 혼자 또는 다른 변수와 얽혀서 관여한 몫입니다. 1차 핀 개수는 차압과 1차 균일도를, 2차 핀 개수는 2차 균일도를 좌우합니다. 오른쪽은 변수 하나로는 설명되지 않고 변수끼리 얽혀서 생긴 몫으로, 온도나 분기비는 작지만 균일도는 13~19%로 큽니다.</a:t>
             </a:r>
             <a:endParaRPr lang="en-US" dirty="0"/>
           </a:p>
@@ -1011,7 +1011,7 @@
                 <a:ea typeface="Malgun Gothic" pitchFamily="34" charset="-122"/>
                 <a:cs typeface="Malgun Gothic" pitchFamily="34" charset="-120"/>
               </a:rPr>
-              <a:t>변수별 민감도 및 교호작용  —  Sobol 지수</a:t>
+              <a:t>변수별 민감도 및 교호작용</a:t>
             </a:r>
             <a:endParaRPr lang="en-US" sz="2200" dirty="0"/>
           </a:p>
@@ -1025,12 +1025,12 @@
         </p:nvSpPr>
         <p:spPr>
           <a:xfrm>
-            <a:off x="502920" y="1188720"/>
-            <a:ext cx="6400800" cy="4160520"/>
+            <a:off x="502920" y="1143000"/>
+            <a:ext cx="3520440" cy="786384"/>
           </a:xfrm>
           <a:prstGeom prst="roundRect">
             <a:avLst>
-              <a:gd name="adj" fmla="val 1319"/>
+              <a:gd name="adj" fmla="val 6977"/>
             </a:avLst>
           </a:prstGeom>
           <a:solidFill>
@@ -1059,7 +1059,565 @@
         </p:nvSpPr>
         <p:spPr>
           <a:xfrm>
-            <a:off x="758952" y="1463040"/>
+            <a:off x="649224" y="1389888"/>
+            <a:ext cx="292608" cy="292608"/>
+          </a:xfrm>
+          <a:prstGeom prst="ellipse">
+            <a:avLst/>
+          </a:prstGeom>
+          <a:solidFill>
+            <a:srgbClr val="16305B"/>
+          </a:solidFill>
+          <a:ln w="12700">
+            <a:solidFill>
+              <a:srgbClr val="16305B"/>
+            </a:solidFill>
+            <a:prstDash val="solid"/>
+          </a:ln>
+        </p:spPr>
+      </p:sp>
+      <p:sp>
+        <p:nvSpPr>
+          <p:cNvPr id="8" name="Text 6"/>
+          <p:cNvSpPr txBox="1"/>
+          <p:nvPr/>
+        </p:nvSpPr>
+        <p:spPr>
+          <a:xfrm>
+            <a:off x="649224" y="1389888"/>
+            <a:ext cx="292608" cy="292608"/>
+          </a:xfrm>
+          <a:prstGeom prst="rect">
+            <a:avLst/>
+          </a:prstGeom>
+          <a:noFill/>
+          <a:ln/>
+        </p:spPr>
+        <p:txBody>
+          <a:bodyPr wrap="square" lIns="0" tIns="0" rIns="0" bIns="0" rtlCol="0" anchor="ctr"/>
+          <a:lstStyle/>
+          <a:p>
+            <a:pPr algn="ctr" indent="0" marL="0">
+              <a:buNone/>
+            </a:pPr>
+            <a:r>
+              <a:rPr lang="en-US" sz="1000" b="1" dirty="0">
+                <a:solidFill>
+                  <a:srgbClr val="FFFFFF"/>
+                </a:solidFill>
+                <a:latin typeface="Malgun Gothic" pitchFamily="34" charset="0"/>
+                <a:ea typeface="Malgun Gothic" pitchFamily="34" charset="-122"/>
+                <a:cs typeface="Malgun Gothic" pitchFamily="34" charset="-120"/>
+              </a:rPr>
+              <a:t>1</a:t>
+            </a:r>
+            <a:endParaRPr lang="en-US" sz="1000" dirty="0"/>
+          </a:p>
+        </p:txBody>
+      </p:sp>
+      <p:sp>
+        <p:nvSpPr>
+          <p:cNvPr id="9" name="Text 7"/>
+          <p:cNvSpPr txBox="1"/>
+          <p:nvPr/>
+        </p:nvSpPr>
+        <p:spPr>
+          <a:xfrm>
+            <a:off x="1051560" y="1143000"/>
+            <a:ext cx="2880360" cy="786384"/>
+          </a:xfrm>
+          <a:prstGeom prst="rect">
+            <a:avLst/>
+          </a:prstGeom>
+          <a:noFill/>
+          <a:ln/>
+        </p:spPr>
+        <p:txBody>
+          <a:bodyPr wrap="square" lIns="0" tIns="0" rIns="0" bIns="0" rtlCol="0" anchor="ctr"/>
+          <a:lstStyle/>
+          <a:p>
+            <a:pPr indent="0" marL="0">
+              <a:lnSpc>
+                <a:spcPct val="120000"/>
+              </a:lnSpc>
+              <a:buNone/>
+            </a:pPr>
+            <a:r>
+              <a:rPr lang="en-US" sz="1000" b="1" dirty="0">
+                <a:solidFill>
+                  <a:srgbClr val="16305B"/>
+                </a:solidFill>
+                <a:latin typeface="Malgun Gothic" pitchFamily="34" charset="0"/>
+                <a:ea typeface="Malgun Gothic" pitchFamily="34" charset="-122"/>
+                <a:cs typeface="Malgun Gothic" pitchFamily="34" charset="-120"/>
+              </a:rPr>
+              <a:t>대리모델로 설계 약 16만 개 예측</a:t>
+            </a:r>
+            <a:endParaRPr lang="en-US" sz="1000" dirty="0"/>
+          </a:p>
+          <a:p>
+            <a:pPr indent="0" marL="0">
+              <a:lnSpc>
+                <a:spcPct val="120000"/>
+              </a:lnSpc>
+              <a:buNone/>
+            </a:pPr>
+            <a:r>
+              <a:rPr lang="en-US" sz="860" dirty="0">
+                <a:solidFill>
+                  <a:srgbClr val="6B7A8F"/>
+                </a:solidFill>
+                <a:latin typeface="Malgun Gothic" pitchFamily="34" charset="0"/>
+                <a:ea typeface="Malgun Gothic" pitchFamily="34" charset="-122"/>
+                <a:cs typeface="Malgun Gothic" pitchFamily="34" charset="-120"/>
+              </a:rPr>
+              <a:t>해석 대신 GPR로 계산 — 수십 초</a:t>
+            </a:r>
+            <a:endParaRPr lang="en-US" sz="1000" dirty="0"/>
+          </a:p>
+        </p:txBody>
+      </p:sp>
+      <p:sp>
+        <p:nvSpPr>
+          <p:cNvPr id="10" name="Text 8"/>
+          <p:cNvSpPr txBox="1"/>
+          <p:nvPr/>
+        </p:nvSpPr>
+        <p:spPr>
+          <a:xfrm>
+            <a:off x="4023360" y="1399032"/>
+            <a:ext cx="310896" cy="274320"/>
+          </a:xfrm>
+          <a:prstGeom prst="rect">
+            <a:avLst/>
+          </a:prstGeom>
+          <a:noFill/>
+          <a:ln/>
+        </p:spPr>
+        <p:txBody>
+          <a:bodyPr wrap="square" lIns="0" tIns="0" rIns="0" bIns="0" rtlCol="0" anchor="ctr"/>
+          <a:lstStyle/>
+          <a:p>
+            <a:pPr algn="ctr" indent="0" marL="0">
+              <a:buNone/>
+            </a:pPr>
+            <a:r>
+              <a:rPr lang="en-US" sz="1000" dirty="0">
+                <a:solidFill>
+                  <a:srgbClr val="9FB0C6"/>
+                </a:solidFill>
+                <a:latin typeface="Malgun Gothic" pitchFamily="34" charset="0"/>
+                <a:ea typeface="Malgun Gothic" pitchFamily="34" charset="-122"/>
+                <a:cs typeface="Malgun Gothic" pitchFamily="34" charset="-120"/>
+              </a:rPr>
+              <a:t>▶</a:t>
+            </a:r>
+            <a:endParaRPr lang="en-US" sz="1000" dirty="0"/>
+          </a:p>
+        </p:txBody>
+      </p:sp>
+      <p:sp>
+        <p:nvSpPr>
+          <p:cNvPr id="11" name="Shape 9"/>
+          <p:cNvSpPr/>
+          <p:nvPr/>
+        </p:nvSpPr>
+        <p:spPr>
+          <a:xfrm>
+            <a:off x="4334256" y="1143000"/>
+            <a:ext cx="3520440" cy="786384"/>
+          </a:xfrm>
+          <a:prstGeom prst="roundRect">
+            <a:avLst>
+              <a:gd name="adj" fmla="val 6977"/>
+            </a:avLst>
+          </a:prstGeom>
+          <a:solidFill>
+            <a:srgbClr val="FFFFFF"/>
+          </a:solidFill>
+          <a:ln w="9525">
+            <a:solidFill>
+              <a:srgbClr val="DDE3EB"/>
+            </a:solidFill>
+            <a:prstDash val="solid"/>
+          </a:ln>
+          <a:effectLst>
+            <a:outerShdw sx="100000" sy="100000" kx="0" ky="0" algn="bl" rotWithShape="0" blurRad="101600" dist="12700" dir="5400000">
+              <a:srgbClr val="9AA8BC">
+                <a:alpha val="18000"/>
+              </a:srgbClr>
+            </a:outerShdw>
+          </a:effectLst>
+        </p:spPr>
+      </p:sp>
+      <p:sp>
+        <p:nvSpPr>
+          <p:cNvPr id="12" name="Shape 10"/>
+          <p:cNvSpPr/>
+          <p:nvPr/>
+        </p:nvSpPr>
+        <p:spPr>
+          <a:xfrm>
+            <a:off x="4480560" y="1389888"/>
+            <a:ext cx="292608" cy="292608"/>
+          </a:xfrm>
+          <a:prstGeom prst="ellipse">
+            <a:avLst/>
+          </a:prstGeom>
+          <a:solidFill>
+            <a:srgbClr val="16305B"/>
+          </a:solidFill>
+          <a:ln w="12700">
+            <a:solidFill>
+              <a:srgbClr val="16305B"/>
+            </a:solidFill>
+            <a:prstDash val="solid"/>
+          </a:ln>
+        </p:spPr>
+      </p:sp>
+      <p:sp>
+        <p:nvSpPr>
+          <p:cNvPr id="13" name="Text 11"/>
+          <p:cNvSpPr txBox="1"/>
+          <p:nvPr/>
+        </p:nvSpPr>
+        <p:spPr>
+          <a:xfrm>
+            <a:off x="4480560" y="1389888"/>
+            <a:ext cx="292608" cy="292608"/>
+          </a:xfrm>
+          <a:prstGeom prst="rect">
+            <a:avLst/>
+          </a:prstGeom>
+          <a:noFill/>
+          <a:ln/>
+        </p:spPr>
+        <p:txBody>
+          <a:bodyPr wrap="square" lIns="0" tIns="0" rIns="0" bIns="0" rtlCol="0" anchor="ctr"/>
+          <a:lstStyle/>
+          <a:p>
+            <a:pPr algn="ctr" indent="0" marL="0">
+              <a:buNone/>
+            </a:pPr>
+            <a:r>
+              <a:rPr lang="en-US" sz="1000" b="1" dirty="0">
+                <a:solidFill>
+                  <a:srgbClr val="FFFFFF"/>
+                </a:solidFill>
+                <a:latin typeface="Malgun Gothic" pitchFamily="34" charset="0"/>
+                <a:ea typeface="Malgun Gothic" pitchFamily="34" charset="-122"/>
+                <a:cs typeface="Malgun Gothic" pitchFamily="34" charset="-120"/>
+              </a:rPr>
+              <a:t>2</a:t>
+            </a:r>
+            <a:endParaRPr lang="en-US" sz="1000" dirty="0"/>
+          </a:p>
+        </p:txBody>
+      </p:sp>
+      <p:sp>
+        <p:nvSpPr>
+          <p:cNvPr id="14" name="Text 12"/>
+          <p:cNvSpPr txBox="1"/>
+          <p:nvPr/>
+        </p:nvSpPr>
+        <p:spPr>
+          <a:xfrm>
+            <a:off x="4882896" y="1143000"/>
+            <a:ext cx="2880360" cy="786384"/>
+          </a:xfrm>
+          <a:prstGeom prst="rect">
+            <a:avLst/>
+          </a:prstGeom>
+          <a:noFill/>
+          <a:ln/>
+        </p:spPr>
+        <p:txBody>
+          <a:bodyPr wrap="square" lIns="0" tIns="0" rIns="0" bIns="0" rtlCol="0" anchor="ctr"/>
+          <a:lstStyle/>
+          <a:p>
+            <a:pPr indent="0" marL="0">
+              <a:lnSpc>
+                <a:spcPct val="120000"/>
+              </a:lnSpc>
+              <a:buNone/>
+            </a:pPr>
+            <a:r>
+              <a:rPr lang="en-US" sz="1000" b="1" dirty="0">
+                <a:solidFill>
+                  <a:srgbClr val="16305B"/>
+                </a:solidFill>
+                <a:latin typeface="Malgun Gothic" pitchFamily="34" charset="0"/>
+                <a:ea typeface="Malgun Gothic" pitchFamily="34" charset="-122"/>
+                <a:cs typeface="Malgun Gothic" pitchFamily="34" charset="-120"/>
+              </a:rPr>
+              <a:t>변수 하나씩만 바꿔 결과 비교</a:t>
+            </a:r>
+            <a:endParaRPr lang="en-US" sz="1000" dirty="0"/>
+          </a:p>
+          <a:p>
+            <a:pPr indent="0" marL="0">
+              <a:lnSpc>
+                <a:spcPct val="120000"/>
+              </a:lnSpc>
+              <a:buNone/>
+            </a:pPr>
+            <a:r>
+              <a:rPr lang="en-US" sz="860" dirty="0">
+                <a:solidFill>
+                  <a:srgbClr val="6B7A8F"/>
+                </a:solidFill>
+                <a:latin typeface="Malgun Gothic" pitchFamily="34" charset="0"/>
+                <a:ea typeface="Malgun Gothic" pitchFamily="34" charset="-122"/>
+                <a:cs typeface="Malgun Gothic" pitchFamily="34" charset="-120"/>
+              </a:rPr>
+              <a:t>그 변수 때문에 결과가 얼마나 변하는지</a:t>
+            </a:r>
+            <a:endParaRPr lang="en-US" sz="1000" dirty="0"/>
+          </a:p>
+        </p:txBody>
+      </p:sp>
+      <p:sp>
+        <p:nvSpPr>
+          <p:cNvPr id="15" name="Text 13"/>
+          <p:cNvSpPr txBox="1"/>
+          <p:nvPr/>
+        </p:nvSpPr>
+        <p:spPr>
+          <a:xfrm>
+            <a:off x="7854696" y="1399032"/>
+            <a:ext cx="310896" cy="274320"/>
+          </a:xfrm>
+          <a:prstGeom prst="rect">
+            <a:avLst/>
+          </a:prstGeom>
+          <a:noFill/>
+          <a:ln/>
+        </p:spPr>
+        <p:txBody>
+          <a:bodyPr wrap="square" lIns="0" tIns="0" rIns="0" bIns="0" rtlCol="0" anchor="ctr"/>
+          <a:lstStyle/>
+          <a:p>
+            <a:pPr algn="ctr" indent="0" marL="0">
+              <a:buNone/>
+            </a:pPr>
+            <a:r>
+              <a:rPr lang="en-US" sz="1000" dirty="0">
+                <a:solidFill>
+                  <a:srgbClr val="9FB0C6"/>
+                </a:solidFill>
+                <a:latin typeface="Malgun Gothic" pitchFamily="34" charset="0"/>
+                <a:ea typeface="Malgun Gothic" pitchFamily="34" charset="-122"/>
+                <a:cs typeface="Malgun Gothic" pitchFamily="34" charset="-120"/>
+              </a:rPr>
+              <a:t>▶</a:t>
+            </a:r>
+            <a:endParaRPr lang="en-US" sz="1000" dirty="0"/>
+          </a:p>
+        </p:txBody>
+      </p:sp>
+      <p:sp>
+        <p:nvSpPr>
+          <p:cNvPr id="16" name="Shape 14"/>
+          <p:cNvSpPr/>
+          <p:nvPr/>
+        </p:nvSpPr>
+        <p:spPr>
+          <a:xfrm>
+            <a:off x="8165592" y="1143000"/>
+            <a:ext cx="3520440" cy="786384"/>
+          </a:xfrm>
+          <a:prstGeom prst="roundRect">
+            <a:avLst>
+              <a:gd name="adj" fmla="val 6977"/>
+            </a:avLst>
+          </a:prstGeom>
+          <a:solidFill>
+            <a:srgbClr val="16305B"/>
+          </a:solidFill>
+          <a:ln w="9525">
+            <a:solidFill>
+              <a:srgbClr val="16305B"/>
+            </a:solidFill>
+            <a:prstDash val="solid"/>
+          </a:ln>
+          <a:effectLst>
+            <a:outerShdw sx="100000" sy="100000" kx="0" ky="0" algn="bl" rotWithShape="0" blurRad="101600" dist="12700" dir="5400000">
+              <a:srgbClr val="9AA8BC">
+                <a:alpha val="18000"/>
+              </a:srgbClr>
+            </a:outerShdw>
+          </a:effectLst>
+        </p:spPr>
+      </p:sp>
+      <p:sp>
+        <p:nvSpPr>
+          <p:cNvPr id="17" name="Shape 15"/>
+          <p:cNvSpPr/>
+          <p:nvPr/>
+        </p:nvSpPr>
+        <p:spPr>
+          <a:xfrm>
+            <a:off x="8311896" y="1389888"/>
+            <a:ext cx="292608" cy="292608"/>
+          </a:xfrm>
+          <a:prstGeom prst="ellipse">
+            <a:avLst/>
+          </a:prstGeom>
+          <a:solidFill>
+            <a:srgbClr val="00A3C4"/>
+          </a:solidFill>
+          <a:ln w="12700">
+            <a:solidFill>
+              <a:srgbClr val="00A3C4"/>
+            </a:solidFill>
+            <a:prstDash val="solid"/>
+          </a:ln>
+        </p:spPr>
+      </p:sp>
+      <p:sp>
+        <p:nvSpPr>
+          <p:cNvPr id="18" name="Text 16"/>
+          <p:cNvSpPr txBox="1"/>
+          <p:nvPr/>
+        </p:nvSpPr>
+        <p:spPr>
+          <a:xfrm>
+            <a:off x="8311896" y="1389888"/>
+            <a:ext cx="292608" cy="292608"/>
+          </a:xfrm>
+          <a:prstGeom prst="rect">
+            <a:avLst/>
+          </a:prstGeom>
+          <a:noFill/>
+          <a:ln/>
+        </p:spPr>
+        <p:txBody>
+          <a:bodyPr wrap="square" lIns="0" tIns="0" rIns="0" bIns="0" rtlCol="0" anchor="ctr"/>
+          <a:lstStyle/>
+          <a:p>
+            <a:pPr algn="ctr" indent="0" marL="0">
+              <a:buNone/>
+            </a:pPr>
+            <a:r>
+              <a:rPr lang="en-US" sz="1000" b="1" dirty="0">
+                <a:solidFill>
+                  <a:srgbClr val="FFFFFF"/>
+                </a:solidFill>
+                <a:latin typeface="Malgun Gothic" pitchFamily="34" charset="0"/>
+                <a:ea typeface="Malgun Gothic" pitchFamily="34" charset="-122"/>
+                <a:cs typeface="Malgun Gothic" pitchFamily="34" charset="-120"/>
+              </a:rPr>
+              <a:t>3</a:t>
+            </a:r>
+            <a:endParaRPr lang="en-US" sz="1000" dirty="0"/>
+          </a:p>
+        </p:txBody>
+      </p:sp>
+      <p:sp>
+        <p:nvSpPr>
+          <p:cNvPr id="19" name="Text 17"/>
+          <p:cNvSpPr txBox="1"/>
+          <p:nvPr/>
+        </p:nvSpPr>
+        <p:spPr>
+          <a:xfrm>
+            <a:off x="8714232" y="1143000"/>
+            <a:ext cx="2880360" cy="786384"/>
+          </a:xfrm>
+          <a:prstGeom prst="rect">
+            <a:avLst/>
+          </a:prstGeom>
+          <a:noFill/>
+          <a:ln/>
+        </p:spPr>
+        <p:txBody>
+          <a:bodyPr wrap="square" lIns="0" tIns="0" rIns="0" bIns="0" rtlCol="0" anchor="ctr"/>
+          <a:lstStyle/>
+          <a:p>
+            <a:pPr indent="0" marL="0">
+              <a:lnSpc>
+                <a:spcPct val="120000"/>
+              </a:lnSpc>
+              <a:buNone/>
+            </a:pPr>
+            <a:r>
+              <a:rPr lang="en-US" sz="1000" b="1" dirty="0">
+                <a:solidFill>
+                  <a:srgbClr val="FFFFFF"/>
+                </a:solidFill>
+                <a:latin typeface="Malgun Gothic" pitchFamily="34" charset="0"/>
+                <a:ea typeface="Malgun Gothic" pitchFamily="34" charset="-122"/>
+                <a:cs typeface="Malgun Gothic" pitchFamily="34" charset="-120"/>
+              </a:rPr>
+              <a:t>응답 변동을 변수별 몫(%)으로 나눔</a:t>
+            </a:r>
+            <a:endParaRPr lang="en-US" sz="1000" dirty="0"/>
+          </a:p>
+          <a:p>
+            <a:pPr indent="0" marL="0">
+              <a:lnSpc>
+                <a:spcPct val="120000"/>
+              </a:lnSpc>
+              <a:buNone/>
+            </a:pPr>
+            <a:r>
+              <a:rPr lang="en-US" sz="860" dirty="0">
+                <a:solidFill>
+                  <a:srgbClr val="CFE0F2"/>
+                </a:solidFill>
+                <a:latin typeface="Malgun Gothic" pitchFamily="34" charset="0"/>
+                <a:ea typeface="Malgun Gothic" pitchFamily="34" charset="-122"/>
+                <a:cs typeface="Malgun Gothic" pitchFamily="34" charset="-120"/>
+              </a:rPr>
+              <a:t>관여한 몫 = 민감도 · 얽힌 몫 = 교호작용</a:t>
+            </a:r>
+            <a:endParaRPr lang="en-US" sz="1000" dirty="0"/>
+          </a:p>
+        </p:txBody>
+      </p:sp>
+      <p:sp>
+        <p:nvSpPr>
+          <p:cNvPr id="20" name="Shape 18"/>
+          <p:cNvSpPr/>
+          <p:nvPr/>
+        </p:nvSpPr>
+        <p:spPr>
+          <a:xfrm>
+            <a:off x="502920" y="2084832"/>
+            <a:ext cx="6400800" cy="3657600"/>
+          </a:xfrm>
+          <a:prstGeom prst="roundRect">
+            <a:avLst>
+              <a:gd name="adj" fmla="val 1500"/>
+            </a:avLst>
+          </a:prstGeom>
+          <a:solidFill>
+            <a:srgbClr val="FFFFFF"/>
+          </a:solidFill>
+          <a:ln w="9525">
+            <a:solidFill>
+              <a:srgbClr val="DDE3EB"/>
+            </a:solidFill>
+            <a:prstDash val="solid"/>
+          </a:ln>
+          <a:effectLst>
+            <a:outerShdw sx="100000" sy="100000" kx="0" ky="0" algn="bl" rotWithShape="0" blurRad="101600" dist="12700" dir="5400000">
+              <a:srgbClr val="9AA8BC">
+                <a:alpha val="18000"/>
+              </a:srgbClr>
+            </a:outerShdw>
+          </a:effectLst>
+        </p:spPr>
+      </p:sp>
+      <p:sp>
+        <p:nvSpPr>
+          <p:cNvPr id="21" name="Shape 19"/>
+          <p:cNvSpPr/>
+          <p:nvPr/>
+        </p:nvSpPr>
+        <p:spPr>
+          <a:xfrm>
+            <a:off x="758952" y="2359152"/>
             <a:ext cx="82296" cy="182880"/>
           </a:xfrm>
           <a:prstGeom prst="rect">
@@ -1078,13 +1636,13 @@
       </p:sp>
       <p:sp>
         <p:nvSpPr>
-          <p:cNvPr id="8" name="Text 6"/>
+          <p:cNvPr id="22" name="Text 20"/>
           <p:cNvSpPr txBox="1"/>
           <p:nvPr/>
         </p:nvSpPr>
         <p:spPr>
           <a:xfrm>
-            <a:off x="923544" y="1371600"/>
+            <a:off x="923544" y="2267712"/>
             <a:ext cx="4480560" cy="365760"/>
           </a:xfrm>
           <a:prstGeom prst="rect">
@@ -1109,7 +1667,7 @@
                 <a:ea typeface="Malgun Gothic" pitchFamily="34" charset="-122"/>
                 <a:cs typeface="Malgun Gothic" pitchFamily="34" charset="-120"/>
               </a:rPr>
-              <a:t>변수별 민감도  —  총효과 지수 ST (%)</a:t>
+              <a:t>변수별 민감도 (%)  —  혼자 + 얽힌 효과 포함</a:t>
             </a:r>
             <a:endParaRPr lang="en-US" sz="1300" dirty="0"/>
           </a:p>
@@ -1130,7 +1688,7 @@
           </p:nvPr>
         </p:nvGraphicFramePr>
         <p:xfrm>
-          <a:off x="777240" y="1792224"/>
+          <a:off x="777240" y="2688336"/>
           <a:ext cx="5852160" cy="914400"/>
         </p:xfrm>
         <a:graphic>
@@ -1147,7 +1705,7 @@
                 <a:gridCol w="646611"/>
                 <a:gridCol w="646611"/>
               </a:tblGrid>
-              <a:tr h="301752">
+              <a:tr h="274320">
                 <a:tc>
                   <a:txBody>
                     <a:bodyPr/>
@@ -1693,7 +2251,7 @@
                   </a:tcPr>
                 </a:tc>
               </a:tr>
-              <a:tr h="301752">
+              <a:tr h="274320">
                 <a:tc>
                   <a:txBody>
                     <a:bodyPr/>
@@ -2218,7 +2776,7 @@
                   </a:tcPr>
                 </a:tc>
               </a:tr>
-              <a:tr h="301752">
+              <a:tr h="274320">
                 <a:tc>
                   <a:txBody>
                     <a:bodyPr/>
@@ -2755,7 +3313,7 @@
                   </a:tcPr>
                 </a:tc>
               </a:tr>
-              <a:tr h="301752">
+              <a:tr h="274320">
                 <a:tc>
                   <a:txBody>
                     <a:bodyPr/>
@@ -3286,7 +3844,7 @@
                   </a:tcPr>
                 </a:tc>
               </a:tr>
-              <a:tr h="301752">
+              <a:tr h="274320">
                 <a:tc>
                   <a:txBody>
                     <a:bodyPr/>
@@ -3823,7 +4381,7 @@
                   </a:tcPr>
                 </a:tc>
               </a:tr>
-              <a:tr h="301752">
+              <a:tr h="274320">
                 <a:tc>
                   <a:txBody>
                     <a:bodyPr/>
@@ -4354,7 +4912,7 @@
                   </a:tcPr>
                 </a:tc>
               </a:tr>
-              <a:tr h="301752">
+              <a:tr h="274320">
                 <a:tc>
                   <a:txBody>
                     <a:bodyPr/>
@@ -4891,7 +5449,7 @@
                   </a:tcPr>
                 </a:tc>
               </a:tr>
-              <a:tr h="301752">
+              <a:tr h="274320">
                 <a:tc>
                   <a:txBody>
                     <a:bodyPr/>
@@ -5422,7 +5980,7 @@
                   </a:tcPr>
                 </a:tc>
               </a:tr>
-              <a:tr h="301752">
+              <a:tr h="274320">
                 <a:tc>
                   <a:txBody>
                     <a:bodyPr/>
@@ -5968,14 +6526,14 @@
       </p:graphicFrame>
       <p:sp>
         <p:nvSpPr>
-          <p:cNvPr id="10" name="Text 7"/>
+          <p:cNvPr id="24" name="Text 21"/>
           <p:cNvSpPr txBox="1"/>
           <p:nvPr/>
         </p:nvSpPr>
         <p:spPr>
           <a:xfrm>
-            <a:off x="777240" y="4617720"/>
-            <a:ext cx="5852160" cy="457200"/>
+            <a:off x="777240" y="5239512"/>
+            <a:ext cx="5852160" cy="411480"/>
           </a:xfrm>
           <a:prstGeom prst="rect">
             <a:avLst/>
@@ -6002,7 +6560,7 @@
                 <a:ea typeface="Malgun Gothic" pitchFamily="34" charset="-122"/>
                 <a:cs typeface="Malgun Gothic" pitchFamily="34" charset="-120"/>
               </a:rPr>
-              <a:t>ST = 그 변수가 응답 변동에 미치는 전체 영향 (혼자 내는 효과 + 다른 변수와 얽힌 효과) · 색 칸 = 2% 이상 (선별 기준과 동일) · GPR로 설계 약 16만 개를 예측해 계산</a:t>
+              <a:t>숫자 = 응답 변동 중 그 변수가 관여한 몫 · 색 칸 = 2% 이상 (선별 기준과 동일) · 분산 기반 민감도 분석 (Sobol 지수)</a:t>
             </a:r>
             <a:endParaRPr lang="en-US" sz="850" dirty="0"/>
           </a:p>
@@ -6010,18 +6568,18 @@
       </p:sp>
       <p:sp>
         <p:nvSpPr>
-          <p:cNvPr id="11" name="Shape 8"/>
+          <p:cNvPr id="25" name="Shape 22"/>
           <p:cNvSpPr/>
           <p:nvPr/>
         </p:nvSpPr>
         <p:spPr>
           <a:xfrm>
-            <a:off x="7132320" y="1188720"/>
-            <a:ext cx="4553712" cy="4160520"/>
+            <a:off x="7132320" y="2084832"/>
+            <a:ext cx="4553712" cy="3657600"/>
           </a:xfrm>
           <a:prstGeom prst="roundRect">
             <a:avLst>
-              <a:gd name="adj" fmla="val 1319"/>
+              <a:gd name="adj" fmla="val 1500"/>
             </a:avLst>
           </a:prstGeom>
           <a:solidFill>
@@ -6044,13 +6602,13 @@
       </p:sp>
       <p:sp>
         <p:nvSpPr>
-          <p:cNvPr id="12" name="Shape 9"/>
+          <p:cNvPr id="26" name="Shape 23"/>
           <p:cNvSpPr/>
           <p:nvPr/>
         </p:nvSpPr>
         <p:spPr>
           <a:xfrm>
-            <a:off x="7388352" y="1463040"/>
+            <a:off x="7388352" y="2359152"/>
             <a:ext cx="82296" cy="182880"/>
           </a:xfrm>
           <a:prstGeom prst="rect">
@@ -6069,13 +6627,13 @@
       </p:sp>
       <p:sp>
         <p:nvSpPr>
-          <p:cNvPr id="13" name="Text 10"/>
+          <p:cNvPr id="27" name="Text 24"/>
           <p:cNvSpPr txBox="1"/>
           <p:nvPr/>
         </p:nvSpPr>
         <p:spPr>
           <a:xfrm>
-            <a:off x="7552944" y="1371600"/>
+            <a:off x="7552944" y="2267712"/>
             <a:ext cx="4480560" cy="365760"/>
           </a:xfrm>
           <a:prstGeom prst="rect">
@@ -6100,7 +6658,7 @@
                 <a:ea typeface="Malgun Gothic" pitchFamily="34" charset="-122"/>
                 <a:cs typeface="Malgun Gothic" pitchFamily="34" charset="-120"/>
               </a:rPr>
-              <a:t>교호작용 비율  —  1 − ΣS1</a:t>
+              <a:t>교호작용 비율 (%)</a:t>
             </a:r>
             <a:endParaRPr lang="en-US" sz="1300" dirty="0"/>
           </a:p>
@@ -6108,13 +6666,13 @@
       </p:sp>
       <p:sp>
         <p:nvSpPr>
-          <p:cNvPr id="14" name="Text 11"/>
+          <p:cNvPr id="28" name="Text 25"/>
           <p:cNvSpPr txBox="1"/>
           <p:nvPr/>
         </p:nvSpPr>
         <p:spPr>
           <a:xfrm>
-            <a:off x="7406640" y="1737360"/>
+            <a:off x="7406640" y="2633472"/>
             <a:ext cx="4005072" cy="237744"/>
           </a:xfrm>
           <a:prstGeom prst="rect">
@@ -6139,7 +6697,7 @@
                 <a:ea typeface="Malgun Gothic" pitchFamily="34" charset="-122"/>
                 <a:cs typeface="Malgun Gothic" pitchFamily="34" charset="-120"/>
               </a:rPr>
-              <a:t>응답 변동 중 변수끼리 얽혀서 생기는 부분</a:t>
+              <a:t>응답 변동 중 변수 하나로는 설명 안 되고 얽혀서 생긴 몫</a:t>
             </a:r>
             <a:endParaRPr lang="en-US" sz="860" dirty="0"/>
           </a:p>
@@ -6147,13 +6705,13 @@
       </p:sp>
       <p:sp>
         <p:nvSpPr>
-          <p:cNvPr id="15" name="Text 12"/>
+          <p:cNvPr id="29" name="Text 26"/>
           <p:cNvSpPr txBox="1"/>
           <p:nvPr/>
         </p:nvSpPr>
         <p:spPr>
           <a:xfrm>
-            <a:off x="7406640" y="2066544"/>
+            <a:off x="7406640" y="2926080"/>
             <a:ext cx="804672" cy="237744"/>
           </a:xfrm>
           <a:prstGeom prst="rect">
@@ -6186,13 +6744,13 @@
       </p:sp>
       <p:sp>
         <p:nvSpPr>
-          <p:cNvPr id="16" name="Shape 13"/>
+          <p:cNvPr id="30" name="Shape 27"/>
           <p:cNvSpPr/>
           <p:nvPr/>
         </p:nvSpPr>
         <p:spPr>
           <a:xfrm>
-            <a:off x="8275320" y="2112264"/>
+            <a:off x="8275320" y="2971800"/>
             <a:ext cx="2587752" cy="146304"/>
           </a:xfrm>
           <a:prstGeom prst="rect">
@@ -6211,13 +6769,13 @@
       </p:sp>
       <p:sp>
         <p:nvSpPr>
-          <p:cNvPr id="17" name="Shape 14"/>
+          <p:cNvPr id="31" name="Shape 28"/>
           <p:cNvSpPr/>
           <p:nvPr/>
         </p:nvSpPr>
         <p:spPr>
           <a:xfrm>
-            <a:off x="8275320" y="2112264"/>
+            <a:off x="8275320" y="2971800"/>
             <a:ext cx="962644" cy="146304"/>
           </a:xfrm>
           <a:prstGeom prst="rect">
@@ -6236,13 +6794,13 @@
       </p:sp>
       <p:sp>
         <p:nvSpPr>
-          <p:cNvPr id="18" name="Text 15"/>
+          <p:cNvPr id="32" name="Text 29"/>
           <p:cNvSpPr txBox="1"/>
           <p:nvPr/>
         </p:nvSpPr>
         <p:spPr>
           <a:xfrm>
-            <a:off x="10908792" y="2066544"/>
+            <a:off x="10908792" y="2926080"/>
             <a:ext cx="457200" cy="237744"/>
           </a:xfrm>
           <a:prstGeom prst="rect">
@@ -6275,13 +6833,13 @@
       </p:sp>
       <p:sp>
         <p:nvSpPr>
-          <p:cNvPr id="19" name="Text 16"/>
+          <p:cNvPr id="33" name="Text 30"/>
           <p:cNvSpPr txBox="1"/>
           <p:nvPr/>
         </p:nvSpPr>
         <p:spPr>
           <a:xfrm>
-            <a:off x="7406640" y="2368296"/>
+            <a:off x="7406640" y="3200400"/>
             <a:ext cx="804672" cy="237744"/>
           </a:xfrm>
           <a:prstGeom prst="rect">
@@ -6314,13 +6872,13 @@
       </p:sp>
       <p:sp>
         <p:nvSpPr>
-          <p:cNvPr id="20" name="Shape 17"/>
+          <p:cNvPr id="34" name="Shape 31"/>
           <p:cNvSpPr/>
           <p:nvPr/>
         </p:nvSpPr>
         <p:spPr>
           <a:xfrm>
-            <a:off x="8275320" y="2414016"/>
+            <a:off x="8275320" y="3246120"/>
             <a:ext cx="2587752" cy="146304"/>
           </a:xfrm>
           <a:prstGeom prst="rect">
@@ -6339,13 +6897,13 @@
       </p:sp>
       <p:sp>
         <p:nvSpPr>
-          <p:cNvPr id="21" name="Shape 18"/>
+          <p:cNvPr id="35" name="Shape 32"/>
           <p:cNvSpPr/>
           <p:nvPr/>
         </p:nvSpPr>
         <p:spPr>
           <a:xfrm>
-            <a:off x="8275320" y="2414016"/>
+            <a:off x="8275320" y="3246120"/>
             <a:ext cx="331232" cy="146304"/>
           </a:xfrm>
           <a:prstGeom prst="rect">
@@ -6364,13 +6922,13 @@
       </p:sp>
       <p:sp>
         <p:nvSpPr>
-          <p:cNvPr id="22" name="Text 19"/>
+          <p:cNvPr id="36" name="Text 33"/>
           <p:cNvSpPr txBox="1"/>
           <p:nvPr/>
         </p:nvSpPr>
         <p:spPr>
           <a:xfrm>
-            <a:off x="10908792" y="2368296"/>
+            <a:off x="10908792" y="3200400"/>
             <a:ext cx="457200" cy="237744"/>
           </a:xfrm>
           <a:prstGeom prst="rect">
@@ -6403,13 +6961,13 @@
       </p:sp>
       <p:sp>
         <p:nvSpPr>
-          <p:cNvPr id="23" name="Text 20"/>
+          <p:cNvPr id="37" name="Text 34"/>
           <p:cNvSpPr txBox="1"/>
           <p:nvPr/>
         </p:nvSpPr>
         <p:spPr>
           <a:xfrm>
-            <a:off x="7406640" y="2670048"/>
+            <a:off x="7406640" y="3474720"/>
             <a:ext cx="804672" cy="237744"/>
           </a:xfrm>
           <a:prstGeom prst="rect">
@@ -6442,13 +7000,13 @@
       </p:sp>
       <p:sp>
         <p:nvSpPr>
-          <p:cNvPr id="24" name="Shape 21"/>
+          <p:cNvPr id="38" name="Shape 35"/>
           <p:cNvSpPr/>
           <p:nvPr/>
         </p:nvSpPr>
         <p:spPr>
           <a:xfrm>
-            <a:off x="8275320" y="2715768"/>
+            <a:off x="8275320" y="3520440"/>
             <a:ext cx="2587752" cy="146304"/>
           </a:xfrm>
           <a:prstGeom prst="rect">
@@ -6467,13 +7025,13 @@
       </p:sp>
       <p:sp>
         <p:nvSpPr>
-          <p:cNvPr id="25" name="Shape 22"/>
+          <p:cNvPr id="39" name="Shape 36"/>
           <p:cNvSpPr/>
           <p:nvPr/>
         </p:nvSpPr>
         <p:spPr>
           <a:xfrm>
-            <a:off x="8275320" y="2715768"/>
+            <a:off x="8275320" y="3520440"/>
             <a:ext cx="459326" cy="146304"/>
           </a:xfrm>
           <a:prstGeom prst="rect">
@@ -6492,13 +7050,13 @@
       </p:sp>
       <p:sp>
         <p:nvSpPr>
-          <p:cNvPr id="26" name="Text 23"/>
+          <p:cNvPr id="40" name="Text 37"/>
           <p:cNvSpPr txBox="1"/>
           <p:nvPr/>
         </p:nvSpPr>
         <p:spPr>
           <a:xfrm>
-            <a:off x="10908792" y="2670048"/>
+            <a:off x="10908792" y="3474720"/>
             <a:ext cx="457200" cy="237744"/>
           </a:xfrm>
           <a:prstGeom prst="rect">
@@ -6531,13 +7089,13 @@
       </p:sp>
       <p:sp>
         <p:nvSpPr>
-          <p:cNvPr id="27" name="Text 24"/>
+          <p:cNvPr id="41" name="Text 38"/>
           <p:cNvSpPr txBox="1"/>
           <p:nvPr/>
         </p:nvSpPr>
         <p:spPr>
           <a:xfrm>
-            <a:off x="7406640" y="2971800"/>
+            <a:off x="7406640" y="3749040"/>
             <a:ext cx="804672" cy="237744"/>
           </a:xfrm>
           <a:prstGeom prst="rect">
@@ -6570,13 +7128,13 @@
       </p:sp>
       <p:sp>
         <p:nvSpPr>
-          <p:cNvPr id="28" name="Shape 25"/>
+          <p:cNvPr id="42" name="Shape 39"/>
           <p:cNvSpPr/>
           <p:nvPr/>
         </p:nvSpPr>
         <p:spPr>
           <a:xfrm>
-            <a:off x="8275320" y="3017520"/>
+            <a:off x="8275320" y="3794760"/>
             <a:ext cx="2587752" cy="146304"/>
           </a:xfrm>
           <a:prstGeom prst="rect">
@@ -6595,13 +7153,13 @@
       </p:sp>
       <p:sp>
         <p:nvSpPr>
-          <p:cNvPr id="29" name="Shape 26"/>
+          <p:cNvPr id="43" name="Shape 40"/>
           <p:cNvSpPr/>
           <p:nvPr/>
         </p:nvSpPr>
         <p:spPr>
           <a:xfrm>
-            <a:off x="8275320" y="3017520"/>
+            <a:off x="8275320" y="3794760"/>
             <a:ext cx="1635459" cy="146304"/>
           </a:xfrm>
           <a:prstGeom prst="rect">
@@ -6620,13 +7178,13 @@
       </p:sp>
       <p:sp>
         <p:nvSpPr>
-          <p:cNvPr id="30" name="Text 27"/>
+          <p:cNvPr id="44" name="Text 41"/>
           <p:cNvSpPr txBox="1"/>
           <p:nvPr/>
         </p:nvSpPr>
         <p:spPr>
           <a:xfrm>
-            <a:off x="10908792" y="2971800"/>
+            <a:off x="10908792" y="3749040"/>
             <a:ext cx="457200" cy="237744"/>
           </a:xfrm>
           <a:prstGeom prst="rect">
@@ -6659,13 +7217,13 @@
       </p:sp>
       <p:sp>
         <p:nvSpPr>
-          <p:cNvPr id="31" name="Text 28"/>
+          <p:cNvPr id="45" name="Text 42"/>
           <p:cNvSpPr txBox="1"/>
           <p:nvPr/>
         </p:nvSpPr>
         <p:spPr>
           <a:xfrm>
-            <a:off x="7406640" y="3273552"/>
+            <a:off x="7406640" y="4023360"/>
             <a:ext cx="804672" cy="237744"/>
           </a:xfrm>
           <a:prstGeom prst="rect">
@@ -6698,13 +7256,13 @@
       </p:sp>
       <p:sp>
         <p:nvSpPr>
-          <p:cNvPr id="32" name="Shape 29"/>
+          <p:cNvPr id="46" name="Shape 43"/>
           <p:cNvSpPr/>
           <p:nvPr/>
         </p:nvSpPr>
         <p:spPr>
           <a:xfrm>
-            <a:off x="8275320" y="3319272"/>
+            <a:off x="8275320" y="4069080"/>
             <a:ext cx="2587752" cy="146304"/>
           </a:xfrm>
           <a:prstGeom prst="rect">
@@ -6723,13 +7281,13 @@
       </p:sp>
       <p:sp>
         <p:nvSpPr>
-          <p:cNvPr id="33" name="Shape 30"/>
+          <p:cNvPr id="47" name="Shape 44"/>
           <p:cNvSpPr/>
           <p:nvPr/>
         </p:nvSpPr>
         <p:spPr>
           <a:xfrm>
-            <a:off x="8275320" y="3319272"/>
+            <a:off x="8275320" y="4069080"/>
             <a:ext cx="2414373" cy="146304"/>
           </a:xfrm>
           <a:prstGeom prst="rect">
@@ -6748,13 +7306,13 @@
       </p:sp>
       <p:sp>
         <p:nvSpPr>
-          <p:cNvPr id="34" name="Text 31"/>
+          <p:cNvPr id="48" name="Text 45"/>
           <p:cNvSpPr txBox="1"/>
           <p:nvPr/>
         </p:nvSpPr>
         <p:spPr>
           <a:xfrm>
-            <a:off x="10908792" y="3273552"/>
+            <a:off x="10908792" y="4023360"/>
             <a:ext cx="457200" cy="237744"/>
           </a:xfrm>
           <a:prstGeom prst="rect">
@@ -6787,13 +7345,13 @@
       </p:sp>
       <p:sp>
         <p:nvSpPr>
-          <p:cNvPr id="35" name="Text 32"/>
+          <p:cNvPr id="49" name="Text 46"/>
           <p:cNvSpPr txBox="1"/>
           <p:nvPr/>
         </p:nvSpPr>
         <p:spPr>
           <a:xfrm>
-            <a:off x="7406640" y="3575304"/>
+            <a:off x="7406640" y="4297680"/>
             <a:ext cx="804672" cy="237744"/>
           </a:xfrm>
           <a:prstGeom prst="rect">
@@ -6826,13 +7384,13 @@
       </p:sp>
       <p:sp>
         <p:nvSpPr>
-          <p:cNvPr id="36" name="Shape 33"/>
+          <p:cNvPr id="50" name="Shape 47"/>
           <p:cNvSpPr/>
           <p:nvPr/>
         </p:nvSpPr>
         <p:spPr>
           <a:xfrm>
-            <a:off x="8275320" y="3621024"/>
+            <a:off x="8275320" y="4343400"/>
             <a:ext cx="2587752" cy="146304"/>
           </a:xfrm>
           <a:prstGeom prst="rect">
@@ -6851,13 +7409,13 @@
       </p:sp>
       <p:sp>
         <p:nvSpPr>
-          <p:cNvPr id="37" name="Shape 34"/>
+          <p:cNvPr id="51" name="Shape 48"/>
           <p:cNvSpPr/>
           <p:nvPr/>
         </p:nvSpPr>
         <p:spPr>
           <a:xfrm>
-            <a:off x="8275320" y="3621024"/>
+            <a:off x="8275320" y="4343400"/>
             <a:ext cx="504612" cy="146304"/>
           </a:xfrm>
           <a:prstGeom prst="rect">
@@ -6876,13 +7434,13 @@
       </p:sp>
       <p:sp>
         <p:nvSpPr>
-          <p:cNvPr id="38" name="Text 35"/>
+          <p:cNvPr id="52" name="Text 49"/>
           <p:cNvSpPr txBox="1"/>
           <p:nvPr/>
         </p:nvSpPr>
         <p:spPr>
           <a:xfrm>
-            <a:off x="10908792" y="3575304"/>
+            <a:off x="10908792" y="4297680"/>
             <a:ext cx="457200" cy="237744"/>
           </a:xfrm>
           <a:prstGeom prst="rect">
@@ -6915,13 +7473,13 @@
       </p:sp>
       <p:sp>
         <p:nvSpPr>
-          <p:cNvPr id="39" name="Text 36"/>
+          <p:cNvPr id="53" name="Text 50"/>
           <p:cNvSpPr txBox="1"/>
           <p:nvPr/>
         </p:nvSpPr>
         <p:spPr>
           <a:xfrm>
-            <a:off x="7406640" y="3877056"/>
+            <a:off x="7406640" y="4572000"/>
             <a:ext cx="804672" cy="237744"/>
           </a:xfrm>
           <a:prstGeom prst="rect">
@@ -6954,13 +7512,13 @@
       </p:sp>
       <p:sp>
         <p:nvSpPr>
-          <p:cNvPr id="40" name="Shape 37"/>
+          <p:cNvPr id="54" name="Shape 51"/>
           <p:cNvSpPr/>
           <p:nvPr/>
         </p:nvSpPr>
         <p:spPr>
           <a:xfrm>
-            <a:off x="8275320" y="3922776"/>
+            <a:off x="8275320" y="4617720"/>
             <a:ext cx="2587752" cy="146304"/>
           </a:xfrm>
           <a:prstGeom prst="rect">
@@ -6979,13 +7537,13 @@
       </p:sp>
       <p:sp>
         <p:nvSpPr>
-          <p:cNvPr id="41" name="Shape 38"/>
+          <p:cNvPr id="55" name="Shape 52"/>
           <p:cNvSpPr/>
           <p:nvPr/>
         </p:nvSpPr>
         <p:spPr>
           <a:xfrm>
-            <a:off x="8275320" y="3922776"/>
+            <a:off x="8275320" y="4617720"/>
             <a:ext cx="905713" cy="146304"/>
           </a:xfrm>
           <a:prstGeom prst="rect">
@@ -7004,13 +7562,13 @@
       </p:sp>
       <p:sp>
         <p:nvSpPr>
-          <p:cNvPr id="42" name="Text 39"/>
+          <p:cNvPr id="56" name="Text 53"/>
           <p:cNvSpPr txBox="1"/>
           <p:nvPr/>
         </p:nvSpPr>
         <p:spPr>
           <a:xfrm>
-            <a:off x="10908792" y="3877056"/>
+            <a:off x="10908792" y="4572000"/>
             <a:ext cx="457200" cy="237744"/>
           </a:xfrm>
           <a:prstGeom prst="rect">
@@ -7043,18 +7601,18 @@
       </p:sp>
       <p:sp>
         <p:nvSpPr>
-          <p:cNvPr id="43" name="Shape 40"/>
+          <p:cNvPr id="57" name="Shape 54"/>
           <p:cNvSpPr/>
           <p:nvPr/>
         </p:nvSpPr>
         <p:spPr>
           <a:xfrm>
-            <a:off x="7406640" y="4279392"/>
-            <a:ext cx="4005072" cy="914400"/>
+            <a:off x="7406640" y="4901184"/>
+            <a:ext cx="4005072" cy="731520"/>
           </a:xfrm>
           <a:prstGeom prst="roundRect">
             <a:avLst>
-              <a:gd name="adj" fmla="val 6000"/>
+              <a:gd name="adj" fmla="val 7500"/>
             </a:avLst>
           </a:prstGeom>
           <a:solidFill>
@@ -7070,14 +7628,14 @@
       </p:sp>
       <p:sp>
         <p:nvSpPr>
-          <p:cNvPr id="44" name="Text 41"/>
+          <p:cNvPr id="58" name="Text 55"/>
           <p:cNvSpPr txBox="1"/>
           <p:nvPr/>
         </p:nvSpPr>
         <p:spPr>
           <a:xfrm>
-            <a:off x="7534656" y="4279392"/>
-            <a:ext cx="3749040" cy="914400"/>
+            <a:off x="7534656" y="4901184"/>
+            <a:ext cx="3749040" cy="731520"/>
           </a:xfrm>
           <a:prstGeom prst="rect">
             <a:avLst/>
@@ -7152,18 +7710,18 @@
       </p:sp>
       <p:sp>
         <p:nvSpPr>
-          <p:cNvPr id="45" name="Shape 42"/>
+          <p:cNvPr id="59" name="Shape 56"/>
           <p:cNvSpPr/>
           <p:nvPr/>
         </p:nvSpPr>
         <p:spPr>
           <a:xfrm>
-            <a:off x="502920" y="5541264"/>
-            <a:ext cx="11183112" cy="841248"/>
+            <a:off x="502920" y="5870448"/>
+            <a:ext cx="11183112" cy="475488"/>
           </a:xfrm>
           <a:prstGeom prst="roundRect">
             <a:avLst>
-              <a:gd name="adj" fmla="val 6522"/>
+              <a:gd name="adj" fmla="val 11538"/>
             </a:avLst>
           </a:prstGeom>
           <a:solidFill>
@@ -7175,50 +7733,18 @@
             </a:solidFill>
             <a:prstDash val="solid"/>
           </a:ln>
-          <a:effectLst>
-            <a:outerShdw sx="100000" sy="100000" kx="0" ky="0" algn="bl" rotWithShape="0" blurRad="101600" dist="12700" dir="5400000">
-              <a:srgbClr val="9AA8BC">
-                <a:alpha val="18000"/>
-              </a:srgbClr>
-            </a:outerShdw>
-          </a:effectLst>
         </p:spPr>
       </p:sp>
       <p:sp>
         <p:nvSpPr>
-          <p:cNvPr id="46" name="Shape 43"/>
-          <p:cNvSpPr/>
-          <p:nvPr/>
-        </p:nvSpPr>
-        <p:spPr>
-          <a:xfrm>
-            <a:off x="832104" y="5724144"/>
-            <a:ext cx="64008" cy="164592"/>
-          </a:xfrm>
-          <a:prstGeom prst="rect">
-            <a:avLst/>
-          </a:prstGeom>
-          <a:solidFill>
-            <a:srgbClr val="00A3C4"/>
-          </a:solidFill>
-          <a:ln w="12700">
-            <a:solidFill>
-              <a:srgbClr val="00A3C4"/>
-            </a:solidFill>
-            <a:prstDash val="solid"/>
-          </a:ln>
-        </p:spPr>
-      </p:sp>
-      <p:sp>
-        <p:nvSpPr>
-          <p:cNvPr id="47" name="Text 44"/>
+          <p:cNvPr id="60" name="Text 57"/>
           <p:cNvSpPr txBox="1"/>
           <p:nvPr/>
         </p:nvSpPr>
         <p:spPr>
           <a:xfrm>
-            <a:off x="978408" y="5669280"/>
-            <a:ext cx="3291840" cy="256032"/>
+            <a:off x="777240" y="5870448"/>
+            <a:ext cx="10698480" cy="475488"/>
           </a:xfrm>
           <a:prstGeom prst="rect">
             <a:avLst/>
@@ -7234,7 +7760,7 @@
               <a:buNone/>
             </a:pPr>
             <a:r>
-              <a:rPr lang="en-US" sz="1050" b="1" dirty="0">
+              <a:rPr lang="en-US" sz="950" b="1" dirty="0">
                 <a:solidFill>
                   <a:srgbClr val="16305B"/>
                 </a:solidFill>
@@ -7244,31 +7770,6 @@
               </a:rPr>
               <a:t>핀 개수가 성능을 좌우</a:t>
             </a:r>
-            <a:endParaRPr lang="en-US" sz="1050" dirty="0"/>
-          </a:p>
-        </p:txBody>
-      </p:sp>
-      <p:sp>
-        <p:nvSpPr>
-          <p:cNvPr id="48" name="Text 45"/>
-          <p:cNvSpPr txBox="1"/>
-          <p:nvPr/>
-        </p:nvSpPr>
-        <p:spPr>
-          <a:xfrm>
-            <a:off x="978408" y="5943600"/>
-            <a:ext cx="3383280" cy="310896"/>
-          </a:xfrm>
-          <a:prstGeom prst="rect">
-            <a:avLst/>
-          </a:prstGeom>
-          <a:noFill/>
-          <a:ln/>
-        </p:spPr>
-        <p:txBody>
-          <a:bodyPr wrap="square" lIns="0" tIns="0" rIns="0" bIns="0" rtlCol="0" anchor="ctr"/>
-          <a:lstStyle/>
-          <a:p>
             <a:pPr indent="0" marL="0">
               <a:buNone/>
             </a:pPr>
@@ -7281,63 +7782,13 @@
                 <a:ea typeface="Malgun Gothic" pitchFamily="34" charset="-122"/>
                 <a:cs typeface="Malgun Gothic" pitchFamily="34" charset="-120"/>
               </a:rPr>
-              <a:t>1차 핀 → 차압 · 1차 균일도  /  2차 핀 → 2차 균일도</a:t>
+              <a:t>  1차 핀 → 차압 · 1차 균일도  /  2차 핀 → 2차 균일도          </a:t>
             </a:r>
-            <a:endParaRPr lang="en-US" sz="950" dirty="0"/>
-          </a:p>
-        </p:txBody>
-      </p:sp>
-      <p:sp>
-        <p:nvSpPr>
-          <p:cNvPr id="49" name="Shape 46"/>
-          <p:cNvSpPr/>
-          <p:nvPr/>
-        </p:nvSpPr>
-        <p:spPr>
-          <a:xfrm>
-            <a:off x="4489704" y="5724144"/>
-            <a:ext cx="64008" cy="164592"/>
-          </a:xfrm>
-          <a:prstGeom prst="rect">
-            <a:avLst/>
-          </a:prstGeom>
-          <a:solidFill>
-            <a:srgbClr val="00A3C4"/>
-          </a:solidFill>
-          <a:ln w="12700">
-            <a:solidFill>
-              <a:srgbClr val="00A3C4"/>
-            </a:solidFill>
-            <a:prstDash val="solid"/>
-          </a:ln>
-        </p:spPr>
-      </p:sp>
-      <p:sp>
-        <p:nvSpPr>
-          <p:cNvPr id="50" name="Text 47"/>
-          <p:cNvSpPr txBox="1"/>
-          <p:nvPr/>
-        </p:nvSpPr>
-        <p:spPr>
-          <a:xfrm>
-            <a:off x="4636008" y="5669280"/>
-            <a:ext cx="3291840" cy="256032"/>
-          </a:xfrm>
-          <a:prstGeom prst="rect">
-            <a:avLst/>
-          </a:prstGeom>
-          <a:noFill/>
-          <a:ln/>
-        </p:spPr>
-        <p:txBody>
-          <a:bodyPr wrap="square" lIns="0" tIns="0" rIns="0" bIns="0" rtlCol="0" anchor="ctr"/>
-          <a:lstStyle/>
-          <a:p>
             <a:pPr indent="0" marL="0">
               <a:buNone/>
             </a:pPr>
             <a:r>
-              <a:rPr lang="en-US" sz="1050" b="1" dirty="0">
+              <a:rPr lang="en-US" sz="950" b="1" dirty="0">
                 <a:solidFill>
                   <a:srgbClr val="16305B"/>
                 </a:solidFill>
@@ -7347,31 +7798,6 @@
               </a:rPr>
               <a:t>균일도는 교호작용이 큼</a:t>
             </a:r>
-            <a:endParaRPr lang="en-US" sz="1050" dirty="0"/>
-          </a:p>
-        </p:txBody>
-      </p:sp>
-      <p:sp>
-        <p:nvSpPr>
-          <p:cNvPr id="51" name="Text 48"/>
-          <p:cNvSpPr txBox="1"/>
-          <p:nvPr/>
-        </p:nvSpPr>
-        <p:spPr>
-          <a:xfrm>
-            <a:off x="4636008" y="5943600"/>
-            <a:ext cx="3383280" cy="310896"/>
-          </a:xfrm>
-          <a:prstGeom prst="rect">
-            <a:avLst/>
-          </a:prstGeom>
-          <a:noFill/>
-          <a:ln/>
-        </p:spPr>
-        <p:txBody>
-          <a:bodyPr wrap="square" lIns="0" tIns="0" rIns="0" bIns="0" rtlCol="0" anchor="ctr"/>
-          <a:lstStyle/>
-          <a:p>
             <a:pPr indent="0" marL="0">
               <a:buNone/>
             </a:pPr>
@@ -7384,110 +7810,7 @@
                 <a:ea typeface="Malgun Gothic" pitchFamily="34" charset="-122"/>
                 <a:cs typeface="Malgun Gothic" pitchFamily="34" charset="-120"/>
               </a:rPr>
-              <a:t>1차 13% · 2차 19% → 변수 조합까지 함께 봐야 함</a:t>
-            </a:r>
-            <a:endParaRPr lang="en-US" sz="950" dirty="0"/>
-          </a:p>
-        </p:txBody>
-      </p:sp>
-      <p:sp>
-        <p:nvSpPr>
-          <p:cNvPr id="52" name="Shape 49"/>
-          <p:cNvSpPr/>
-          <p:nvPr/>
-        </p:nvSpPr>
-        <p:spPr>
-          <a:xfrm>
-            <a:off x="8147304" y="5724144"/>
-            <a:ext cx="64008" cy="164592"/>
-          </a:xfrm>
-          <a:prstGeom prst="rect">
-            <a:avLst/>
-          </a:prstGeom>
-          <a:solidFill>
-            <a:srgbClr val="00A3C4"/>
-          </a:solidFill>
-          <a:ln w="12700">
-            <a:solidFill>
-              <a:srgbClr val="00A3C4"/>
-            </a:solidFill>
-            <a:prstDash val="solid"/>
-          </a:ln>
-        </p:spPr>
-      </p:sp>
-      <p:sp>
-        <p:nvSpPr>
-          <p:cNvPr id="53" name="Text 50"/>
-          <p:cNvSpPr txBox="1"/>
-          <p:nvPr/>
-        </p:nvSpPr>
-        <p:spPr>
-          <a:xfrm>
-            <a:off x="8293608" y="5669280"/>
-            <a:ext cx="3291840" cy="256032"/>
-          </a:xfrm>
-          <a:prstGeom prst="rect">
-            <a:avLst/>
-          </a:prstGeom>
-          <a:noFill/>
-          <a:ln/>
-        </p:spPr>
-        <p:txBody>
-          <a:bodyPr wrap="square" lIns="0" tIns="0" rIns="0" bIns="0" rtlCol="0" anchor="ctr"/>
-          <a:lstStyle/>
-          <a:p>
-            <a:pPr indent="0" marL="0">
-              <a:buNone/>
-            </a:pPr>
-            <a:r>
-              <a:rPr lang="en-US" sz="1050" b="1" dirty="0">
-                <a:solidFill>
-                  <a:srgbClr val="16305B"/>
-                </a:solidFill>
-                <a:latin typeface="Malgun Gothic" pitchFamily="34" charset="0"/>
-                <a:ea typeface="Malgun Gothic" pitchFamily="34" charset="-122"/>
-                <a:cs typeface="Malgun Gothic" pitchFamily="34" charset="-120"/>
-              </a:rPr>
-              <a:t>차월 — 적응 샘플링</a:t>
-            </a:r>
-            <a:endParaRPr lang="en-US" sz="1050" dirty="0"/>
-          </a:p>
-        </p:txBody>
-      </p:sp>
-      <p:sp>
-        <p:nvSpPr>
-          <p:cNvPr id="54" name="Text 51"/>
-          <p:cNvSpPr txBox="1"/>
-          <p:nvPr/>
-        </p:nvSpPr>
-        <p:spPr>
-          <a:xfrm>
-            <a:off x="8293608" y="5943600"/>
-            <a:ext cx="3383280" cy="310896"/>
-          </a:xfrm>
-          <a:prstGeom prst="rect">
-            <a:avLst/>
-          </a:prstGeom>
-          <a:noFill/>
-          <a:ln/>
-        </p:spPr>
-        <p:txBody>
-          <a:bodyPr wrap="square" lIns="0" tIns="0" rIns="0" bIns="0" rtlCol="0" anchor="ctr"/>
-          <a:lstStyle/>
-          <a:p>
-            <a:pPr indent="0" marL="0">
-              <a:buNone/>
-            </a:pPr>
-            <a:r>
-              <a:rPr lang="en-US" sz="950" dirty="0">
-                <a:solidFill>
-                  <a:srgbClr val="6B7A8F"/>
-                </a:solidFill>
-                <a:latin typeface="Malgun Gothic" pitchFamily="34" charset="0"/>
-                <a:ea typeface="Malgun Gothic" pitchFamily="34" charset="-122"/>
-                <a:cs typeface="Malgun Gothic" pitchFamily="34" charset="-120"/>
-              </a:rPr>
-              <a:t>80점으로는 데이터 부족 → 불확실성 큰 영역에 해석 추가</a:t>
+              <a:t>  1차 13% · 2차 19% → 변수 조합까지 함께 봐야 함</a:t>
             </a:r>
             <a:endParaRPr lang="en-US" sz="950" dirty="0"/>
           </a:p>

--- a/민감도_장표.pptx
+++ b/민감도_장표.pptx
@@ -502,7 +502,7 @@
           <a:p>
             <a:r>
               <a:rPr lang="en-US" dirty="0"/>
-              <a:t>변수별 민감도는 이렇게 계산했습니다. 먼저 GPR 대리모델로 설계 약 16만 개의 성능을 예측하고, 변수를 하나씩만 바꾼 설계끼리 결과를 비교해서, 응답이 변하는 몫을 변수별 퍼센트로 나눴습니다. 왼쪽 표의 숫자는 그 변수가 혼자 또는 다른 변수와 얽혀서 관여한 몫입니다. 1차 핀 개수는 차압과 1차 균일도를, 2차 핀 개수는 2차 균일도를 좌우합니다. 오른쪽은 변수 하나로는 설명되지 않고 변수끼리 얽혀서 생긴 몫으로, 온도나 분기비는 작지만 균일도는 13~19%로 큽니다.</a:t>
+              <a:t>변수별 민감도는 GPR 대리모델로 설계 약 16만 개의 성능을 예측하고, 변수를 하나씩 바꿨을 때 결과가 얼마나 변하는지 비교해서 계산했습니다. 응답 변동을 변수별 기여율로 나눴는데, 변수 하나만으로 생기는 단독 기여율과 다른 변수와의 교호작용 기여율을 합친 것이 총 기여율입니다. 왼쪽 표가 총 기여율로, 1차 핀 개수는 차압과 1차 균일도를, 2차 핀 개수는 2차 균일도를 좌우합니다. 오른쪽은 응답별 교호작용 기여율로, 온도나 분기비는 작지만 균일도는 13~19%로 큽니다. 예를 들어 분기 입구 두께는 2차 균일도에 단독으로는 7%지만 교호작용까지 합치면 18%입니다.</a:t>
             </a:r>
             <a:endParaRPr lang="en-US" dirty="0"/>
           </a:p>
@@ -1549,7 +1549,7 @@
                 <a:ea typeface="Malgun Gothic" pitchFamily="34" charset="-122"/>
                 <a:cs typeface="Malgun Gothic" pitchFamily="34" charset="-120"/>
               </a:rPr>
-              <a:t>응답 변동을 변수별 몫(%)으로 나눔</a:t>
+              <a:t>응답 변동을 변수별 기여율(%)로 분해</a:t>
             </a:r>
             <a:endParaRPr lang="en-US" sz="1000" dirty="0"/>
           </a:p>
@@ -1569,7 +1569,7 @@
                 <a:ea typeface="Malgun Gothic" pitchFamily="34" charset="-122"/>
                 <a:cs typeface="Malgun Gothic" pitchFamily="34" charset="-120"/>
               </a:rPr>
-              <a:t>관여한 몫 = 민감도 · 얽힌 몫 = 교호작용</a:t>
+              <a:t>단독 기여율 + 교호작용 기여율 = 총 기여율</a:t>
             </a:r>
             <a:endParaRPr lang="en-US" sz="1000" dirty="0"/>
           </a:p>
@@ -1667,7 +1667,7 @@
                 <a:ea typeface="Malgun Gothic" pitchFamily="34" charset="-122"/>
                 <a:cs typeface="Malgun Gothic" pitchFamily="34" charset="-120"/>
               </a:rPr>
-              <a:t>변수별 민감도 (%)  —  혼자 + 얽힌 효과 포함</a:t>
+              <a:t>변수별 민감도  —  총 기여율 (%)</a:t>
             </a:r>
             <a:endParaRPr lang="en-US" sz="1300" dirty="0"/>
           </a:p>
@@ -6560,7 +6560,7 @@
                 <a:ea typeface="Malgun Gothic" pitchFamily="34" charset="-122"/>
                 <a:cs typeface="Malgun Gothic" pitchFamily="34" charset="-120"/>
               </a:rPr>
-              <a:t>숫자 = 응답 변동 중 그 변수가 관여한 몫 · 색 칸 = 2% 이상 (선별 기준과 동일) · 분산 기반 민감도 분석 (Sobol 지수)</a:t>
+              <a:t>총 기여율 = 단독 기여율 + 교호작용 기여율 · 색 칸 = 2% 이상 (선별 기준과 동일) · 분산 기반 민감도 분석 (Sobol 지수)</a:t>
             </a:r>
             <a:endParaRPr lang="en-US" sz="850" dirty="0"/>
           </a:p>
@@ -6658,7 +6658,7 @@
                 <a:ea typeface="Malgun Gothic" pitchFamily="34" charset="-122"/>
                 <a:cs typeface="Malgun Gothic" pitchFamily="34" charset="-120"/>
               </a:rPr>
-              <a:t>교호작용 비율 (%)</a:t>
+              <a:t>교호작용 기여율 (%)</a:t>
             </a:r>
             <a:endParaRPr lang="en-US" sz="1300" dirty="0"/>
           </a:p>
@@ -6697,7 +6697,7 @@
                 <a:ea typeface="Malgun Gothic" pitchFamily="34" charset="-122"/>
                 <a:cs typeface="Malgun Gothic" pitchFamily="34" charset="-120"/>
               </a:rPr>
-              <a:t>응답 변동 중 변수 하나로는 설명 안 되고 얽혀서 생긴 몫</a:t>
+              <a:t>응답 변동 중 변수 간 교호작용이 차지하는 비율</a:t>
             </a:r>
             <a:endParaRPr lang="en-US" sz="860" dirty="0"/>
           </a:p>
@@ -7682,7 +7682,7 @@
                 <a:ea typeface="Malgun Gothic" pitchFamily="34" charset="-122"/>
                 <a:cs typeface="Malgun Gothic" pitchFamily="34" charset="-120"/>
               </a:rPr>
-              <a:t>혼자 7% → 얽힌 효과 포함 18%</a:t>
+              <a:t>단독 기여율 7% → 총 기여율 18%</a:t>
             </a:r>
             <a:endParaRPr lang="en-US" sz="900" dirty="0"/>
           </a:p>

--- a/민감도_장표.pptx
+++ b/민감도_장표.pptx
@@ -6697,7 +6697,7 @@
                 <a:ea typeface="Malgun Gothic" pitchFamily="34" charset="-122"/>
                 <a:cs typeface="Malgun Gothic" pitchFamily="34" charset="-120"/>
               </a:rPr>
-              <a:t>응답 변동 중 변수 간 교호작용이 차지하는 비율</a:t>
+              <a:t>응답별 · 모든 변수의 교호작용을 합친 비율</a:t>
             </a:r>
             <a:endParaRPr lang="en-US" sz="860" dirty="0"/>
           </a:p>
@@ -7662,7 +7662,7 @@
                 <a:ea typeface="Malgun Gothic" pitchFamily="34" charset="-122"/>
                 <a:cs typeface="Malgun Gothic" pitchFamily="34" charset="-120"/>
               </a:rPr>
-              <a:t>예) 2차 균일도 — 분기 입구 두께</a:t>
+              <a:t>예) 2차 균일도 중 분기 입구 두께 한 변수만 보면</a:t>
             </a:r>
             <a:endParaRPr lang="en-US" sz="900" dirty="0"/>
           </a:p>
@@ -7682,7 +7682,7 @@
                 <a:ea typeface="Malgun Gothic" pitchFamily="34" charset="-122"/>
                 <a:cs typeface="Malgun Gothic" pitchFamily="34" charset="-120"/>
               </a:rPr>
-              <a:t>단독 기여율 7% → 총 기여율 18%</a:t>
+              <a:t>단독 7% + 교호작용 11% = 총 기여율 18% (왼쪽 표 값)</a:t>
             </a:r>
             <a:endParaRPr lang="en-US" sz="900" dirty="0"/>
           </a:p>

--- a/민감도_장표.pptx
+++ b/민감도_장표.pptx
@@ -502,7 +502,7 @@
           <a:p>
             <a:r>
               <a:rPr lang="en-US" dirty="0"/>
-              <a:t>변수별 민감도는 GPR 대리모델로 설계 약 16만 개의 성능을 예측하고, 변수를 하나씩 바꿨을 때 결과가 얼마나 변하는지 비교해서 계산했습니다. 응답 변동을 변수별 기여율로 나눴는데, 변수 하나만으로 생기는 단독 기여율과 다른 변수와의 교호작용 기여율을 합친 것이 총 기여율입니다. 왼쪽 표가 총 기여율로, 1차 핀 개수는 차압과 1차 균일도를, 2차 핀 개수는 2차 균일도를 좌우합니다. 오른쪽은 응답별 교호작용 기여율로, 온도나 분기비는 작지만 균일도는 13~19%로 큽니다. 예를 들어 분기 입구 두께는 2차 균일도에 단독으로는 7%지만 교호작용까지 합치면 18%입니다.</a:t>
+              <a:t>변수별 민감도는 GPR 대리모델로 설계 약 16만 개의 성능을 예측하고, 변수를 하나씩 바꿨을 때 결과가 얼마나 변하는지 비교해서 계산했습니다. 응답 변동을 변수별 기여율로 나눴는데, 변수 하나만으로 생기는 단독 기여율과 다른 변수와의 교호작용 기여율을 합친 것이 총 기여율입니다. 왼쪽 표가 총 기여율로, 1차 핀 개수는 차압과 1차 균일도를, 2차 핀 개수는 2차 균일도를 좌우합니다. 오른쪽은 응답별 교호작용 기여율로, 온도나 분기비는 작지만 균일도는 13~19%로 큽니다. 온도편차는 3%라 거의 변수 하나씩의 효과로 설명되지만, 2차 균일도는 19%라 변동의 약 5분의 1이 변수 조합에서 생깁니다.</a:t>
             </a:r>
             <a:endParaRPr lang="en-US" dirty="0"/>
           </a:p>
@@ -7654,15 +7654,15 @@
               <a:buNone/>
             </a:pPr>
             <a:r>
-              <a:rPr lang="en-US" sz="900" b="1" dirty="0">
+              <a:rPr lang="en-US" sz="900" dirty="0">
                 <a:solidFill>
-                  <a:srgbClr val="16305B"/>
+                  <a:srgbClr val="1C2733"/>
                 </a:solidFill>
                 <a:latin typeface="Malgun Gothic" pitchFamily="34" charset="0"/>
                 <a:ea typeface="Malgun Gothic" pitchFamily="34" charset="-122"/>
                 <a:cs typeface="Malgun Gothic" pitchFamily="34" charset="-120"/>
               </a:rPr>
-              <a:t>예) 2차 균일도 중 분기 입구 두께 한 변수만 보면</a:t>
+              <a:t>온도편차 3% → 거의 변수 하나씩의 효과로 설명됨</a:t>
             </a:r>
             <a:endParaRPr lang="en-US" sz="900" dirty="0"/>
           </a:p>
@@ -7682,7 +7682,7 @@
                 <a:ea typeface="Malgun Gothic" pitchFamily="34" charset="-122"/>
                 <a:cs typeface="Malgun Gothic" pitchFamily="34" charset="-120"/>
               </a:rPr>
-              <a:t>단독 7% + 교호작용 11% = 총 기여율 18% (왼쪽 표 값)</a:t>
+              <a:t>2차 균일도 19% → 변동의 약 1/5이 변수 조합에서 생김</a:t>
             </a:r>
             <a:endParaRPr lang="en-US" sz="900" dirty="0"/>
           </a:p>
@@ -7694,15 +7694,15 @@
               <a:buNone/>
             </a:pPr>
             <a:r>
-              <a:rPr lang="en-US" sz="900" dirty="0">
+              <a:rPr lang="en-US" sz="900" b="1" dirty="0">
                 <a:solidFill>
-                  <a:srgbClr val="1C2733"/>
+                  <a:srgbClr val="16305B"/>
                 </a:solidFill>
                 <a:latin typeface="Malgun Gothic" pitchFamily="34" charset="0"/>
                 <a:ea typeface="Malgun Gothic" pitchFamily="34" charset="-122"/>
                 <a:cs typeface="Malgun Gothic" pitchFamily="34" charset="-120"/>
               </a:rPr>
-              <a:t>변수를 하나씩 조정해서는 최적점을 찾기 어려움</a:t>
+              <a:t>→ 균일도는 변수를 하나씩 조정해서는 최적점을 찾기 어려움</a:t>
             </a:r>
             <a:endParaRPr lang="en-US" sz="900" dirty="0"/>
           </a:p>

--- a/민감도_장표.pptx
+++ b/민감도_장표.pptx
@@ -6658,7 +6658,7 @@
                 <a:ea typeface="Malgun Gothic" pitchFamily="34" charset="-122"/>
                 <a:cs typeface="Malgun Gothic" pitchFamily="34" charset="-120"/>
               </a:rPr>
-              <a:t>교호작용 기여율 (%)</a:t>
+              <a:t>응답별 변동 구성 (%)</a:t>
             </a:r>
             <a:endParaRPr lang="en-US" sz="1300" dirty="0"/>
           </a:p>
@@ -6666,14 +6666,142 @@
       </p:sp>
       <p:sp>
         <p:nvSpPr>
-          <p:cNvPr id="28" name="Text 25"/>
+          <p:cNvPr id="28" name="Shape 25"/>
+          <p:cNvSpPr/>
+          <p:nvPr/>
+        </p:nvSpPr>
+        <p:spPr>
+          <a:xfrm>
+            <a:off x="7406640" y="2688336"/>
+            <a:ext cx="201168" cy="128016"/>
+          </a:xfrm>
+          <a:prstGeom prst="rect">
+            <a:avLst/>
+          </a:prstGeom>
+          <a:solidFill>
+            <a:srgbClr val="9FB0C6"/>
+          </a:solidFill>
+          <a:ln w="12700">
+            <a:solidFill>
+              <a:srgbClr val="9FB0C6"/>
+            </a:solidFill>
+            <a:prstDash val="solid"/>
+          </a:ln>
+        </p:spPr>
+      </p:sp>
+      <p:sp>
+        <p:nvSpPr>
+          <p:cNvPr id="29" name="Text 26"/>
           <p:cNvSpPr txBox="1"/>
           <p:nvPr/>
         </p:nvSpPr>
         <p:spPr>
           <a:xfrm>
-            <a:off x="7406640" y="2633472"/>
-            <a:ext cx="4005072" cy="237744"/>
+            <a:off x="7662672" y="2633472"/>
+            <a:ext cx="914400" cy="237744"/>
+          </a:xfrm>
+          <a:prstGeom prst="rect">
+            <a:avLst/>
+          </a:prstGeom>
+          <a:noFill/>
+          <a:ln/>
+        </p:spPr>
+        <p:txBody>
+          <a:bodyPr wrap="square" lIns="0" tIns="0" rIns="0" bIns="0" rtlCol="0" anchor="ctr"/>
+          <a:lstStyle/>
+          <a:p>
+            <a:pPr indent="0" marL="0">
+              <a:buNone/>
+            </a:pPr>
+            <a:r>
+              <a:rPr lang="en-US" sz="860" dirty="0">
+                <a:solidFill>
+                  <a:srgbClr val="1C2733"/>
+                </a:solidFill>
+                <a:latin typeface="Malgun Gothic" pitchFamily="34" charset="0"/>
+                <a:ea typeface="Malgun Gothic" pitchFamily="34" charset="-122"/>
+                <a:cs typeface="Malgun Gothic" pitchFamily="34" charset="-120"/>
+              </a:rPr>
+              <a:t>단독 효과</a:t>
+            </a:r>
+            <a:endParaRPr lang="en-US" sz="860" dirty="0"/>
+          </a:p>
+        </p:txBody>
+      </p:sp>
+      <p:sp>
+        <p:nvSpPr>
+          <p:cNvPr id="30" name="Shape 27"/>
+          <p:cNvSpPr/>
+          <p:nvPr/>
+        </p:nvSpPr>
+        <p:spPr>
+          <a:xfrm>
+            <a:off x="8641080" y="2688336"/>
+            <a:ext cx="201168" cy="128016"/>
+          </a:xfrm>
+          <a:prstGeom prst="rect">
+            <a:avLst/>
+          </a:prstGeom>
+          <a:solidFill>
+            <a:srgbClr val="00A3C4"/>
+          </a:solidFill>
+          <a:ln w="12700">
+            <a:solidFill>
+              <a:srgbClr val="00A3C4"/>
+            </a:solidFill>
+            <a:prstDash val="solid"/>
+          </a:ln>
+        </p:spPr>
+      </p:sp>
+      <p:sp>
+        <p:nvSpPr>
+          <p:cNvPr id="31" name="Text 28"/>
+          <p:cNvSpPr txBox="1"/>
+          <p:nvPr/>
+        </p:nvSpPr>
+        <p:spPr>
+          <a:xfrm>
+            <a:off x="8897112" y="2633472"/>
+            <a:ext cx="914400" cy="237744"/>
+          </a:xfrm>
+          <a:prstGeom prst="rect">
+            <a:avLst/>
+          </a:prstGeom>
+          <a:noFill/>
+          <a:ln/>
+        </p:spPr>
+        <p:txBody>
+          <a:bodyPr wrap="square" lIns="0" tIns="0" rIns="0" bIns="0" rtlCol="0" anchor="ctr"/>
+          <a:lstStyle/>
+          <a:p>
+            <a:pPr indent="0" marL="0">
+              <a:buNone/>
+            </a:pPr>
+            <a:r>
+              <a:rPr lang="en-US" sz="860" dirty="0">
+                <a:solidFill>
+                  <a:srgbClr val="1C2733"/>
+                </a:solidFill>
+                <a:latin typeface="Malgun Gothic" pitchFamily="34" charset="0"/>
+                <a:ea typeface="Malgun Gothic" pitchFamily="34" charset="-122"/>
+                <a:cs typeface="Malgun Gothic" pitchFamily="34" charset="-120"/>
+              </a:rPr>
+              <a:t>교호작용</a:t>
+            </a:r>
+            <a:endParaRPr lang="en-US" sz="860" dirty="0"/>
+          </a:p>
+        </p:txBody>
+      </p:sp>
+      <p:sp>
+        <p:nvSpPr>
+          <p:cNvPr id="32" name="Text 29"/>
+          <p:cNvSpPr txBox="1"/>
+          <p:nvPr/>
+        </p:nvSpPr>
+        <p:spPr>
+          <a:xfrm>
+            <a:off x="9875520" y="2633472"/>
+            <a:ext cx="914400" cy="237744"/>
           </a:xfrm>
           <a:prstGeom prst="rect">
             <a:avLst/>
@@ -6697,7 +6825,7 @@
                 <a:ea typeface="Malgun Gothic" pitchFamily="34" charset="-122"/>
                 <a:cs typeface="Malgun Gothic" pitchFamily="34" charset="-120"/>
               </a:rPr>
-              <a:t>응답별 · 모든 변수의 교호작용을 합친 비율</a:t>
+              <a:t>= 100%</a:t>
             </a:r>
             <a:endParaRPr lang="en-US" sz="860" dirty="0"/>
           </a:p>
@@ -6705,7 +6833,7 @@
       </p:sp>
       <p:sp>
         <p:nvSpPr>
-          <p:cNvPr id="29" name="Text 26"/>
+          <p:cNvPr id="33" name="Text 30"/>
           <p:cNvSpPr txBox="1"/>
           <p:nvPr/>
         </p:nvSpPr>
@@ -6744,39 +6872,14 @@
       </p:sp>
       <p:sp>
         <p:nvSpPr>
-          <p:cNvPr id="30" name="Shape 27"/>
+          <p:cNvPr id="34" name="Shape 31"/>
           <p:cNvSpPr/>
           <p:nvPr/>
         </p:nvSpPr>
         <p:spPr>
           <a:xfrm>
-            <a:off x="8275320" y="2971800"/>
-            <a:ext cx="2587752" cy="146304"/>
-          </a:xfrm>
-          <a:prstGeom prst="rect">
-            <a:avLst/>
-          </a:prstGeom>
-          <a:solidFill>
-            <a:srgbClr val="F0F3F7"/>
-          </a:solidFill>
-          <a:ln w="12700">
-            <a:solidFill>
-              <a:srgbClr val="F0F3F7"/>
-            </a:solidFill>
-            <a:prstDash val="solid"/>
-          </a:ln>
-        </p:spPr>
-      </p:sp>
-      <p:sp>
-        <p:nvSpPr>
-          <p:cNvPr id="31" name="Shape 28"/>
-          <p:cNvSpPr/>
-          <p:nvPr/>
-        </p:nvSpPr>
-        <p:spPr>
-          <a:xfrm>
-            <a:off x="8275320" y="2971800"/>
-            <a:ext cx="962644" cy="146304"/>
+            <a:off x="8275320" y="2953512"/>
+            <a:ext cx="2437542" cy="182880"/>
           </a:xfrm>
           <a:prstGeom prst="rect">
             <a:avLst/>
@@ -6794,13 +6897,77 @@
       </p:sp>
       <p:sp>
         <p:nvSpPr>
-          <p:cNvPr id="32" name="Text 29"/>
+          <p:cNvPr id="35" name="Text 32"/>
           <p:cNvSpPr txBox="1"/>
           <p:nvPr/>
         </p:nvSpPr>
         <p:spPr>
           <a:xfrm>
-            <a:off x="10908792" y="2926080"/>
+            <a:off x="8275320" y="2953512"/>
+            <a:ext cx="2382678" cy="182880"/>
+          </a:xfrm>
+          <a:prstGeom prst="rect">
+            <a:avLst/>
+          </a:prstGeom>
+          <a:noFill/>
+          <a:ln/>
+        </p:spPr>
+        <p:txBody>
+          <a:bodyPr wrap="square" lIns="0" tIns="0" rIns="0" bIns="0" rtlCol="0" anchor="ctr"/>
+          <a:lstStyle/>
+          <a:p>
+            <a:pPr algn="r" indent="0" marL="0">
+              <a:buNone/>
+            </a:pPr>
+            <a:r>
+              <a:rPr lang="en-US" sz="800" b="1" dirty="0">
+                <a:solidFill>
+                  <a:srgbClr val="FFFFFF"/>
+                </a:solidFill>
+                <a:latin typeface="Malgun Gothic" pitchFamily="34" charset="0"/>
+                <a:ea typeface="Malgun Gothic" pitchFamily="34" charset="-122"/>
+                <a:cs typeface="Malgun Gothic" pitchFamily="34" charset="-120"/>
+              </a:rPr>
+              <a:t>93</a:t>
+            </a:r>
+            <a:endParaRPr lang="en-US" sz="800" dirty="0"/>
+          </a:p>
+        </p:txBody>
+      </p:sp>
+      <p:sp>
+        <p:nvSpPr>
+          <p:cNvPr id="36" name="Shape 33"/>
+          <p:cNvSpPr/>
+          <p:nvPr/>
+        </p:nvSpPr>
+        <p:spPr>
+          <a:xfrm>
+            <a:off x="10712862" y="2953512"/>
+            <a:ext cx="195930" cy="182880"/>
+          </a:xfrm>
+          <a:prstGeom prst="rect">
+            <a:avLst/>
+          </a:prstGeom>
+          <a:solidFill>
+            <a:srgbClr val="7FD6E8"/>
+          </a:solidFill>
+          <a:ln w="12700">
+            <a:solidFill>
+              <a:srgbClr val="7FD6E8"/>
+            </a:solidFill>
+            <a:prstDash val="solid"/>
+          </a:ln>
+        </p:spPr>
+      </p:sp>
+      <p:sp>
+        <p:nvSpPr>
+          <p:cNvPr id="37" name="Text 34"/>
+          <p:cNvSpPr txBox="1"/>
+          <p:nvPr/>
+        </p:nvSpPr>
+        <p:spPr>
+          <a:xfrm>
+            <a:off x="10963656" y="2926080"/>
             <a:ext cx="457200" cy="237744"/>
           </a:xfrm>
           <a:prstGeom prst="rect">
@@ -6833,7 +7000,7 @@
       </p:sp>
       <p:sp>
         <p:nvSpPr>
-          <p:cNvPr id="33" name="Text 30"/>
+          <p:cNvPr id="38" name="Text 35"/>
           <p:cNvSpPr txBox="1"/>
           <p:nvPr/>
         </p:nvSpPr>
@@ -6872,39 +7039,14 @@
       </p:sp>
       <p:sp>
         <p:nvSpPr>
-          <p:cNvPr id="34" name="Shape 31"/>
+          <p:cNvPr id="39" name="Shape 36"/>
           <p:cNvSpPr/>
           <p:nvPr/>
         </p:nvSpPr>
         <p:spPr>
           <a:xfrm>
-            <a:off x="8275320" y="3246120"/>
-            <a:ext cx="2587752" cy="146304"/>
-          </a:xfrm>
-          <a:prstGeom prst="rect">
-            <a:avLst/>
-          </a:prstGeom>
-          <a:solidFill>
-            <a:srgbClr val="F0F3F7"/>
-          </a:solidFill>
-          <a:ln w="12700">
-            <a:solidFill>
-              <a:srgbClr val="F0F3F7"/>
-            </a:solidFill>
-            <a:prstDash val="solid"/>
-          </a:ln>
-        </p:spPr>
-      </p:sp>
-      <p:sp>
-        <p:nvSpPr>
-          <p:cNvPr id="35" name="Shape 32"/>
-          <p:cNvSpPr/>
-          <p:nvPr/>
-        </p:nvSpPr>
-        <p:spPr>
-          <a:xfrm>
-            <a:off x="8275320" y="3246120"/>
-            <a:ext cx="331232" cy="146304"/>
+            <a:off x="8275320" y="3227832"/>
+            <a:ext cx="2566055" cy="182880"/>
           </a:xfrm>
           <a:prstGeom prst="rect">
             <a:avLst/>
@@ -6922,13 +7064,77 @@
       </p:sp>
       <p:sp>
         <p:nvSpPr>
-          <p:cNvPr id="36" name="Text 33"/>
+          <p:cNvPr id="40" name="Text 37"/>
           <p:cNvSpPr txBox="1"/>
           <p:nvPr/>
         </p:nvSpPr>
         <p:spPr>
           <a:xfrm>
-            <a:off x="10908792" y="3200400"/>
+            <a:off x="8275320" y="3227832"/>
+            <a:ext cx="2511191" cy="182880"/>
+          </a:xfrm>
+          <a:prstGeom prst="rect">
+            <a:avLst/>
+          </a:prstGeom>
+          <a:noFill/>
+          <a:ln/>
+        </p:spPr>
+        <p:txBody>
+          <a:bodyPr wrap="square" lIns="0" tIns="0" rIns="0" bIns="0" rtlCol="0" anchor="ctr"/>
+          <a:lstStyle/>
+          <a:p>
+            <a:pPr algn="r" indent="0" marL="0">
+              <a:buNone/>
+            </a:pPr>
+            <a:r>
+              <a:rPr lang="en-US" sz="800" b="1" dirty="0">
+                <a:solidFill>
+                  <a:srgbClr val="FFFFFF"/>
+                </a:solidFill>
+                <a:latin typeface="Malgun Gothic" pitchFamily="34" charset="0"/>
+                <a:ea typeface="Malgun Gothic" pitchFamily="34" charset="-122"/>
+                <a:cs typeface="Malgun Gothic" pitchFamily="34" charset="-120"/>
+              </a:rPr>
+              <a:t>97</a:t>
+            </a:r>
+            <a:endParaRPr lang="en-US" sz="800" dirty="0"/>
+          </a:p>
+        </p:txBody>
+      </p:sp>
+      <p:sp>
+        <p:nvSpPr>
+          <p:cNvPr id="41" name="Shape 38"/>
+          <p:cNvSpPr/>
+          <p:nvPr/>
+        </p:nvSpPr>
+        <p:spPr>
+          <a:xfrm>
+            <a:off x="10841375" y="3227832"/>
+            <a:ext cx="67417" cy="182880"/>
+          </a:xfrm>
+          <a:prstGeom prst="rect">
+            <a:avLst/>
+          </a:prstGeom>
+          <a:solidFill>
+            <a:srgbClr val="7FD6E8"/>
+          </a:solidFill>
+          <a:ln w="12700">
+            <a:solidFill>
+              <a:srgbClr val="7FD6E8"/>
+            </a:solidFill>
+            <a:prstDash val="solid"/>
+          </a:ln>
+        </p:spPr>
+      </p:sp>
+      <p:sp>
+        <p:nvSpPr>
+          <p:cNvPr id="42" name="Text 39"/>
+          <p:cNvSpPr txBox="1"/>
+          <p:nvPr/>
+        </p:nvSpPr>
+        <p:spPr>
+          <a:xfrm>
+            <a:off x="10963656" y="3200400"/>
             <a:ext cx="457200" cy="237744"/>
           </a:xfrm>
           <a:prstGeom prst="rect">
@@ -6961,7 +7167,7 @@
       </p:sp>
       <p:sp>
         <p:nvSpPr>
-          <p:cNvPr id="37" name="Text 34"/>
+          <p:cNvPr id="43" name="Text 40"/>
           <p:cNvSpPr txBox="1"/>
           <p:nvPr/>
         </p:nvSpPr>
@@ -7000,39 +7206,14 @@
       </p:sp>
       <p:sp>
         <p:nvSpPr>
-          <p:cNvPr id="38" name="Shape 35"/>
+          <p:cNvPr id="44" name="Shape 41"/>
           <p:cNvSpPr/>
           <p:nvPr/>
         </p:nvSpPr>
         <p:spPr>
           <a:xfrm>
-            <a:off x="8275320" y="3520440"/>
-            <a:ext cx="2587752" cy="146304"/>
-          </a:xfrm>
-          <a:prstGeom prst="rect">
-            <a:avLst/>
-          </a:prstGeom>
-          <a:solidFill>
-            <a:srgbClr val="F0F3F7"/>
-          </a:solidFill>
-          <a:ln w="12700">
-            <a:solidFill>
-              <a:srgbClr val="F0F3F7"/>
-            </a:solidFill>
-            <a:prstDash val="solid"/>
-          </a:ln>
-        </p:spPr>
-      </p:sp>
-      <p:sp>
-        <p:nvSpPr>
-          <p:cNvPr id="39" name="Shape 36"/>
-          <p:cNvSpPr/>
-          <p:nvPr/>
-        </p:nvSpPr>
-        <p:spPr>
-          <a:xfrm>
-            <a:off x="8275320" y="3520440"/>
-            <a:ext cx="459326" cy="146304"/>
+            <a:off x="8275320" y="3502152"/>
+            <a:ext cx="2539984" cy="182880"/>
           </a:xfrm>
           <a:prstGeom prst="rect">
             <a:avLst/>
@@ -7050,13 +7231,77 @@
       </p:sp>
       <p:sp>
         <p:nvSpPr>
-          <p:cNvPr id="40" name="Text 37"/>
+          <p:cNvPr id="45" name="Text 42"/>
           <p:cNvSpPr txBox="1"/>
           <p:nvPr/>
         </p:nvSpPr>
         <p:spPr>
           <a:xfrm>
-            <a:off x="10908792" y="3474720"/>
+            <a:off x="8275320" y="3502152"/>
+            <a:ext cx="2485120" cy="182880"/>
+          </a:xfrm>
+          <a:prstGeom prst="rect">
+            <a:avLst/>
+          </a:prstGeom>
+          <a:noFill/>
+          <a:ln/>
+        </p:spPr>
+        <p:txBody>
+          <a:bodyPr wrap="square" lIns="0" tIns="0" rIns="0" bIns="0" rtlCol="0" anchor="ctr"/>
+          <a:lstStyle/>
+          <a:p>
+            <a:pPr algn="r" indent="0" marL="0">
+              <a:buNone/>
+            </a:pPr>
+            <a:r>
+              <a:rPr lang="en-US" sz="800" b="1" dirty="0">
+                <a:solidFill>
+                  <a:srgbClr val="FFFFFF"/>
+                </a:solidFill>
+                <a:latin typeface="Malgun Gothic" pitchFamily="34" charset="0"/>
+                <a:ea typeface="Malgun Gothic" pitchFamily="34" charset="-122"/>
+                <a:cs typeface="Malgun Gothic" pitchFamily="34" charset="-120"/>
+              </a:rPr>
+              <a:t>96</a:t>
+            </a:r>
+            <a:endParaRPr lang="en-US" sz="800" dirty="0"/>
+          </a:p>
+        </p:txBody>
+      </p:sp>
+      <p:sp>
+        <p:nvSpPr>
+          <p:cNvPr id="46" name="Shape 43"/>
+          <p:cNvSpPr/>
+          <p:nvPr/>
+        </p:nvSpPr>
+        <p:spPr>
+          <a:xfrm>
+            <a:off x="10815304" y="3502152"/>
+            <a:ext cx="93488" cy="182880"/>
+          </a:xfrm>
+          <a:prstGeom prst="rect">
+            <a:avLst/>
+          </a:prstGeom>
+          <a:solidFill>
+            <a:srgbClr val="7FD6E8"/>
+          </a:solidFill>
+          <a:ln w="12700">
+            <a:solidFill>
+              <a:srgbClr val="7FD6E8"/>
+            </a:solidFill>
+            <a:prstDash val="solid"/>
+          </a:ln>
+        </p:spPr>
+      </p:sp>
+      <p:sp>
+        <p:nvSpPr>
+          <p:cNvPr id="47" name="Text 44"/>
+          <p:cNvSpPr txBox="1"/>
+          <p:nvPr/>
+        </p:nvSpPr>
+        <p:spPr>
+          <a:xfrm>
+            <a:off x="10963656" y="3474720"/>
             <a:ext cx="457200" cy="237744"/>
           </a:xfrm>
           <a:prstGeom prst="rect">
@@ -7089,7 +7334,7 @@
       </p:sp>
       <p:sp>
         <p:nvSpPr>
-          <p:cNvPr id="41" name="Text 38"/>
+          <p:cNvPr id="48" name="Text 45"/>
           <p:cNvSpPr txBox="1"/>
           <p:nvPr/>
         </p:nvSpPr>
@@ -7128,24 +7373,24 @@
       </p:sp>
       <p:sp>
         <p:nvSpPr>
-          <p:cNvPr id="42" name="Shape 39"/>
+          <p:cNvPr id="49" name="Shape 46"/>
           <p:cNvSpPr/>
           <p:nvPr/>
         </p:nvSpPr>
         <p:spPr>
           <a:xfrm>
-            <a:off x="8275320" y="3794760"/>
-            <a:ext cx="2587752" cy="146304"/>
+            <a:off x="8275320" y="3776472"/>
+            <a:ext cx="2300601" cy="182880"/>
           </a:xfrm>
           <a:prstGeom prst="rect">
             <a:avLst/>
           </a:prstGeom>
           <a:solidFill>
-            <a:srgbClr val="F0F3F7"/>
+            <a:srgbClr val="9FB0C6"/>
           </a:solidFill>
           <a:ln w="12700">
             <a:solidFill>
-              <a:srgbClr val="F0F3F7"/>
+              <a:srgbClr val="9FB0C6"/>
             </a:solidFill>
             <a:prstDash val="solid"/>
           </a:ln>
@@ -7153,14 +7398,53 @@
       </p:sp>
       <p:sp>
         <p:nvSpPr>
-          <p:cNvPr id="43" name="Shape 40"/>
+          <p:cNvPr id="50" name="Text 47"/>
+          <p:cNvSpPr txBox="1"/>
+          <p:nvPr/>
+        </p:nvSpPr>
+        <p:spPr>
+          <a:xfrm>
+            <a:off x="8275320" y="3776472"/>
+            <a:ext cx="2245737" cy="182880"/>
+          </a:xfrm>
+          <a:prstGeom prst="rect">
+            <a:avLst/>
+          </a:prstGeom>
+          <a:noFill/>
+          <a:ln/>
+        </p:spPr>
+        <p:txBody>
+          <a:bodyPr wrap="square" lIns="0" tIns="0" rIns="0" bIns="0" rtlCol="0" anchor="ctr"/>
+          <a:lstStyle/>
+          <a:p>
+            <a:pPr algn="r" indent="0" marL="0">
+              <a:buNone/>
+            </a:pPr>
+            <a:r>
+              <a:rPr lang="en-US" sz="800" b="1" dirty="0">
+                <a:solidFill>
+                  <a:srgbClr val="FFFFFF"/>
+                </a:solidFill>
+                <a:latin typeface="Malgun Gothic" pitchFamily="34" charset="0"/>
+                <a:ea typeface="Malgun Gothic" pitchFamily="34" charset="-122"/>
+                <a:cs typeface="Malgun Gothic" pitchFamily="34" charset="-120"/>
+              </a:rPr>
+              <a:t>87</a:t>
+            </a:r>
+            <a:endParaRPr lang="en-US" sz="800" dirty="0"/>
+          </a:p>
+        </p:txBody>
+      </p:sp>
+      <p:sp>
+        <p:nvSpPr>
+          <p:cNvPr id="51" name="Shape 48"/>
           <p:cNvSpPr/>
           <p:nvPr/>
         </p:nvSpPr>
         <p:spPr>
           <a:xfrm>
-            <a:off x="8275320" y="3794760"/>
-            <a:ext cx="1635459" cy="146304"/>
+            <a:off x="10575921" y="3776472"/>
+            <a:ext cx="332871" cy="182880"/>
           </a:xfrm>
           <a:prstGeom prst="rect">
             <a:avLst/>
@@ -7178,13 +7462,13 @@
       </p:sp>
       <p:sp>
         <p:nvSpPr>
-          <p:cNvPr id="44" name="Text 41"/>
+          <p:cNvPr id="52" name="Text 49"/>
           <p:cNvSpPr txBox="1"/>
           <p:nvPr/>
         </p:nvSpPr>
         <p:spPr>
           <a:xfrm>
-            <a:off x="10908792" y="3749040"/>
+            <a:off x="10963656" y="3749040"/>
             <a:ext cx="457200" cy="237744"/>
           </a:xfrm>
           <a:prstGeom prst="rect">
@@ -7217,7 +7501,7 @@
       </p:sp>
       <p:sp>
         <p:nvSpPr>
-          <p:cNvPr id="45" name="Text 42"/>
+          <p:cNvPr id="53" name="Text 50"/>
           <p:cNvSpPr txBox="1"/>
           <p:nvPr/>
         </p:nvSpPr>
@@ -7256,24 +7540,24 @@
       </p:sp>
       <p:sp>
         <p:nvSpPr>
-          <p:cNvPr id="46" name="Shape 43"/>
+          <p:cNvPr id="54" name="Shape 51"/>
           <p:cNvSpPr/>
           <p:nvPr/>
         </p:nvSpPr>
         <p:spPr>
           <a:xfrm>
-            <a:off x="8275320" y="4069080"/>
-            <a:ext cx="2587752" cy="146304"/>
+            <a:off x="8275320" y="4050792"/>
+            <a:ext cx="2142066" cy="182880"/>
           </a:xfrm>
           <a:prstGeom prst="rect">
             <a:avLst/>
           </a:prstGeom>
           <a:solidFill>
-            <a:srgbClr val="F0F3F7"/>
+            <a:srgbClr val="9FB0C6"/>
           </a:solidFill>
           <a:ln w="12700">
             <a:solidFill>
-              <a:srgbClr val="F0F3F7"/>
+              <a:srgbClr val="9FB0C6"/>
             </a:solidFill>
             <a:prstDash val="solid"/>
           </a:ln>
@@ -7281,14 +7565,53 @@
       </p:sp>
       <p:sp>
         <p:nvSpPr>
-          <p:cNvPr id="47" name="Shape 44"/>
+          <p:cNvPr id="55" name="Text 52"/>
+          <p:cNvSpPr txBox="1"/>
+          <p:nvPr/>
+        </p:nvSpPr>
+        <p:spPr>
+          <a:xfrm>
+            <a:off x="8275320" y="4050792"/>
+            <a:ext cx="2087202" cy="182880"/>
+          </a:xfrm>
+          <a:prstGeom prst="rect">
+            <a:avLst/>
+          </a:prstGeom>
+          <a:noFill/>
+          <a:ln/>
+        </p:spPr>
+        <p:txBody>
+          <a:bodyPr wrap="square" lIns="0" tIns="0" rIns="0" bIns="0" rtlCol="0" anchor="ctr"/>
+          <a:lstStyle/>
+          <a:p>
+            <a:pPr algn="r" indent="0" marL="0">
+              <a:buNone/>
+            </a:pPr>
+            <a:r>
+              <a:rPr lang="en-US" sz="800" b="1" dirty="0">
+                <a:solidFill>
+                  <a:srgbClr val="FFFFFF"/>
+                </a:solidFill>
+                <a:latin typeface="Malgun Gothic" pitchFamily="34" charset="0"/>
+                <a:ea typeface="Malgun Gothic" pitchFamily="34" charset="-122"/>
+                <a:cs typeface="Malgun Gothic" pitchFamily="34" charset="-120"/>
+              </a:rPr>
+              <a:t>81</a:t>
+            </a:r>
+            <a:endParaRPr lang="en-US" sz="800" dirty="0"/>
+          </a:p>
+        </p:txBody>
+      </p:sp>
+      <p:sp>
+        <p:nvSpPr>
+          <p:cNvPr id="56" name="Shape 53"/>
           <p:cNvSpPr/>
           <p:nvPr/>
         </p:nvSpPr>
         <p:spPr>
           <a:xfrm>
-            <a:off x="8275320" y="4069080"/>
-            <a:ext cx="2414373" cy="146304"/>
+            <a:off x="10417386" y="4050792"/>
+            <a:ext cx="491406" cy="182880"/>
           </a:xfrm>
           <a:prstGeom prst="rect">
             <a:avLst/>
@@ -7306,13 +7629,13 @@
       </p:sp>
       <p:sp>
         <p:nvSpPr>
-          <p:cNvPr id="48" name="Text 45"/>
+          <p:cNvPr id="57" name="Text 54"/>
           <p:cNvSpPr txBox="1"/>
           <p:nvPr/>
         </p:nvSpPr>
         <p:spPr>
           <a:xfrm>
-            <a:off x="10908792" y="4023360"/>
+            <a:off x="10963656" y="4023360"/>
             <a:ext cx="457200" cy="237744"/>
           </a:xfrm>
           <a:prstGeom prst="rect">
@@ -7345,7 +7668,7 @@
       </p:sp>
       <p:sp>
         <p:nvSpPr>
-          <p:cNvPr id="49" name="Text 46"/>
+          <p:cNvPr id="58" name="Text 55"/>
           <p:cNvSpPr txBox="1"/>
           <p:nvPr/>
         </p:nvSpPr>
@@ -7384,39 +7707,14 @@
       </p:sp>
       <p:sp>
         <p:nvSpPr>
-          <p:cNvPr id="50" name="Shape 47"/>
+          <p:cNvPr id="59" name="Shape 56"/>
           <p:cNvSpPr/>
           <p:nvPr/>
         </p:nvSpPr>
         <p:spPr>
           <a:xfrm>
-            <a:off x="8275320" y="4343400"/>
-            <a:ext cx="2587752" cy="146304"/>
-          </a:xfrm>
-          <a:prstGeom prst="rect">
-            <a:avLst/>
-          </a:prstGeom>
-          <a:solidFill>
-            <a:srgbClr val="F0F3F7"/>
-          </a:solidFill>
-          <a:ln w="12700">
-            <a:solidFill>
-              <a:srgbClr val="F0F3F7"/>
-            </a:solidFill>
-            <a:prstDash val="solid"/>
-          </a:ln>
-        </p:spPr>
-      </p:sp>
-      <p:sp>
-        <p:nvSpPr>
-          <p:cNvPr id="51" name="Shape 48"/>
-          <p:cNvSpPr/>
-          <p:nvPr/>
-        </p:nvSpPr>
-        <p:spPr>
-          <a:xfrm>
-            <a:off x="8275320" y="4343400"/>
-            <a:ext cx="504612" cy="146304"/>
+            <a:off x="8275320" y="4325112"/>
+            <a:ext cx="2530767" cy="182880"/>
           </a:xfrm>
           <a:prstGeom prst="rect">
             <a:avLst/>
@@ -7434,13 +7732,77 @@
       </p:sp>
       <p:sp>
         <p:nvSpPr>
-          <p:cNvPr id="52" name="Text 49"/>
+          <p:cNvPr id="60" name="Text 57"/>
           <p:cNvSpPr txBox="1"/>
           <p:nvPr/>
         </p:nvSpPr>
         <p:spPr>
           <a:xfrm>
-            <a:off x="10908792" y="4297680"/>
+            <a:off x="8275320" y="4325112"/>
+            <a:ext cx="2475903" cy="182880"/>
+          </a:xfrm>
+          <a:prstGeom prst="rect">
+            <a:avLst/>
+          </a:prstGeom>
+          <a:noFill/>
+          <a:ln/>
+        </p:spPr>
+        <p:txBody>
+          <a:bodyPr wrap="square" lIns="0" tIns="0" rIns="0" bIns="0" rtlCol="0" anchor="ctr"/>
+          <a:lstStyle/>
+          <a:p>
+            <a:pPr algn="r" indent="0" marL="0">
+              <a:buNone/>
+            </a:pPr>
+            <a:r>
+              <a:rPr lang="en-US" sz="800" b="1" dirty="0">
+                <a:solidFill>
+                  <a:srgbClr val="FFFFFF"/>
+                </a:solidFill>
+                <a:latin typeface="Malgun Gothic" pitchFamily="34" charset="0"/>
+                <a:ea typeface="Malgun Gothic" pitchFamily="34" charset="-122"/>
+                <a:cs typeface="Malgun Gothic" pitchFamily="34" charset="-120"/>
+              </a:rPr>
+              <a:t>96</a:t>
+            </a:r>
+            <a:endParaRPr lang="en-US" sz="800" dirty="0"/>
+          </a:p>
+        </p:txBody>
+      </p:sp>
+      <p:sp>
+        <p:nvSpPr>
+          <p:cNvPr id="61" name="Shape 58"/>
+          <p:cNvSpPr/>
+          <p:nvPr/>
+        </p:nvSpPr>
+        <p:spPr>
+          <a:xfrm>
+            <a:off x="10806087" y="4325112"/>
+            <a:ext cx="102705" cy="182880"/>
+          </a:xfrm>
+          <a:prstGeom prst="rect">
+            <a:avLst/>
+          </a:prstGeom>
+          <a:solidFill>
+            <a:srgbClr val="7FD6E8"/>
+          </a:solidFill>
+          <a:ln w="12700">
+            <a:solidFill>
+              <a:srgbClr val="7FD6E8"/>
+            </a:solidFill>
+            <a:prstDash val="solid"/>
+          </a:ln>
+        </p:spPr>
+      </p:sp>
+      <p:sp>
+        <p:nvSpPr>
+          <p:cNvPr id="62" name="Text 59"/>
+          <p:cNvSpPr txBox="1"/>
+          <p:nvPr/>
+        </p:nvSpPr>
+        <p:spPr>
+          <a:xfrm>
+            <a:off x="10963656" y="4297680"/>
             <a:ext cx="457200" cy="237744"/>
           </a:xfrm>
           <a:prstGeom prst="rect">
@@ -7473,7 +7835,7 @@
       </p:sp>
       <p:sp>
         <p:nvSpPr>
-          <p:cNvPr id="53" name="Text 50"/>
+          <p:cNvPr id="63" name="Text 60"/>
           <p:cNvSpPr txBox="1"/>
           <p:nvPr/>
         </p:nvSpPr>
@@ -7512,39 +7874,14 @@
       </p:sp>
       <p:sp>
         <p:nvSpPr>
-          <p:cNvPr id="54" name="Shape 51"/>
+          <p:cNvPr id="64" name="Shape 61"/>
           <p:cNvSpPr/>
           <p:nvPr/>
         </p:nvSpPr>
         <p:spPr>
           <a:xfrm>
-            <a:off x="8275320" y="4617720"/>
-            <a:ext cx="2587752" cy="146304"/>
-          </a:xfrm>
-          <a:prstGeom prst="rect">
-            <a:avLst/>
-          </a:prstGeom>
-          <a:solidFill>
-            <a:srgbClr val="F0F3F7"/>
-          </a:solidFill>
-          <a:ln w="12700">
-            <a:solidFill>
-              <a:srgbClr val="F0F3F7"/>
-            </a:solidFill>
-            <a:prstDash val="solid"/>
-          </a:ln>
-        </p:spPr>
-      </p:sp>
-      <p:sp>
-        <p:nvSpPr>
-          <p:cNvPr id="55" name="Shape 52"/>
-          <p:cNvSpPr/>
-          <p:nvPr/>
-        </p:nvSpPr>
-        <p:spPr>
-          <a:xfrm>
-            <a:off x="8275320" y="4617720"/>
-            <a:ext cx="905713" cy="146304"/>
+            <a:off x="8275320" y="4599432"/>
+            <a:ext cx="2449129" cy="182880"/>
           </a:xfrm>
           <a:prstGeom prst="rect">
             <a:avLst/>
@@ -7562,13 +7899,77 @@
       </p:sp>
       <p:sp>
         <p:nvSpPr>
-          <p:cNvPr id="56" name="Text 53"/>
+          <p:cNvPr id="65" name="Text 62"/>
           <p:cNvSpPr txBox="1"/>
           <p:nvPr/>
         </p:nvSpPr>
         <p:spPr>
           <a:xfrm>
-            <a:off x="10908792" y="4572000"/>
+            <a:off x="8275320" y="4599432"/>
+            <a:ext cx="2394265" cy="182880"/>
+          </a:xfrm>
+          <a:prstGeom prst="rect">
+            <a:avLst/>
+          </a:prstGeom>
+          <a:noFill/>
+          <a:ln/>
+        </p:spPr>
+        <p:txBody>
+          <a:bodyPr wrap="square" lIns="0" tIns="0" rIns="0" bIns="0" rtlCol="0" anchor="ctr"/>
+          <a:lstStyle/>
+          <a:p>
+            <a:pPr algn="r" indent="0" marL="0">
+              <a:buNone/>
+            </a:pPr>
+            <a:r>
+              <a:rPr lang="en-US" sz="800" b="1" dirty="0">
+                <a:solidFill>
+                  <a:srgbClr val="FFFFFF"/>
+                </a:solidFill>
+                <a:latin typeface="Malgun Gothic" pitchFamily="34" charset="0"/>
+                <a:ea typeface="Malgun Gothic" pitchFamily="34" charset="-122"/>
+                <a:cs typeface="Malgun Gothic" pitchFamily="34" charset="-120"/>
+              </a:rPr>
+              <a:t>93</a:t>
+            </a:r>
+            <a:endParaRPr lang="en-US" sz="800" dirty="0"/>
+          </a:p>
+        </p:txBody>
+      </p:sp>
+      <p:sp>
+        <p:nvSpPr>
+          <p:cNvPr id="66" name="Shape 63"/>
+          <p:cNvSpPr/>
+          <p:nvPr/>
+        </p:nvSpPr>
+        <p:spPr>
+          <a:xfrm>
+            <a:off x="10724449" y="4599432"/>
+            <a:ext cx="184343" cy="182880"/>
+          </a:xfrm>
+          <a:prstGeom prst="rect">
+            <a:avLst/>
+          </a:prstGeom>
+          <a:solidFill>
+            <a:srgbClr val="7FD6E8"/>
+          </a:solidFill>
+          <a:ln w="12700">
+            <a:solidFill>
+              <a:srgbClr val="7FD6E8"/>
+            </a:solidFill>
+            <a:prstDash val="solid"/>
+          </a:ln>
+        </p:spPr>
+      </p:sp>
+      <p:sp>
+        <p:nvSpPr>
+          <p:cNvPr id="67" name="Text 64"/>
+          <p:cNvSpPr txBox="1"/>
+          <p:nvPr/>
+        </p:nvSpPr>
+        <p:spPr>
+          <a:xfrm>
+            <a:off x="10963656" y="4572000"/>
             <a:ext cx="457200" cy="237744"/>
           </a:xfrm>
           <a:prstGeom prst="rect">
@@ -7601,7 +8002,7 @@
       </p:sp>
       <p:sp>
         <p:nvSpPr>
-          <p:cNvPr id="57" name="Shape 54"/>
+          <p:cNvPr id="68" name="Shape 65"/>
           <p:cNvSpPr/>
           <p:nvPr/>
         </p:nvSpPr>
@@ -7628,7 +8029,7 @@
       </p:sp>
       <p:sp>
         <p:nvSpPr>
-          <p:cNvPr id="58" name="Text 55"/>
+          <p:cNvPr id="69" name="Text 66"/>
           <p:cNvSpPr txBox="1"/>
           <p:nvPr/>
         </p:nvSpPr>
@@ -7662,7 +8063,7 @@
                 <a:ea typeface="Malgun Gothic" pitchFamily="34" charset="-122"/>
                 <a:cs typeface="Malgun Gothic" pitchFamily="34" charset="-120"/>
               </a:rPr>
-              <a:t>온도편차 3% → 거의 변수 하나씩의 효과로 설명됨</a:t>
+              <a:t>온도편차 → 변동의 97%가 변수 하나씩의 효과</a:t>
             </a:r>
             <a:endParaRPr lang="en-US" sz="900" dirty="0"/>
           </a:p>
@@ -7682,7 +8083,7 @@
                 <a:ea typeface="Malgun Gothic" pitchFamily="34" charset="-122"/>
                 <a:cs typeface="Malgun Gothic" pitchFamily="34" charset="-120"/>
               </a:rPr>
-              <a:t>2차 균일도 19% → 변동의 약 1/5이 변수 조합에서 생김</a:t>
+              <a:t>2차 균일도 → 변동의 19%(약 1/5)가 변수 조합에서 생김</a:t>
             </a:r>
             <a:endParaRPr lang="en-US" sz="900" dirty="0"/>
           </a:p>
@@ -7710,7 +8111,7 @@
       </p:sp>
       <p:sp>
         <p:nvSpPr>
-          <p:cNvPr id="59" name="Shape 56"/>
+          <p:cNvPr id="70" name="Shape 67"/>
           <p:cNvSpPr/>
           <p:nvPr/>
         </p:nvSpPr>
@@ -7737,7 +8138,7 @@
       </p:sp>
       <p:sp>
         <p:nvSpPr>
-          <p:cNvPr id="60" name="Text 57"/>
+          <p:cNvPr id="71" name="Text 68"/>
           <p:cNvSpPr txBox="1"/>
           <p:nvPr/>
         </p:nvSpPr>

--- a/민감도_장표.pptx
+++ b/민감도_장표.pptx
@@ -6672,18 +6672,18 @@
         </p:nvSpPr>
         <p:spPr>
           <a:xfrm>
-            <a:off x="7406640" y="2688336"/>
-            <a:ext cx="201168" cy="128016"/>
+            <a:off x="7406640" y="2679192"/>
+            <a:ext cx="182880" cy="118872"/>
           </a:xfrm>
           <a:prstGeom prst="rect">
             <a:avLst/>
           </a:prstGeom>
           <a:solidFill>
-            <a:srgbClr val="9FB0C6"/>
+            <a:srgbClr val="16305B"/>
           </a:solidFill>
-          <a:ln w="12700">
+          <a:ln w="9525">
             <a:solidFill>
-              <a:srgbClr val="9FB0C6"/>
+              <a:srgbClr val="16305B"/>
             </a:solidFill>
             <a:prstDash val="solid"/>
           </a:ln>
@@ -6697,8 +6697,8 @@
         </p:nvSpPr>
         <p:spPr>
           <a:xfrm>
-            <a:off x="7662672" y="2633472"/>
-            <a:ext cx="914400" cy="237744"/>
+            <a:off x="7635240" y="2633472"/>
+            <a:ext cx="1097280" cy="210312"/>
           </a:xfrm>
           <a:prstGeom prst="rect">
             <a:avLst/>
@@ -6714,7 +6714,7 @@
               <a:buNone/>
             </a:pPr>
             <a:r>
-              <a:rPr lang="en-US" sz="860" dirty="0">
+              <a:rPr lang="en-US" sz="800" dirty="0">
                 <a:solidFill>
                   <a:srgbClr val="1C2733"/>
                 </a:solidFill>
@@ -6722,9 +6722,9 @@
                 <a:ea typeface="Malgun Gothic" pitchFamily="34" charset="-122"/>
                 <a:cs typeface="Malgun Gothic" pitchFamily="34" charset="-120"/>
               </a:rPr>
-              <a:t>단독 효과</a:t>
+              <a:t>1차 핀 개수</a:t>
             </a:r>
-            <a:endParaRPr lang="en-US" sz="860" dirty="0"/>
+            <a:endParaRPr lang="en-US" sz="800" dirty="0"/>
           </a:p>
         </p:txBody>
       </p:sp>
@@ -6736,18 +6736,18 @@
         </p:nvSpPr>
         <p:spPr>
           <a:xfrm>
-            <a:off x="8641080" y="2688336"/>
-            <a:ext cx="201168" cy="128016"/>
+            <a:off x="8741664" y="2679192"/>
+            <a:ext cx="182880" cy="118872"/>
           </a:xfrm>
           <a:prstGeom prst="rect">
             <a:avLst/>
           </a:prstGeom>
           <a:solidFill>
-            <a:srgbClr val="00A3C4"/>
+            <a:srgbClr val="3D6FB0"/>
           </a:solidFill>
-          <a:ln w="12700">
+          <a:ln w="9525">
             <a:solidFill>
-              <a:srgbClr val="00A3C4"/>
+              <a:srgbClr val="3D6FB0"/>
             </a:solidFill>
             <a:prstDash val="solid"/>
           </a:ln>
@@ -6761,8 +6761,8 @@
         </p:nvSpPr>
         <p:spPr>
           <a:xfrm>
-            <a:off x="8897112" y="2633472"/>
-            <a:ext cx="914400" cy="237744"/>
+            <a:off x="8970264" y="2633472"/>
+            <a:ext cx="1097280" cy="210312"/>
           </a:xfrm>
           <a:prstGeom prst="rect">
             <a:avLst/>
@@ -6778,7 +6778,455 @@
               <a:buNone/>
             </a:pPr>
             <a:r>
-              <a:rPr lang="en-US" sz="860" dirty="0">
+              <a:rPr lang="en-US" sz="800" dirty="0">
+                <a:solidFill>
+                  <a:srgbClr val="1C2733"/>
+                </a:solidFill>
+                <a:latin typeface="Malgun Gothic" pitchFamily="34" charset="0"/>
+                <a:ea typeface="Malgun Gothic" pitchFamily="34" charset="-122"/>
+                <a:cs typeface="Malgun Gothic" pitchFamily="34" charset="-120"/>
+              </a:rPr>
+              <a:t>2차 핀 개수</a:t>
+            </a:r>
+            <a:endParaRPr lang="en-US" sz="800" dirty="0"/>
+          </a:p>
+        </p:txBody>
+      </p:sp>
+      <p:sp>
+        <p:nvSpPr>
+          <p:cNvPr id="32" name="Shape 29"/>
+          <p:cNvSpPr/>
+          <p:nvPr/>
+        </p:nvSpPr>
+        <p:spPr>
+          <a:xfrm>
+            <a:off x="10076688" y="2679192"/>
+            <a:ext cx="182880" cy="118872"/>
+          </a:xfrm>
+          <a:prstGeom prst="rect">
+            <a:avLst/>
+          </a:prstGeom>
+          <a:solidFill>
+            <a:srgbClr val="7FA6D9"/>
+          </a:solidFill>
+          <a:ln w="9525">
+            <a:solidFill>
+              <a:srgbClr val="7FA6D9"/>
+            </a:solidFill>
+            <a:prstDash val="solid"/>
+          </a:ln>
+        </p:spPr>
+      </p:sp>
+      <p:sp>
+        <p:nvSpPr>
+          <p:cNvPr id="33" name="Text 30"/>
+          <p:cNvSpPr txBox="1"/>
+          <p:nvPr/>
+        </p:nvSpPr>
+        <p:spPr>
+          <a:xfrm>
+            <a:off x="10305288" y="2633472"/>
+            <a:ext cx="1097280" cy="210312"/>
+          </a:xfrm>
+          <a:prstGeom prst="rect">
+            <a:avLst/>
+          </a:prstGeom>
+          <a:noFill/>
+          <a:ln/>
+        </p:spPr>
+        <p:txBody>
+          <a:bodyPr wrap="square" lIns="0" tIns="0" rIns="0" bIns="0" rtlCol="0" anchor="ctr"/>
+          <a:lstStyle/>
+          <a:p>
+            <a:pPr indent="0" marL="0">
+              <a:buNone/>
+            </a:pPr>
+            <a:r>
+              <a:rPr lang="en-US" sz="800" dirty="0">
+                <a:solidFill>
+                  <a:srgbClr val="1C2733"/>
+                </a:solidFill>
+                <a:latin typeface="Malgun Gothic" pitchFamily="34" charset="0"/>
+                <a:ea typeface="Malgun Gothic" pitchFamily="34" charset="-122"/>
+                <a:cs typeface="Malgun Gothic" pitchFamily="34" charset="-120"/>
+              </a:rPr>
+              <a:t>1차 핀 두께</a:t>
+            </a:r>
+            <a:endParaRPr lang="en-US" sz="800" dirty="0"/>
+          </a:p>
+        </p:txBody>
+      </p:sp>
+      <p:sp>
+        <p:nvSpPr>
+          <p:cNvPr id="34" name="Shape 31"/>
+          <p:cNvSpPr/>
+          <p:nvPr/>
+        </p:nvSpPr>
+        <p:spPr>
+          <a:xfrm>
+            <a:off x="7406640" y="2898648"/>
+            <a:ext cx="182880" cy="118872"/>
+          </a:xfrm>
+          <a:prstGeom prst="rect">
+            <a:avLst/>
+          </a:prstGeom>
+          <a:solidFill>
+            <a:srgbClr val="B7CDEB"/>
+          </a:solidFill>
+          <a:ln w="9525">
+            <a:solidFill>
+              <a:srgbClr val="B7CDEB"/>
+            </a:solidFill>
+            <a:prstDash val="solid"/>
+          </a:ln>
+        </p:spPr>
+      </p:sp>
+      <p:sp>
+        <p:nvSpPr>
+          <p:cNvPr id="35" name="Text 32"/>
+          <p:cNvSpPr txBox="1"/>
+          <p:nvPr/>
+        </p:nvSpPr>
+        <p:spPr>
+          <a:xfrm>
+            <a:off x="7635240" y="2852928"/>
+            <a:ext cx="1097280" cy="210312"/>
+          </a:xfrm>
+          <a:prstGeom prst="rect">
+            <a:avLst/>
+          </a:prstGeom>
+          <a:noFill/>
+          <a:ln/>
+        </p:spPr>
+        <p:txBody>
+          <a:bodyPr wrap="square" lIns="0" tIns="0" rIns="0" bIns="0" rtlCol="0" anchor="ctr"/>
+          <a:lstStyle/>
+          <a:p>
+            <a:pPr indent="0" marL="0">
+              <a:buNone/>
+            </a:pPr>
+            <a:r>
+              <a:rPr lang="en-US" sz="800" dirty="0">
+                <a:solidFill>
+                  <a:srgbClr val="1C2733"/>
+                </a:solidFill>
+                <a:latin typeface="Malgun Gothic" pitchFamily="34" charset="0"/>
+                <a:ea typeface="Malgun Gothic" pitchFamily="34" charset="-122"/>
+                <a:cs typeface="Malgun Gothic" pitchFamily="34" charset="-120"/>
+              </a:rPr>
+              <a:t>2차 핀 두께</a:t>
+            </a:r>
+            <a:endParaRPr lang="en-US" sz="800" dirty="0"/>
+          </a:p>
+        </p:txBody>
+      </p:sp>
+      <p:sp>
+        <p:nvSpPr>
+          <p:cNvPr id="36" name="Shape 33"/>
+          <p:cNvSpPr/>
+          <p:nvPr/>
+        </p:nvSpPr>
+        <p:spPr>
+          <a:xfrm>
+            <a:off x="8741664" y="2898648"/>
+            <a:ext cx="182880" cy="118872"/>
+          </a:xfrm>
+          <a:prstGeom prst="rect">
+            <a:avLst/>
+          </a:prstGeom>
+          <a:solidFill>
+            <a:srgbClr val="E08A2E"/>
+          </a:solidFill>
+          <a:ln w="9525">
+            <a:solidFill>
+              <a:srgbClr val="E08A2E"/>
+            </a:solidFill>
+            <a:prstDash val="solid"/>
+          </a:ln>
+        </p:spPr>
+      </p:sp>
+      <p:sp>
+        <p:nvSpPr>
+          <p:cNvPr id="37" name="Text 34"/>
+          <p:cNvSpPr txBox="1"/>
+          <p:nvPr/>
+        </p:nvSpPr>
+        <p:spPr>
+          <a:xfrm>
+            <a:off x="8970264" y="2852928"/>
+            <a:ext cx="1097280" cy="210312"/>
+          </a:xfrm>
+          <a:prstGeom prst="rect">
+            <a:avLst/>
+          </a:prstGeom>
+          <a:noFill/>
+          <a:ln/>
+        </p:spPr>
+        <p:txBody>
+          <a:bodyPr wrap="square" lIns="0" tIns="0" rIns="0" bIns="0" rtlCol="0" anchor="ctr"/>
+          <a:lstStyle/>
+          <a:p>
+            <a:pPr indent="0" marL="0">
+              <a:buNone/>
+            </a:pPr>
+            <a:r>
+              <a:rPr lang="en-US" sz="800" dirty="0">
+                <a:solidFill>
+                  <a:srgbClr val="1C2733"/>
+                </a:solidFill>
+                <a:latin typeface="Malgun Gothic" pitchFamily="34" charset="0"/>
+                <a:ea typeface="Malgun Gothic" pitchFamily="34" charset="-122"/>
+                <a:cs typeface="Malgun Gothic" pitchFamily="34" charset="-120"/>
+              </a:rPr>
+              <a:t>분기 입구 두께</a:t>
+            </a:r>
+            <a:endParaRPr lang="en-US" sz="800" dirty="0"/>
+          </a:p>
+        </p:txBody>
+      </p:sp>
+      <p:sp>
+        <p:nvSpPr>
+          <p:cNvPr id="38" name="Shape 35"/>
+          <p:cNvSpPr/>
+          <p:nvPr/>
+        </p:nvSpPr>
+        <p:spPr>
+          <a:xfrm>
+            <a:off x="10076688" y="2898648"/>
+            <a:ext cx="182880" cy="118872"/>
+          </a:xfrm>
+          <a:prstGeom prst="rect">
+            <a:avLst/>
+          </a:prstGeom>
+          <a:solidFill>
+            <a:srgbClr val="F2C14E"/>
+          </a:solidFill>
+          <a:ln w="9525">
+            <a:solidFill>
+              <a:srgbClr val="F2C14E"/>
+            </a:solidFill>
+            <a:prstDash val="solid"/>
+          </a:ln>
+        </p:spPr>
+      </p:sp>
+      <p:sp>
+        <p:nvSpPr>
+          <p:cNvPr id="39" name="Text 36"/>
+          <p:cNvSpPr txBox="1"/>
+          <p:nvPr/>
+        </p:nvSpPr>
+        <p:spPr>
+          <a:xfrm>
+            <a:off x="10305288" y="2852928"/>
+            <a:ext cx="1097280" cy="210312"/>
+          </a:xfrm>
+          <a:prstGeom prst="rect">
+            <a:avLst/>
+          </a:prstGeom>
+          <a:noFill/>
+          <a:ln/>
+        </p:spPr>
+        <p:txBody>
+          <a:bodyPr wrap="square" lIns="0" tIns="0" rIns="0" bIns="0" rtlCol="0" anchor="ctr"/>
+          <a:lstStyle/>
+          <a:p>
+            <a:pPr indent="0" marL="0">
+              <a:buNone/>
+            </a:pPr>
+            <a:r>
+              <a:rPr lang="en-US" sz="800" dirty="0">
+                <a:solidFill>
+                  <a:srgbClr val="1C2733"/>
+                </a:solidFill>
+                <a:latin typeface="Malgun Gothic" pitchFamily="34" charset="0"/>
+                <a:ea typeface="Malgun Gothic" pitchFamily="34" charset="-122"/>
+                <a:cs typeface="Malgun Gothic" pitchFamily="34" charset="-120"/>
+              </a:rPr>
+              <a:t>중간 입구 두께</a:t>
+            </a:r>
+            <a:endParaRPr lang="en-US" sz="800" dirty="0"/>
+          </a:p>
+        </p:txBody>
+      </p:sp>
+      <p:sp>
+        <p:nvSpPr>
+          <p:cNvPr id="40" name="Shape 37"/>
+          <p:cNvSpPr/>
+          <p:nvPr/>
+        </p:nvSpPr>
+        <p:spPr>
+          <a:xfrm>
+            <a:off x="7406640" y="3118104"/>
+            <a:ext cx="182880" cy="118872"/>
+          </a:xfrm>
+          <a:prstGeom prst="rect">
+            <a:avLst/>
+          </a:prstGeom>
+          <a:solidFill>
+            <a:srgbClr val="8E99A6"/>
+          </a:solidFill>
+          <a:ln w="9525">
+            <a:solidFill>
+              <a:srgbClr val="8E99A6"/>
+            </a:solidFill>
+            <a:prstDash val="solid"/>
+          </a:ln>
+        </p:spPr>
+      </p:sp>
+      <p:sp>
+        <p:nvSpPr>
+          <p:cNvPr id="41" name="Text 38"/>
+          <p:cNvSpPr txBox="1"/>
+          <p:nvPr/>
+        </p:nvSpPr>
+        <p:spPr>
+          <a:xfrm>
+            <a:off x="7635240" y="3072384"/>
+            <a:ext cx="1097280" cy="210312"/>
+          </a:xfrm>
+          <a:prstGeom prst="rect">
+            <a:avLst/>
+          </a:prstGeom>
+          <a:noFill/>
+          <a:ln/>
+        </p:spPr>
+        <p:txBody>
+          <a:bodyPr wrap="square" lIns="0" tIns="0" rIns="0" bIns="0" rtlCol="0" anchor="ctr"/>
+          <a:lstStyle/>
+          <a:p>
+            <a:pPr indent="0" marL="0">
+              <a:buNone/>
+            </a:pPr>
+            <a:r>
+              <a:rPr lang="en-US" sz="800" dirty="0">
+                <a:solidFill>
+                  <a:srgbClr val="1C2733"/>
+                </a:solidFill>
+                <a:latin typeface="Malgun Gothic" pitchFamily="34" charset="0"/>
+                <a:ea typeface="Malgun Gothic" pitchFamily="34" charset="-122"/>
+                <a:cs typeface="Malgun Gothic" pitchFamily="34" charset="-120"/>
+              </a:rPr>
+              <a:t>입구 유로 두께</a:t>
+            </a:r>
+            <a:endParaRPr lang="en-US" sz="800" dirty="0"/>
+          </a:p>
+        </p:txBody>
+      </p:sp>
+      <p:sp>
+        <p:nvSpPr>
+          <p:cNvPr id="42" name="Shape 39"/>
+          <p:cNvSpPr/>
+          <p:nvPr/>
+        </p:nvSpPr>
+        <p:spPr>
+          <a:xfrm>
+            <a:off x="8741664" y="3118104"/>
+            <a:ext cx="182880" cy="118872"/>
+          </a:xfrm>
+          <a:prstGeom prst="rect">
+            <a:avLst/>
+          </a:prstGeom>
+          <a:solidFill>
+            <a:srgbClr val="C9D0D8"/>
+          </a:solidFill>
+          <a:ln w="9525">
+            <a:solidFill>
+              <a:srgbClr val="C9D0D8"/>
+            </a:solidFill>
+            <a:prstDash val="solid"/>
+          </a:ln>
+        </p:spPr>
+      </p:sp>
+      <p:sp>
+        <p:nvSpPr>
+          <p:cNvPr id="43" name="Text 40"/>
+          <p:cNvSpPr txBox="1"/>
+          <p:nvPr/>
+        </p:nvSpPr>
+        <p:spPr>
+          <a:xfrm>
+            <a:off x="8970264" y="3072384"/>
+            <a:ext cx="1097280" cy="210312"/>
+          </a:xfrm>
+          <a:prstGeom prst="rect">
+            <a:avLst/>
+          </a:prstGeom>
+          <a:noFill/>
+          <a:ln/>
+        </p:spPr>
+        <p:txBody>
+          <a:bodyPr wrap="square" lIns="0" tIns="0" rIns="0" bIns="0" rtlCol="0" anchor="ctr"/>
+          <a:lstStyle/>
+          <a:p>
+            <a:pPr indent="0" marL="0">
+              <a:buNone/>
+            </a:pPr>
+            <a:r>
+              <a:rPr lang="en-US" sz="800" dirty="0">
+                <a:solidFill>
+                  <a:srgbClr val="1C2733"/>
+                </a:solidFill>
+                <a:latin typeface="Malgun Gothic" pitchFamily="34" charset="0"/>
+                <a:ea typeface="Malgun Gothic" pitchFamily="34" charset="-122"/>
+                <a:cs typeface="Malgun Gothic" pitchFamily="34" charset="-120"/>
+              </a:rPr>
+              <a:t>중간 유로 두께</a:t>
+            </a:r>
+            <a:endParaRPr lang="en-US" sz="800" dirty="0"/>
+          </a:p>
+        </p:txBody>
+      </p:sp>
+      <p:sp>
+        <p:nvSpPr>
+          <p:cNvPr id="44" name="Shape 41"/>
+          <p:cNvSpPr/>
+          <p:nvPr/>
+        </p:nvSpPr>
+        <p:spPr>
+          <a:xfrm>
+            <a:off x="10076688" y="3118104"/>
+            <a:ext cx="182880" cy="118872"/>
+          </a:xfrm>
+          <a:prstGeom prst="rect">
+            <a:avLst/>
+          </a:prstGeom>
+          <a:solidFill>
+            <a:srgbClr val="00A3C4"/>
+          </a:solidFill>
+          <a:ln w="9525">
+            <a:solidFill>
+              <a:srgbClr val="0088A6"/>
+            </a:solidFill>
+            <a:prstDash val="solid"/>
+          </a:ln>
+        </p:spPr>
+      </p:sp>
+      <p:sp>
+        <p:nvSpPr>
+          <p:cNvPr id="45" name="Text 42"/>
+          <p:cNvSpPr txBox="1"/>
+          <p:nvPr/>
+        </p:nvSpPr>
+        <p:spPr>
+          <a:xfrm>
+            <a:off x="10305288" y="3072384"/>
+            <a:ext cx="1097280" cy="210312"/>
+          </a:xfrm>
+          <a:prstGeom prst="rect">
+            <a:avLst/>
+          </a:prstGeom>
+          <a:noFill/>
+          <a:ln/>
+        </p:spPr>
+        <p:txBody>
+          <a:bodyPr wrap="square" lIns="0" tIns="0" rIns="0" bIns="0" rtlCol="0" anchor="ctr"/>
+          <a:lstStyle/>
+          <a:p>
+            <a:pPr indent="0" marL="0">
+              <a:buNone/>
+            </a:pPr>
+            <a:r>
+              <a:rPr lang="en-US" sz="800" b="1" dirty="0">
                 <a:solidFill>
                   <a:srgbClr val="1C2733"/>
                 </a:solidFill>
@@ -6788,59 +7236,20 @@
               </a:rPr>
               <a:t>교호작용</a:t>
             </a:r>
-            <a:endParaRPr lang="en-US" sz="860" dirty="0"/>
+            <a:endParaRPr lang="en-US" sz="800" dirty="0"/>
           </a:p>
         </p:txBody>
       </p:sp>
       <p:sp>
         <p:nvSpPr>
-          <p:cNvPr id="32" name="Text 29"/>
+          <p:cNvPr id="46" name="Text 43"/>
           <p:cNvSpPr txBox="1"/>
           <p:nvPr/>
         </p:nvSpPr>
         <p:spPr>
           <a:xfrm>
-            <a:off x="9875520" y="2633472"/>
-            <a:ext cx="914400" cy="237744"/>
-          </a:xfrm>
-          <a:prstGeom prst="rect">
-            <a:avLst/>
-          </a:prstGeom>
-          <a:noFill/>
-          <a:ln/>
-        </p:spPr>
-        <p:txBody>
-          <a:bodyPr wrap="square" lIns="0" tIns="0" rIns="0" bIns="0" rtlCol="0" anchor="ctr"/>
-          <a:lstStyle/>
-          <a:p>
-            <a:pPr indent="0" marL="0">
-              <a:buNone/>
-            </a:pPr>
-            <a:r>
-              <a:rPr lang="en-US" sz="860" dirty="0">
-                <a:solidFill>
-                  <a:srgbClr val="6B7A8F"/>
-                </a:solidFill>
-                <a:latin typeface="Malgun Gothic" pitchFamily="34" charset="0"/>
-                <a:ea typeface="Malgun Gothic" pitchFamily="34" charset="-122"/>
-                <a:cs typeface="Malgun Gothic" pitchFamily="34" charset="-120"/>
-              </a:rPr>
-              <a:t>= 100%</a:t>
-            </a:r>
-            <a:endParaRPr lang="en-US" sz="860" dirty="0"/>
-          </a:p>
-        </p:txBody>
-      </p:sp>
-      <p:sp>
-        <p:nvSpPr>
-          <p:cNvPr id="33" name="Text 30"/>
-          <p:cNvSpPr txBox="1"/>
-          <p:nvPr/>
-        </p:nvSpPr>
-        <p:spPr>
-          <a:xfrm>
-            <a:off x="7406640" y="2926080"/>
-            <a:ext cx="804672" cy="237744"/>
+            <a:off x="7406640" y="3291840"/>
+            <a:ext cx="804672" cy="256032"/>
           </a:xfrm>
           <a:prstGeom prst="rect">
             <a:avLst/>
@@ -6872,24 +7281,24 @@
       </p:sp>
       <p:sp>
         <p:nvSpPr>
-          <p:cNvPr id="34" name="Shape 31"/>
+          <p:cNvPr id="47" name="Shape 44"/>
           <p:cNvSpPr/>
           <p:nvPr/>
         </p:nvSpPr>
         <p:spPr>
           <a:xfrm>
-            <a:off x="8275320" y="2953512"/>
-            <a:ext cx="2437542" cy="182880"/>
+            <a:off x="8275320" y="3319272"/>
+            <a:ext cx="1574025" cy="201168"/>
           </a:xfrm>
           <a:prstGeom prst="rect">
             <a:avLst/>
           </a:prstGeom>
           <a:solidFill>
-            <a:srgbClr val="9FB0C6"/>
+            <a:srgbClr val="16305B"/>
           </a:solidFill>
-          <a:ln w="12700">
+          <a:ln w="6350">
             <a:solidFill>
-              <a:srgbClr val="9FB0C6"/>
+              <a:srgbClr val="FFFFFF"/>
             </a:solidFill>
             <a:prstDash val="solid"/>
           </a:ln>
@@ -6897,14 +7306,14 @@
       </p:sp>
       <p:sp>
         <p:nvSpPr>
-          <p:cNvPr id="35" name="Text 32"/>
+          <p:cNvPr id="48" name="Text 45"/>
           <p:cNvSpPr txBox="1"/>
           <p:nvPr/>
         </p:nvSpPr>
         <p:spPr>
           <a:xfrm>
-            <a:off x="8275320" y="2953512"/>
-            <a:ext cx="2382678" cy="182880"/>
+            <a:off x="8275320" y="3319272"/>
+            <a:ext cx="1574025" cy="201168"/>
           </a:xfrm>
           <a:prstGeom prst="rect">
             <a:avLst/>
@@ -6916,11 +7325,11 @@
           <a:bodyPr wrap="square" lIns="0" tIns="0" rIns="0" bIns="0" rtlCol="0" anchor="ctr"/>
           <a:lstStyle/>
           <a:p>
-            <a:pPr algn="r" indent="0" marL="0">
+            <a:pPr algn="ctr" indent="0" marL="0">
               <a:buNone/>
             </a:pPr>
             <a:r>
-              <a:rPr lang="en-US" sz="800" b="1" dirty="0">
+              <a:rPr lang="en-US" sz="750" b="1" dirty="0">
                 <a:solidFill>
                   <a:srgbClr val="FFFFFF"/>
                 </a:solidFill>
@@ -6928,32 +7337,32 @@
                 <a:ea typeface="Malgun Gothic" pitchFamily="34" charset="-122"/>
                 <a:cs typeface="Malgun Gothic" pitchFamily="34" charset="-120"/>
               </a:rPr>
-              <a:t>93</a:t>
+              <a:t>59</a:t>
             </a:r>
-            <a:endParaRPr lang="en-US" sz="800" dirty="0"/>
+            <a:endParaRPr lang="en-US" sz="750" dirty="0"/>
           </a:p>
         </p:txBody>
       </p:sp>
       <p:sp>
         <p:nvSpPr>
-          <p:cNvPr id="36" name="Shape 33"/>
+          <p:cNvPr id="49" name="Shape 46"/>
           <p:cNvSpPr/>
           <p:nvPr/>
         </p:nvSpPr>
         <p:spPr>
           <a:xfrm>
-            <a:off x="10712862" y="2953512"/>
-            <a:ext cx="195930" cy="182880"/>
+            <a:off x="9849345" y="3319272"/>
+            <a:ext cx="104756" cy="201168"/>
           </a:xfrm>
           <a:prstGeom prst="rect">
             <a:avLst/>
           </a:prstGeom>
           <a:solidFill>
-            <a:srgbClr val="7FD6E8"/>
+            <a:srgbClr val="3D6FB0"/>
           </a:solidFill>
-          <a:ln w="12700">
+          <a:ln w="6350">
             <a:solidFill>
-              <a:srgbClr val="7FD6E8"/>
+              <a:srgbClr val="FFFFFF"/>
             </a:solidFill>
             <a:prstDash val="solid"/>
           </a:ln>
@@ -6961,14 +7370,228 @@
       </p:sp>
       <p:sp>
         <p:nvSpPr>
-          <p:cNvPr id="37" name="Text 34"/>
+          <p:cNvPr id="50" name="Shape 47"/>
+          <p:cNvSpPr/>
+          <p:nvPr/>
+        </p:nvSpPr>
+        <p:spPr>
+          <a:xfrm>
+            <a:off x="9954102" y="3319272"/>
+            <a:ext cx="354993" cy="201168"/>
+          </a:xfrm>
+          <a:prstGeom prst="rect">
+            <a:avLst/>
+          </a:prstGeom>
+          <a:solidFill>
+            <a:srgbClr val="7FA6D9"/>
+          </a:solidFill>
+          <a:ln w="6350">
+            <a:solidFill>
+              <a:srgbClr val="FFFFFF"/>
+            </a:solidFill>
+            <a:prstDash val="solid"/>
+          </a:ln>
+        </p:spPr>
+      </p:sp>
+      <p:sp>
+        <p:nvSpPr>
+          <p:cNvPr id="51" name="Text 48"/>
           <p:cNvSpPr txBox="1"/>
           <p:nvPr/>
         </p:nvSpPr>
         <p:spPr>
           <a:xfrm>
-            <a:off x="10963656" y="2926080"/>
-            <a:ext cx="457200" cy="237744"/>
+            <a:off x="9954102" y="3319272"/>
+            <a:ext cx="354993" cy="201168"/>
+          </a:xfrm>
+          <a:prstGeom prst="rect">
+            <a:avLst/>
+          </a:prstGeom>
+          <a:noFill/>
+          <a:ln/>
+        </p:spPr>
+        <p:txBody>
+          <a:bodyPr wrap="square" lIns="0" tIns="0" rIns="0" bIns="0" rtlCol="0" anchor="ctr"/>
+          <a:lstStyle/>
+          <a:p>
+            <a:pPr algn="ctr" indent="0" marL="0">
+              <a:buNone/>
+            </a:pPr>
+            <a:r>
+              <a:rPr lang="en-US" sz="750" b="1" dirty="0">
+                <a:solidFill>
+                  <a:srgbClr val="16305B"/>
+                </a:solidFill>
+                <a:latin typeface="Malgun Gothic" pitchFamily="34" charset="0"/>
+                <a:ea typeface="Malgun Gothic" pitchFamily="34" charset="-122"/>
+                <a:cs typeface="Malgun Gothic" pitchFamily="34" charset="-120"/>
+              </a:rPr>
+              <a:t>13</a:t>
+            </a:r>
+            <a:endParaRPr lang="en-US" sz="750" dirty="0"/>
+          </a:p>
+        </p:txBody>
+      </p:sp>
+      <p:sp>
+        <p:nvSpPr>
+          <p:cNvPr id="52" name="Shape 49"/>
+          <p:cNvSpPr/>
+          <p:nvPr/>
+        </p:nvSpPr>
+        <p:spPr>
+          <a:xfrm>
+            <a:off x="10309095" y="3319272"/>
+            <a:ext cx="14736" cy="201168"/>
+          </a:xfrm>
+          <a:prstGeom prst="rect">
+            <a:avLst/>
+          </a:prstGeom>
+          <a:solidFill>
+            <a:srgbClr val="B7CDEB"/>
+          </a:solidFill>
+          <a:ln w="6350">
+            <a:solidFill>
+              <a:srgbClr val="FFFFFF"/>
+            </a:solidFill>
+            <a:prstDash val="solid"/>
+          </a:ln>
+        </p:spPr>
+      </p:sp>
+      <p:sp>
+        <p:nvSpPr>
+          <p:cNvPr id="53" name="Shape 50"/>
+          <p:cNvSpPr/>
+          <p:nvPr/>
+        </p:nvSpPr>
+        <p:spPr>
+          <a:xfrm>
+            <a:off x="10323830" y="3319272"/>
+            <a:ext cx="204958" cy="201168"/>
+          </a:xfrm>
+          <a:prstGeom prst="rect">
+            <a:avLst/>
+          </a:prstGeom>
+          <a:solidFill>
+            <a:srgbClr val="E08A2E"/>
+          </a:solidFill>
+          <a:ln w="6350">
+            <a:solidFill>
+              <a:srgbClr val="FFFFFF"/>
+            </a:solidFill>
+            <a:prstDash val="solid"/>
+          </a:ln>
+        </p:spPr>
+      </p:sp>
+      <p:sp>
+        <p:nvSpPr>
+          <p:cNvPr id="54" name="Shape 51"/>
+          <p:cNvSpPr/>
+          <p:nvPr/>
+        </p:nvSpPr>
+        <p:spPr>
+          <a:xfrm>
+            <a:off x="10528788" y="3319272"/>
+            <a:ext cx="73678" cy="201168"/>
+          </a:xfrm>
+          <a:prstGeom prst="rect">
+            <a:avLst/>
+          </a:prstGeom>
+          <a:solidFill>
+            <a:srgbClr val="F2C14E"/>
+          </a:solidFill>
+          <a:ln w="6350">
+            <a:solidFill>
+              <a:srgbClr val="FFFFFF"/>
+            </a:solidFill>
+            <a:prstDash val="solid"/>
+          </a:ln>
+        </p:spPr>
+      </p:sp>
+      <p:sp>
+        <p:nvSpPr>
+          <p:cNvPr id="55" name="Shape 52"/>
+          <p:cNvSpPr/>
+          <p:nvPr/>
+        </p:nvSpPr>
+        <p:spPr>
+          <a:xfrm>
+            <a:off x="10602466" y="3319272"/>
+            <a:ext cx="134228" cy="201168"/>
+          </a:xfrm>
+          <a:prstGeom prst="rect">
+            <a:avLst/>
+          </a:prstGeom>
+          <a:solidFill>
+            <a:srgbClr val="8E99A6"/>
+          </a:solidFill>
+          <a:ln w="6350">
+            <a:solidFill>
+              <a:srgbClr val="FFFFFF"/>
+            </a:solidFill>
+            <a:prstDash val="solid"/>
+          </a:ln>
+        </p:spPr>
+      </p:sp>
+      <p:sp>
+        <p:nvSpPr>
+          <p:cNvPr id="56" name="Shape 53"/>
+          <p:cNvSpPr/>
+          <p:nvPr/>
+        </p:nvSpPr>
+        <p:spPr>
+          <a:xfrm>
+            <a:off x="10736694" y="3319272"/>
+            <a:ext cx="18486" cy="201168"/>
+          </a:xfrm>
+          <a:prstGeom prst="rect">
+            <a:avLst/>
+          </a:prstGeom>
+          <a:solidFill>
+            <a:srgbClr val="C9D0D8"/>
+          </a:solidFill>
+          <a:ln w="6350">
+            <a:solidFill>
+              <a:srgbClr val="FFFFFF"/>
+            </a:solidFill>
+            <a:prstDash val="solid"/>
+          </a:ln>
+        </p:spPr>
+      </p:sp>
+      <p:sp>
+        <p:nvSpPr>
+          <p:cNvPr id="57" name="Shape 54"/>
+          <p:cNvSpPr/>
+          <p:nvPr/>
+        </p:nvSpPr>
+        <p:spPr>
+          <a:xfrm>
+            <a:off x="10755180" y="3319272"/>
+            <a:ext cx="199332" cy="201168"/>
+          </a:xfrm>
+          <a:prstGeom prst="rect">
+            <a:avLst/>
+          </a:prstGeom>
+          <a:solidFill>
+            <a:srgbClr val="00A3C4"/>
+          </a:solidFill>
+          <a:ln w="6350">
+            <a:solidFill>
+              <a:srgbClr val="FFFFFF"/>
+            </a:solidFill>
+            <a:prstDash val="solid"/>
+          </a:ln>
+        </p:spPr>
+      </p:sp>
+      <p:sp>
+        <p:nvSpPr>
+          <p:cNvPr id="58" name="Text 55"/>
+          <p:cNvSpPr txBox="1"/>
+          <p:nvPr/>
+        </p:nvSpPr>
+        <p:spPr>
+          <a:xfrm>
+            <a:off x="11009376" y="3291840"/>
+            <a:ext cx="411480" cy="256032"/>
           </a:xfrm>
           <a:prstGeom prst="rect">
             <a:avLst/>
@@ -7000,14 +7623,14 @@
       </p:sp>
       <p:sp>
         <p:nvSpPr>
-          <p:cNvPr id="38" name="Text 35"/>
+          <p:cNvPr id="59" name="Text 56"/>
           <p:cNvSpPr txBox="1"/>
           <p:nvPr/>
         </p:nvSpPr>
         <p:spPr>
           <a:xfrm>
-            <a:off x="7406640" y="3200400"/>
-            <a:ext cx="804672" cy="237744"/>
+            <a:off x="7406640" y="3593592"/>
+            <a:ext cx="804672" cy="256032"/>
           </a:xfrm>
           <a:prstGeom prst="rect">
             <a:avLst/>
@@ -7039,24 +7662,24 @@
       </p:sp>
       <p:sp>
         <p:nvSpPr>
-          <p:cNvPr id="39" name="Shape 36"/>
+          <p:cNvPr id="60" name="Shape 57"/>
           <p:cNvSpPr/>
           <p:nvPr/>
         </p:nvSpPr>
         <p:spPr>
           <a:xfrm>
-            <a:off x="8275320" y="3227832"/>
-            <a:ext cx="2566055" cy="182880"/>
+            <a:off x="8275320" y="3621024"/>
+            <a:ext cx="988890" cy="201168"/>
           </a:xfrm>
           <a:prstGeom prst="rect">
             <a:avLst/>
           </a:prstGeom>
           <a:solidFill>
-            <a:srgbClr val="9FB0C6"/>
+            <a:srgbClr val="16305B"/>
           </a:solidFill>
-          <a:ln w="12700">
+          <a:ln w="6350">
             <a:solidFill>
-              <a:srgbClr val="9FB0C6"/>
+              <a:srgbClr val="FFFFFF"/>
             </a:solidFill>
             <a:prstDash val="solid"/>
           </a:ln>
@@ -7064,14 +7687,14 @@
       </p:sp>
       <p:sp>
         <p:nvSpPr>
-          <p:cNvPr id="40" name="Text 37"/>
+          <p:cNvPr id="61" name="Text 58"/>
           <p:cNvSpPr txBox="1"/>
           <p:nvPr/>
         </p:nvSpPr>
         <p:spPr>
           <a:xfrm>
-            <a:off x="8275320" y="3227832"/>
-            <a:ext cx="2511191" cy="182880"/>
+            <a:off x="8275320" y="3621024"/>
+            <a:ext cx="988890" cy="201168"/>
           </a:xfrm>
           <a:prstGeom prst="rect">
             <a:avLst/>
@@ -7083,11 +7706,11 @@
           <a:bodyPr wrap="square" lIns="0" tIns="0" rIns="0" bIns="0" rtlCol="0" anchor="ctr"/>
           <a:lstStyle/>
           <a:p>
-            <a:pPr algn="r" indent="0" marL="0">
+            <a:pPr algn="ctr" indent="0" marL="0">
               <a:buNone/>
             </a:pPr>
             <a:r>
-              <a:rPr lang="en-US" sz="800" b="1" dirty="0">
+              <a:rPr lang="en-US" sz="750" b="1" dirty="0">
                 <a:solidFill>
                   <a:srgbClr val="FFFFFF"/>
                 </a:solidFill>
@@ -7095,32 +7718,32 @@
                 <a:ea typeface="Malgun Gothic" pitchFamily="34" charset="-122"/>
                 <a:cs typeface="Malgun Gothic" pitchFamily="34" charset="-120"/>
               </a:rPr>
-              <a:t>97</a:t>
+              <a:t>37</a:t>
             </a:r>
-            <a:endParaRPr lang="en-US" sz="800" dirty="0"/>
+            <a:endParaRPr lang="en-US" sz="750" dirty="0"/>
           </a:p>
         </p:txBody>
       </p:sp>
       <p:sp>
         <p:nvSpPr>
-          <p:cNvPr id="41" name="Shape 38"/>
+          <p:cNvPr id="62" name="Shape 59"/>
           <p:cNvSpPr/>
           <p:nvPr/>
         </p:nvSpPr>
         <p:spPr>
           <a:xfrm>
-            <a:off x="10841375" y="3227832"/>
-            <a:ext cx="67417" cy="182880"/>
+            <a:off x="9264210" y="3621024"/>
+            <a:ext cx="1268865" cy="201168"/>
           </a:xfrm>
           <a:prstGeom prst="rect">
             <a:avLst/>
           </a:prstGeom>
           <a:solidFill>
-            <a:srgbClr val="7FD6E8"/>
+            <a:srgbClr val="3D6FB0"/>
           </a:solidFill>
-          <a:ln w="12700">
+          <a:ln w="6350">
             <a:solidFill>
-              <a:srgbClr val="7FD6E8"/>
+              <a:srgbClr val="FFFFFF"/>
             </a:solidFill>
             <a:prstDash val="solid"/>
           </a:ln>
@@ -7128,14 +7751,228 @@
       </p:sp>
       <p:sp>
         <p:nvSpPr>
-          <p:cNvPr id="42" name="Text 39"/>
+          <p:cNvPr id="63" name="Text 60"/>
           <p:cNvSpPr txBox="1"/>
           <p:nvPr/>
         </p:nvSpPr>
         <p:spPr>
           <a:xfrm>
-            <a:off x="10963656" y="3200400"/>
-            <a:ext cx="457200" cy="237744"/>
+            <a:off x="9264210" y="3621024"/>
+            <a:ext cx="1268865" cy="201168"/>
+          </a:xfrm>
+          <a:prstGeom prst="rect">
+            <a:avLst/>
+          </a:prstGeom>
+          <a:noFill/>
+          <a:ln/>
+        </p:spPr>
+        <p:txBody>
+          <a:bodyPr wrap="square" lIns="0" tIns="0" rIns="0" bIns="0" rtlCol="0" anchor="ctr"/>
+          <a:lstStyle/>
+          <a:p>
+            <a:pPr algn="ctr" indent="0" marL="0">
+              <a:buNone/>
+            </a:pPr>
+            <a:r>
+              <a:rPr lang="en-US" sz="750" b="1" dirty="0">
+                <a:solidFill>
+                  <a:srgbClr val="FFFFFF"/>
+                </a:solidFill>
+                <a:latin typeface="Malgun Gothic" pitchFamily="34" charset="0"/>
+                <a:ea typeface="Malgun Gothic" pitchFamily="34" charset="-122"/>
+                <a:cs typeface="Malgun Gothic" pitchFamily="34" charset="-120"/>
+              </a:rPr>
+              <a:t>47</a:t>
+            </a:r>
+            <a:endParaRPr lang="en-US" sz="750" dirty="0"/>
+          </a:p>
+        </p:txBody>
+      </p:sp>
+      <p:sp>
+        <p:nvSpPr>
+          <p:cNvPr id="64" name="Shape 61"/>
+          <p:cNvSpPr/>
+          <p:nvPr/>
+        </p:nvSpPr>
+        <p:spPr>
+          <a:xfrm>
+            <a:off x="10533075" y="3621024"/>
+            <a:ext cx="33490" cy="201168"/>
+          </a:xfrm>
+          <a:prstGeom prst="rect">
+            <a:avLst/>
+          </a:prstGeom>
+          <a:solidFill>
+            <a:srgbClr val="7FA6D9"/>
+          </a:solidFill>
+          <a:ln w="6350">
+            <a:solidFill>
+              <a:srgbClr val="FFFFFF"/>
+            </a:solidFill>
+            <a:prstDash val="solid"/>
+          </a:ln>
+        </p:spPr>
+      </p:sp>
+      <p:sp>
+        <p:nvSpPr>
+          <p:cNvPr id="65" name="Shape 62"/>
+          <p:cNvSpPr/>
+          <p:nvPr/>
+        </p:nvSpPr>
+        <p:spPr>
+          <a:xfrm>
+            <a:off x="10566565" y="3621024"/>
+            <a:ext cx="15539" cy="201168"/>
+          </a:xfrm>
+          <a:prstGeom prst="rect">
+            <a:avLst/>
+          </a:prstGeom>
+          <a:solidFill>
+            <a:srgbClr val="B7CDEB"/>
+          </a:solidFill>
+          <a:ln w="6350">
+            <a:solidFill>
+              <a:srgbClr val="FFFFFF"/>
+            </a:solidFill>
+            <a:prstDash val="solid"/>
+          </a:ln>
+        </p:spPr>
+      </p:sp>
+      <p:sp>
+        <p:nvSpPr>
+          <p:cNvPr id="66" name="Shape 63"/>
+          <p:cNvSpPr/>
+          <p:nvPr/>
+        </p:nvSpPr>
+        <p:spPr>
+          <a:xfrm>
+            <a:off x="10582104" y="3621024"/>
+            <a:ext cx="143069" cy="201168"/>
+          </a:xfrm>
+          <a:prstGeom prst="rect">
+            <a:avLst/>
+          </a:prstGeom>
+          <a:solidFill>
+            <a:srgbClr val="E08A2E"/>
+          </a:solidFill>
+          <a:ln w="6350">
+            <a:solidFill>
+              <a:srgbClr val="FFFFFF"/>
+            </a:solidFill>
+            <a:prstDash val="solid"/>
+          </a:ln>
+        </p:spPr>
+      </p:sp>
+      <p:sp>
+        <p:nvSpPr>
+          <p:cNvPr id="67" name="Shape 64"/>
+          <p:cNvSpPr/>
+          <p:nvPr/>
+        </p:nvSpPr>
+        <p:spPr>
+          <a:xfrm>
+            <a:off x="10725173" y="3621024"/>
+            <a:ext cx="78500" cy="201168"/>
+          </a:xfrm>
+          <a:prstGeom prst="rect">
+            <a:avLst/>
+          </a:prstGeom>
+          <a:solidFill>
+            <a:srgbClr val="F2C14E"/>
+          </a:solidFill>
+          <a:ln w="6350">
+            <a:solidFill>
+              <a:srgbClr val="FFFFFF"/>
+            </a:solidFill>
+            <a:prstDash val="solid"/>
+          </a:ln>
+        </p:spPr>
+      </p:sp>
+      <p:sp>
+        <p:nvSpPr>
+          <p:cNvPr id="68" name="Shape 65"/>
+          <p:cNvSpPr/>
+          <p:nvPr/>
+        </p:nvSpPr>
+        <p:spPr>
+          <a:xfrm>
+            <a:off x="10803673" y="3621024"/>
+            <a:ext cx="20362" cy="201168"/>
+          </a:xfrm>
+          <a:prstGeom prst="rect">
+            <a:avLst/>
+          </a:prstGeom>
+          <a:solidFill>
+            <a:srgbClr val="8E99A6"/>
+          </a:solidFill>
+          <a:ln w="6350">
+            <a:solidFill>
+              <a:srgbClr val="FFFFFF"/>
+            </a:solidFill>
+            <a:prstDash val="solid"/>
+          </a:ln>
+        </p:spPr>
+      </p:sp>
+      <p:sp>
+        <p:nvSpPr>
+          <p:cNvPr id="69" name="Shape 66"/>
+          <p:cNvSpPr/>
+          <p:nvPr/>
+        </p:nvSpPr>
+        <p:spPr>
+          <a:xfrm>
+            <a:off x="10824035" y="3621024"/>
+            <a:ext cx="61889" cy="201168"/>
+          </a:xfrm>
+          <a:prstGeom prst="rect">
+            <a:avLst/>
+          </a:prstGeom>
+          <a:solidFill>
+            <a:srgbClr val="C9D0D8"/>
+          </a:solidFill>
+          <a:ln w="6350">
+            <a:solidFill>
+              <a:srgbClr val="FFFFFF"/>
+            </a:solidFill>
+            <a:prstDash val="solid"/>
+          </a:ln>
+        </p:spPr>
+      </p:sp>
+      <p:sp>
+        <p:nvSpPr>
+          <p:cNvPr id="70" name="Shape 67"/>
+          <p:cNvSpPr/>
+          <p:nvPr/>
+        </p:nvSpPr>
+        <p:spPr>
+          <a:xfrm>
+            <a:off x="10885925" y="3621024"/>
+            <a:ext cx="68587" cy="201168"/>
+          </a:xfrm>
+          <a:prstGeom prst="rect">
+            <a:avLst/>
+          </a:prstGeom>
+          <a:solidFill>
+            <a:srgbClr val="00A3C4"/>
+          </a:solidFill>
+          <a:ln w="6350">
+            <a:solidFill>
+              <a:srgbClr val="FFFFFF"/>
+            </a:solidFill>
+            <a:prstDash val="solid"/>
+          </a:ln>
+        </p:spPr>
+      </p:sp>
+      <p:sp>
+        <p:nvSpPr>
+          <p:cNvPr id="71" name="Text 68"/>
+          <p:cNvSpPr txBox="1"/>
+          <p:nvPr/>
+        </p:nvSpPr>
+        <p:spPr>
+          <a:xfrm>
+            <a:off x="11009376" y="3593592"/>
+            <a:ext cx="411480" cy="256032"/>
           </a:xfrm>
           <a:prstGeom prst="rect">
             <a:avLst/>
@@ -7167,14 +8004,14 @@
       </p:sp>
       <p:sp>
         <p:nvSpPr>
-          <p:cNvPr id="43" name="Text 40"/>
+          <p:cNvPr id="72" name="Text 69"/>
           <p:cNvSpPr txBox="1"/>
           <p:nvPr/>
         </p:nvSpPr>
         <p:spPr>
           <a:xfrm>
-            <a:off x="7406640" y="3474720"/>
-            <a:ext cx="804672" cy="237744"/>
+            <a:off x="7406640" y="3895344"/>
+            <a:ext cx="804672" cy="256032"/>
           </a:xfrm>
           <a:prstGeom prst="rect">
             <a:avLst/>
@@ -7206,24 +8043,24 @@
       </p:sp>
       <p:sp>
         <p:nvSpPr>
-          <p:cNvPr id="44" name="Shape 41"/>
+          <p:cNvPr id="73" name="Shape 70"/>
           <p:cNvSpPr/>
           <p:nvPr/>
         </p:nvSpPr>
         <p:spPr>
           <a:xfrm>
-            <a:off x="8275320" y="3502152"/>
-            <a:ext cx="2539984" cy="182880"/>
+            <a:off x="8275320" y="3922776"/>
+            <a:ext cx="1064175" cy="201168"/>
           </a:xfrm>
           <a:prstGeom prst="rect">
             <a:avLst/>
           </a:prstGeom>
           <a:solidFill>
-            <a:srgbClr val="9FB0C6"/>
+            <a:srgbClr val="16305B"/>
           </a:solidFill>
-          <a:ln w="12700">
+          <a:ln w="6350">
             <a:solidFill>
-              <a:srgbClr val="9FB0C6"/>
+              <a:srgbClr val="FFFFFF"/>
             </a:solidFill>
             <a:prstDash val="solid"/>
           </a:ln>
@@ -7231,14 +8068,14 @@
       </p:sp>
       <p:sp>
         <p:nvSpPr>
-          <p:cNvPr id="45" name="Text 42"/>
+          <p:cNvPr id="74" name="Text 71"/>
           <p:cNvSpPr txBox="1"/>
           <p:nvPr/>
         </p:nvSpPr>
         <p:spPr>
           <a:xfrm>
-            <a:off x="8275320" y="3502152"/>
-            <a:ext cx="2485120" cy="182880"/>
+            <a:off x="8275320" y="3922776"/>
+            <a:ext cx="1064175" cy="201168"/>
           </a:xfrm>
           <a:prstGeom prst="rect">
             <a:avLst/>
@@ -7250,11 +8087,11 @@
           <a:bodyPr wrap="square" lIns="0" tIns="0" rIns="0" bIns="0" rtlCol="0" anchor="ctr"/>
           <a:lstStyle/>
           <a:p>
-            <a:pPr algn="r" indent="0" marL="0">
+            <a:pPr algn="ctr" indent="0" marL="0">
               <a:buNone/>
             </a:pPr>
             <a:r>
-              <a:rPr lang="en-US" sz="800" b="1" dirty="0">
+              <a:rPr lang="en-US" sz="750" b="1" dirty="0">
                 <a:solidFill>
                   <a:srgbClr val="FFFFFF"/>
                 </a:solidFill>
@@ -7262,32 +8099,32 @@
                 <a:ea typeface="Malgun Gothic" pitchFamily="34" charset="-122"/>
                 <a:cs typeface="Malgun Gothic" pitchFamily="34" charset="-120"/>
               </a:rPr>
-              <a:t>96</a:t>
+              <a:t>40</a:t>
             </a:r>
-            <a:endParaRPr lang="en-US" sz="800" dirty="0"/>
+            <a:endParaRPr lang="en-US" sz="750" dirty="0"/>
           </a:p>
         </p:txBody>
       </p:sp>
       <p:sp>
         <p:nvSpPr>
-          <p:cNvPr id="46" name="Shape 43"/>
+          <p:cNvPr id="75" name="Shape 72"/>
           <p:cNvSpPr/>
           <p:nvPr/>
         </p:nvSpPr>
         <p:spPr>
           <a:xfrm>
-            <a:off x="10815304" y="3502152"/>
-            <a:ext cx="93488" cy="182880"/>
+            <a:off x="9339495" y="3922776"/>
+            <a:ext cx="986746" cy="201168"/>
           </a:xfrm>
           <a:prstGeom prst="rect">
             <a:avLst/>
           </a:prstGeom>
           <a:solidFill>
-            <a:srgbClr val="7FD6E8"/>
+            <a:srgbClr val="3D6FB0"/>
           </a:solidFill>
-          <a:ln w="12700">
+          <a:ln w="6350">
             <a:solidFill>
-              <a:srgbClr val="7FD6E8"/>
+              <a:srgbClr val="FFFFFF"/>
             </a:solidFill>
             <a:prstDash val="solid"/>
           </a:ln>
@@ -7295,14 +8132,242 @@
       </p:sp>
       <p:sp>
         <p:nvSpPr>
-          <p:cNvPr id="47" name="Text 44"/>
+          <p:cNvPr id="76" name="Text 73"/>
           <p:cNvSpPr txBox="1"/>
           <p:nvPr/>
         </p:nvSpPr>
         <p:spPr>
           <a:xfrm>
-            <a:off x="10963656" y="3474720"/>
-            <a:ext cx="457200" cy="237744"/>
+            <a:off x="9339495" y="3922776"/>
+            <a:ext cx="986746" cy="201168"/>
+          </a:xfrm>
+          <a:prstGeom prst="rect">
+            <a:avLst/>
+          </a:prstGeom>
+          <a:noFill/>
+          <a:ln/>
+        </p:spPr>
+        <p:txBody>
+          <a:bodyPr wrap="square" lIns="0" tIns="0" rIns="0" bIns="0" rtlCol="0" anchor="ctr"/>
+          <a:lstStyle/>
+          <a:p>
+            <a:pPr algn="ctr" indent="0" marL="0">
+              <a:buNone/>
+            </a:pPr>
+            <a:r>
+              <a:rPr lang="en-US" sz="750" b="1" dirty="0">
+                <a:solidFill>
+                  <a:srgbClr val="FFFFFF"/>
+                </a:solidFill>
+                <a:latin typeface="Malgun Gothic" pitchFamily="34" charset="0"/>
+                <a:ea typeface="Malgun Gothic" pitchFamily="34" charset="-122"/>
+                <a:cs typeface="Malgun Gothic" pitchFamily="34" charset="-120"/>
+              </a:rPr>
+              <a:t>37</a:t>
+            </a:r>
+            <a:endParaRPr lang="en-US" sz="750" dirty="0"/>
+          </a:p>
+        </p:txBody>
+      </p:sp>
+      <p:sp>
+        <p:nvSpPr>
+          <p:cNvPr id="77" name="Shape 74"/>
+          <p:cNvSpPr/>
+          <p:nvPr/>
+        </p:nvSpPr>
+        <p:spPr>
+          <a:xfrm>
+            <a:off x="10326241" y="3922776"/>
+            <a:ext cx="22237" cy="201168"/>
+          </a:xfrm>
+          <a:prstGeom prst="rect">
+            <a:avLst/>
+          </a:prstGeom>
+          <a:solidFill>
+            <a:srgbClr val="7FA6D9"/>
+          </a:solidFill>
+          <a:ln w="6350">
+            <a:solidFill>
+              <a:srgbClr val="FFFFFF"/>
+            </a:solidFill>
+            <a:prstDash val="solid"/>
+          </a:ln>
+        </p:spPr>
+      </p:sp>
+      <p:sp>
+        <p:nvSpPr>
+          <p:cNvPr id="78" name="Shape 75"/>
+          <p:cNvSpPr/>
+          <p:nvPr/>
+        </p:nvSpPr>
+        <p:spPr>
+          <a:xfrm>
+            <a:off x="10348479" y="3922776"/>
+            <a:ext cx="4019" cy="201168"/>
+          </a:xfrm>
+          <a:prstGeom prst="rect">
+            <a:avLst/>
+          </a:prstGeom>
+          <a:solidFill>
+            <a:srgbClr val="B7CDEB"/>
+          </a:solidFill>
+          <a:ln w="6350">
+            <a:solidFill>
+              <a:srgbClr val="FFFFFF"/>
+            </a:solidFill>
+            <a:prstDash val="solid"/>
+          </a:ln>
+        </p:spPr>
+      </p:sp>
+      <p:sp>
+        <p:nvSpPr>
+          <p:cNvPr id="79" name="Shape 76"/>
+          <p:cNvSpPr/>
+          <p:nvPr/>
+        </p:nvSpPr>
+        <p:spPr>
+          <a:xfrm>
+            <a:off x="10352498" y="3922776"/>
+            <a:ext cx="453319" cy="201168"/>
+          </a:xfrm>
+          <a:prstGeom prst="rect">
+            <a:avLst/>
+          </a:prstGeom>
+          <a:solidFill>
+            <a:srgbClr val="E08A2E"/>
+          </a:solidFill>
+          <a:ln w="6350">
+            <a:solidFill>
+              <a:srgbClr val="FFFFFF"/>
+            </a:solidFill>
+            <a:prstDash val="solid"/>
+          </a:ln>
+        </p:spPr>
+      </p:sp>
+      <p:sp>
+        <p:nvSpPr>
+          <p:cNvPr id="80" name="Text 77"/>
+          <p:cNvSpPr txBox="1"/>
+          <p:nvPr/>
+        </p:nvSpPr>
+        <p:spPr>
+          <a:xfrm>
+            <a:off x="10352498" y="3922776"/>
+            <a:ext cx="453319" cy="201168"/>
+          </a:xfrm>
+          <a:prstGeom prst="rect">
+            <a:avLst/>
+          </a:prstGeom>
+          <a:noFill/>
+          <a:ln/>
+        </p:spPr>
+        <p:txBody>
+          <a:bodyPr wrap="square" lIns="0" tIns="0" rIns="0" bIns="0" rtlCol="0" anchor="ctr"/>
+          <a:lstStyle/>
+          <a:p>
+            <a:pPr algn="ctr" indent="0" marL="0">
+              <a:buNone/>
+            </a:pPr>
+            <a:r>
+              <a:rPr lang="en-US" sz="750" b="1" dirty="0">
+                <a:solidFill>
+                  <a:srgbClr val="FFFFFF"/>
+                </a:solidFill>
+                <a:latin typeface="Malgun Gothic" pitchFamily="34" charset="0"/>
+                <a:ea typeface="Malgun Gothic" pitchFamily="34" charset="-122"/>
+                <a:cs typeface="Malgun Gothic" pitchFamily="34" charset="-120"/>
+              </a:rPr>
+              <a:t>17</a:t>
+            </a:r>
+            <a:endParaRPr lang="en-US" sz="750" dirty="0"/>
+          </a:p>
+        </p:txBody>
+      </p:sp>
+      <p:sp>
+        <p:nvSpPr>
+          <p:cNvPr id="81" name="Shape 78"/>
+          <p:cNvSpPr/>
+          <p:nvPr/>
+        </p:nvSpPr>
+        <p:spPr>
+          <a:xfrm>
+            <a:off x="10805817" y="3922776"/>
+            <a:ext cx="30007" cy="201168"/>
+          </a:xfrm>
+          <a:prstGeom prst="rect">
+            <a:avLst/>
+          </a:prstGeom>
+          <a:solidFill>
+            <a:srgbClr val="F2C14E"/>
+          </a:solidFill>
+          <a:ln w="6350">
+            <a:solidFill>
+              <a:srgbClr val="FFFFFF"/>
+            </a:solidFill>
+            <a:prstDash val="solid"/>
+          </a:ln>
+        </p:spPr>
+      </p:sp>
+      <p:sp>
+        <p:nvSpPr>
+          <p:cNvPr id="82" name="Shape 79"/>
+          <p:cNvSpPr/>
+          <p:nvPr/>
+        </p:nvSpPr>
+        <p:spPr>
+          <a:xfrm>
+            <a:off x="10835824" y="3922776"/>
+            <a:ext cx="23309" cy="201168"/>
+          </a:xfrm>
+          <a:prstGeom prst="rect">
+            <a:avLst/>
+          </a:prstGeom>
+          <a:solidFill>
+            <a:srgbClr val="C9D0D8"/>
+          </a:solidFill>
+          <a:ln w="6350">
+            <a:solidFill>
+              <a:srgbClr val="FFFFFF"/>
+            </a:solidFill>
+            <a:prstDash val="solid"/>
+          </a:ln>
+        </p:spPr>
+      </p:sp>
+      <p:sp>
+        <p:nvSpPr>
+          <p:cNvPr id="83" name="Shape 80"/>
+          <p:cNvSpPr/>
+          <p:nvPr/>
+        </p:nvSpPr>
+        <p:spPr>
+          <a:xfrm>
+            <a:off x="10859133" y="3922776"/>
+            <a:ext cx="95111" cy="201168"/>
+          </a:xfrm>
+          <a:prstGeom prst="rect">
+            <a:avLst/>
+          </a:prstGeom>
+          <a:solidFill>
+            <a:srgbClr val="00A3C4"/>
+          </a:solidFill>
+          <a:ln w="6350">
+            <a:solidFill>
+              <a:srgbClr val="FFFFFF"/>
+            </a:solidFill>
+            <a:prstDash val="solid"/>
+          </a:ln>
+        </p:spPr>
+      </p:sp>
+      <p:sp>
+        <p:nvSpPr>
+          <p:cNvPr id="84" name="Text 81"/>
+          <p:cNvSpPr txBox="1"/>
+          <p:nvPr/>
+        </p:nvSpPr>
+        <p:spPr>
+          <a:xfrm>
+            <a:off x="11009376" y="3895344"/>
+            <a:ext cx="411480" cy="256032"/>
           </a:xfrm>
           <a:prstGeom prst="rect">
             <a:avLst/>
@@ -7334,14 +8399,14 @@
       </p:sp>
       <p:sp>
         <p:nvSpPr>
-          <p:cNvPr id="48" name="Text 45"/>
+          <p:cNvPr id="85" name="Text 82"/>
           <p:cNvSpPr txBox="1"/>
           <p:nvPr/>
         </p:nvSpPr>
         <p:spPr>
           <a:xfrm>
-            <a:off x="7406640" y="3749040"/>
-            <a:ext cx="804672" cy="237744"/>
+            <a:off x="7406640" y="4197096"/>
+            <a:ext cx="804672" cy="256032"/>
           </a:xfrm>
           <a:prstGeom prst="rect">
             <a:avLst/>
@@ -7373,24 +8438,24 @@
       </p:sp>
       <p:sp>
         <p:nvSpPr>
-          <p:cNvPr id="49" name="Shape 46"/>
+          <p:cNvPr id="86" name="Shape 83"/>
           <p:cNvSpPr/>
           <p:nvPr/>
         </p:nvSpPr>
         <p:spPr>
           <a:xfrm>
-            <a:off x="8275320" y="3776472"/>
-            <a:ext cx="2300601" cy="182880"/>
+            <a:off x="8275320" y="4224528"/>
+            <a:ext cx="1833103" cy="201168"/>
           </a:xfrm>
           <a:prstGeom prst="rect">
             <a:avLst/>
           </a:prstGeom>
           <a:solidFill>
-            <a:srgbClr val="9FB0C6"/>
+            <a:srgbClr val="16305B"/>
           </a:solidFill>
-          <a:ln w="12700">
+          <a:ln w="6350">
             <a:solidFill>
-              <a:srgbClr val="9FB0C6"/>
+              <a:srgbClr val="FFFFFF"/>
             </a:solidFill>
             <a:prstDash val="solid"/>
           </a:ln>
@@ -7398,14 +8463,14 @@
       </p:sp>
       <p:sp>
         <p:nvSpPr>
-          <p:cNvPr id="50" name="Text 47"/>
+          <p:cNvPr id="87" name="Text 84"/>
           <p:cNvSpPr txBox="1"/>
           <p:nvPr/>
         </p:nvSpPr>
         <p:spPr>
           <a:xfrm>
-            <a:off x="8275320" y="3776472"/>
-            <a:ext cx="2245737" cy="182880"/>
+            <a:off x="8275320" y="4224528"/>
+            <a:ext cx="1833103" cy="201168"/>
           </a:xfrm>
           <a:prstGeom prst="rect">
             <a:avLst/>
@@ -7417,11 +8482,11 @@
           <a:bodyPr wrap="square" lIns="0" tIns="0" rIns="0" bIns="0" rtlCol="0" anchor="ctr"/>
           <a:lstStyle/>
           <a:p>
-            <a:pPr algn="r" indent="0" marL="0">
+            <a:pPr algn="ctr" indent="0" marL="0">
               <a:buNone/>
             </a:pPr>
             <a:r>
-              <a:rPr lang="en-US" sz="800" b="1" dirty="0">
+              <a:rPr lang="en-US" sz="750" b="1" dirty="0">
                 <a:solidFill>
                   <a:srgbClr val="FFFFFF"/>
                 </a:solidFill>
@@ -7429,22 +8494,136 @@
                 <a:ea typeface="Malgun Gothic" pitchFamily="34" charset="-122"/>
                 <a:cs typeface="Malgun Gothic" pitchFamily="34" charset="-120"/>
               </a:rPr>
-              <a:t>87</a:t>
+              <a:t>68</a:t>
             </a:r>
-            <a:endParaRPr lang="en-US" sz="800" dirty="0"/>
+            <a:endParaRPr lang="en-US" sz="750" dirty="0"/>
           </a:p>
         </p:txBody>
       </p:sp>
       <p:sp>
         <p:nvSpPr>
-          <p:cNvPr id="51" name="Shape 48"/>
+          <p:cNvPr id="88" name="Shape 85"/>
           <p:cNvSpPr/>
           <p:nvPr/>
         </p:nvSpPr>
         <p:spPr>
           <a:xfrm>
-            <a:off x="10575921" y="3776472"/>
-            <a:ext cx="332871" cy="182880"/>
+            <a:off x="10108423" y="4224528"/>
+            <a:ext cx="153518" cy="201168"/>
+          </a:xfrm>
+          <a:prstGeom prst="rect">
+            <a:avLst/>
+          </a:prstGeom>
+          <a:solidFill>
+            <a:srgbClr val="7FA6D9"/>
+          </a:solidFill>
+          <a:ln w="6350">
+            <a:solidFill>
+              <a:srgbClr val="FFFFFF"/>
+            </a:solidFill>
+            <a:prstDash val="solid"/>
+          </a:ln>
+        </p:spPr>
+      </p:sp>
+      <p:sp>
+        <p:nvSpPr>
+          <p:cNvPr id="89" name="Shape 86"/>
+          <p:cNvSpPr/>
+          <p:nvPr/>
+        </p:nvSpPr>
+        <p:spPr>
+          <a:xfrm>
+            <a:off x="10261941" y="4224528"/>
+            <a:ext cx="344544" cy="201168"/>
+          </a:xfrm>
+          <a:prstGeom prst="rect">
+            <a:avLst/>
+          </a:prstGeom>
+          <a:solidFill>
+            <a:srgbClr val="F2C14E"/>
+          </a:solidFill>
+          <a:ln w="6350">
+            <a:solidFill>
+              <a:srgbClr val="FFFFFF"/>
+            </a:solidFill>
+            <a:prstDash val="solid"/>
+          </a:ln>
+        </p:spPr>
+      </p:sp>
+      <p:sp>
+        <p:nvSpPr>
+          <p:cNvPr id="90" name="Text 87"/>
+          <p:cNvSpPr txBox="1"/>
+          <p:nvPr/>
+        </p:nvSpPr>
+        <p:spPr>
+          <a:xfrm>
+            <a:off x="10261941" y="4224528"/>
+            <a:ext cx="344544" cy="201168"/>
+          </a:xfrm>
+          <a:prstGeom prst="rect">
+            <a:avLst/>
+          </a:prstGeom>
+          <a:noFill/>
+          <a:ln/>
+        </p:spPr>
+        <p:txBody>
+          <a:bodyPr wrap="square" lIns="0" tIns="0" rIns="0" bIns="0" rtlCol="0" anchor="ctr"/>
+          <a:lstStyle/>
+          <a:p>
+            <a:pPr algn="ctr" indent="0" marL="0">
+              <a:buNone/>
+            </a:pPr>
+            <a:r>
+              <a:rPr lang="en-US" sz="750" b="1" dirty="0">
+                <a:solidFill>
+                  <a:srgbClr val="16305B"/>
+                </a:solidFill>
+                <a:latin typeface="Malgun Gothic" pitchFamily="34" charset="0"/>
+                <a:ea typeface="Malgun Gothic" pitchFamily="34" charset="-122"/>
+                <a:cs typeface="Malgun Gothic" pitchFamily="34" charset="-120"/>
+              </a:rPr>
+              <a:t>13</a:t>
+            </a:r>
+            <a:endParaRPr lang="en-US" sz="750" dirty="0"/>
+          </a:p>
+        </p:txBody>
+      </p:sp>
+      <p:sp>
+        <p:nvSpPr>
+          <p:cNvPr id="91" name="Shape 88"/>
+          <p:cNvSpPr/>
+          <p:nvPr/>
+        </p:nvSpPr>
+        <p:spPr>
+          <a:xfrm>
+            <a:off x="10606485" y="4224528"/>
+            <a:ext cx="8573" cy="201168"/>
+          </a:xfrm>
+          <a:prstGeom prst="rect">
+            <a:avLst/>
+          </a:prstGeom>
+          <a:solidFill>
+            <a:srgbClr val="8E99A6"/>
+          </a:solidFill>
+          <a:ln w="6350">
+            <a:solidFill>
+              <a:srgbClr val="FFFFFF"/>
+            </a:solidFill>
+            <a:prstDash val="solid"/>
+          </a:ln>
+        </p:spPr>
+      </p:sp>
+      <p:sp>
+        <p:nvSpPr>
+          <p:cNvPr id="92" name="Shape 89"/>
+          <p:cNvSpPr/>
+          <p:nvPr/>
+        </p:nvSpPr>
+        <p:spPr>
+          <a:xfrm>
+            <a:off x="10615058" y="4224528"/>
+            <a:ext cx="338650" cy="201168"/>
           </a:xfrm>
           <a:prstGeom prst="rect">
             <a:avLst/>
@@ -7452,9 +8631,9 @@
           <a:solidFill>
             <a:srgbClr val="00A3C4"/>
           </a:solidFill>
-          <a:ln w="12700">
+          <a:ln w="6350">
             <a:solidFill>
-              <a:srgbClr val="00A3C4"/>
+              <a:srgbClr val="FFFFFF"/>
             </a:solidFill>
             <a:prstDash val="solid"/>
           </a:ln>
@@ -7462,14 +8641,53 @@
       </p:sp>
       <p:sp>
         <p:nvSpPr>
-          <p:cNvPr id="52" name="Text 49"/>
+          <p:cNvPr id="93" name="Text 90"/>
           <p:cNvSpPr txBox="1"/>
           <p:nvPr/>
         </p:nvSpPr>
         <p:spPr>
           <a:xfrm>
-            <a:off x="10963656" y="3749040"/>
-            <a:ext cx="457200" cy="237744"/>
+            <a:off x="10615058" y="4224528"/>
+            <a:ext cx="338650" cy="201168"/>
+          </a:xfrm>
+          <a:prstGeom prst="rect">
+            <a:avLst/>
+          </a:prstGeom>
+          <a:noFill/>
+          <a:ln/>
+        </p:spPr>
+        <p:txBody>
+          <a:bodyPr wrap="square" lIns="0" tIns="0" rIns="0" bIns="0" rtlCol="0" anchor="ctr"/>
+          <a:lstStyle/>
+          <a:p>
+            <a:pPr algn="ctr" indent="0" marL="0">
+              <a:buNone/>
+            </a:pPr>
+            <a:r>
+              <a:rPr lang="en-US" sz="750" b="1" dirty="0">
+                <a:solidFill>
+                  <a:srgbClr val="FFFFFF"/>
+                </a:solidFill>
+                <a:latin typeface="Malgun Gothic" pitchFamily="34" charset="0"/>
+                <a:ea typeface="Malgun Gothic" pitchFamily="34" charset="-122"/>
+                <a:cs typeface="Malgun Gothic" pitchFamily="34" charset="-120"/>
+              </a:rPr>
+              <a:t>13</a:t>
+            </a:r>
+            <a:endParaRPr lang="en-US" sz="750" dirty="0"/>
+          </a:p>
+        </p:txBody>
+      </p:sp>
+      <p:sp>
+        <p:nvSpPr>
+          <p:cNvPr id="94" name="Text 91"/>
+          <p:cNvSpPr txBox="1"/>
+          <p:nvPr/>
+        </p:nvSpPr>
+        <p:spPr>
+          <a:xfrm>
+            <a:off x="11009376" y="4197096"/>
+            <a:ext cx="411480" cy="256032"/>
           </a:xfrm>
           <a:prstGeom prst="rect">
             <a:avLst/>
@@ -7501,14 +8719,14 @@
       </p:sp>
       <p:sp>
         <p:nvSpPr>
-          <p:cNvPr id="53" name="Text 50"/>
+          <p:cNvPr id="95" name="Text 92"/>
           <p:cNvSpPr txBox="1"/>
           <p:nvPr/>
         </p:nvSpPr>
         <p:spPr>
           <a:xfrm>
-            <a:off x="7406640" y="4023360"/>
-            <a:ext cx="804672" cy="237744"/>
+            <a:off x="7406640" y="4498848"/>
+            <a:ext cx="804672" cy="256032"/>
           </a:xfrm>
           <a:prstGeom prst="rect">
             <a:avLst/>
@@ -7540,24 +8758,24 @@
       </p:sp>
       <p:sp>
         <p:nvSpPr>
-          <p:cNvPr id="54" name="Shape 51"/>
+          <p:cNvPr id="96" name="Shape 93"/>
           <p:cNvSpPr/>
           <p:nvPr/>
         </p:nvSpPr>
         <p:spPr>
           <a:xfrm>
-            <a:off x="8275320" y="4050792"/>
-            <a:ext cx="2142066" cy="182880"/>
+            <a:off x="8275320" y="4526280"/>
+            <a:ext cx="1818100" cy="201168"/>
           </a:xfrm>
           <a:prstGeom prst="rect">
             <a:avLst/>
           </a:prstGeom>
           <a:solidFill>
-            <a:srgbClr val="9FB0C6"/>
+            <a:srgbClr val="3D6FB0"/>
           </a:solidFill>
-          <a:ln w="12700">
+          <a:ln w="6350">
             <a:solidFill>
-              <a:srgbClr val="9FB0C6"/>
+              <a:srgbClr val="FFFFFF"/>
             </a:solidFill>
             <a:prstDash val="solid"/>
           </a:ln>
@@ -7565,14 +8783,14 @@
       </p:sp>
       <p:sp>
         <p:nvSpPr>
-          <p:cNvPr id="55" name="Text 52"/>
+          <p:cNvPr id="97" name="Text 94"/>
           <p:cNvSpPr txBox="1"/>
           <p:nvPr/>
         </p:nvSpPr>
         <p:spPr>
           <a:xfrm>
-            <a:off x="8275320" y="4050792"/>
-            <a:ext cx="2087202" cy="182880"/>
+            <a:off x="8275320" y="4526280"/>
+            <a:ext cx="1818100" cy="201168"/>
           </a:xfrm>
           <a:prstGeom prst="rect">
             <a:avLst/>
@@ -7584,11 +8802,11 @@
           <a:bodyPr wrap="square" lIns="0" tIns="0" rIns="0" bIns="0" rtlCol="0" anchor="ctr"/>
           <a:lstStyle/>
           <a:p>
-            <a:pPr algn="r" indent="0" marL="0">
+            <a:pPr algn="ctr" indent="0" marL="0">
               <a:buNone/>
             </a:pPr>
             <a:r>
-              <a:rPr lang="en-US" sz="800" b="1" dirty="0">
+              <a:rPr lang="en-US" sz="750" b="1" dirty="0">
                 <a:solidFill>
                   <a:srgbClr val="FFFFFF"/>
                 </a:solidFill>
@@ -7596,22 +8814,147 @@
                 <a:ea typeface="Malgun Gothic" pitchFamily="34" charset="-122"/>
                 <a:cs typeface="Malgun Gothic" pitchFamily="34" charset="-120"/>
               </a:rPr>
-              <a:t>81</a:t>
+              <a:t>68</a:t>
             </a:r>
-            <a:endParaRPr lang="en-US" sz="800" dirty="0"/>
+            <a:endParaRPr lang="en-US" sz="750" dirty="0"/>
           </a:p>
         </p:txBody>
       </p:sp>
       <p:sp>
         <p:nvSpPr>
-          <p:cNvPr id="56" name="Shape 53"/>
+          <p:cNvPr id="98" name="Shape 95"/>
           <p:cNvSpPr/>
           <p:nvPr/>
         </p:nvSpPr>
         <p:spPr>
           <a:xfrm>
-            <a:off x="10417386" y="4050792"/>
-            <a:ext cx="491406" cy="182880"/>
+            <a:off x="10093420" y="4526280"/>
+            <a:ext cx="148963" cy="201168"/>
+          </a:xfrm>
+          <a:prstGeom prst="rect">
+            <a:avLst/>
+          </a:prstGeom>
+          <a:solidFill>
+            <a:srgbClr val="B7CDEB"/>
+          </a:solidFill>
+          <a:ln w="6350">
+            <a:solidFill>
+              <a:srgbClr val="FFFFFF"/>
+            </a:solidFill>
+            <a:prstDash val="solid"/>
+          </a:ln>
+        </p:spPr>
+      </p:sp>
+      <p:sp>
+        <p:nvSpPr>
+          <p:cNvPr id="99" name="Shape 96"/>
+          <p:cNvSpPr/>
+          <p:nvPr/>
+        </p:nvSpPr>
+        <p:spPr>
+          <a:xfrm>
+            <a:off x="10242383" y="4526280"/>
+            <a:ext cx="179506" cy="201168"/>
+          </a:xfrm>
+          <a:prstGeom prst="rect">
+            <a:avLst/>
+          </a:prstGeom>
+          <a:solidFill>
+            <a:srgbClr val="E08A2E"/>
+          </a:solidFill>
+          <a:ln w="6350">
+            <a:solidFill>
+              <a:srgbClr val="FFFFFF"/>
+            </a:solidFill>
+            <a:prstDash val="solid"/>
+          </a:ln>
+        </p:spPr>
+      </p:sp>
+      <p:sp>
+        <p:nvSpPr>
+          <p:cNvPr id="100" name="Shape 97"/>
+          <p:cNvSpPr/>
+          <p:nvPr/>
+        </p:nvSpPr>
+        <p:spPr>
+          <a:xfrm>
+            <a:off x="10421889" y="4526280"/>
+            <a:ext cx="6698" cy="201168"/>
+          </a:xfrm>
+          <a:prstGeom prst="rect">
+            <a:avLst/>
+          </a:prstGeom>
+          <a:solidFill>
+            <a:srgbClr val="F2C14E"/>
+          </a:solidFill>
+          <a:ln w="6350">
+            <a:solidFill>
+              <a:srgbClr val="FFFFFF"/>
+            </a:solidFill>
+            <a:prstDash val="solid"/>
+          </a:ln>
+        </p:spPr>
+      </p:sp>
+      <p:sp>
+        <p:nvSpPr>
+          <p:cNvPr id="101" name="Shape 98"/>
+          <p:cNvSpPr/>
+          <p:nvPr/>
+        </p:nvSpPr>
+        <p:spPr>
+          <a:xfrm>
+            <a:off x="10428587" y="4526280"/>
+            <a:ext cx="4019" cy="201168"/>
+          </a:xfrm>
+          <a:prstGeom prst="rect">
+            <a:avLst/>
+          </a:prstGeom>
+          <a:solidFill>
+            <a:srgbClr val="8E99A6"/>
+          </a:solidFill>
+          <a:ln w="6350">
+            <a:solidFill>
+              <a:srgbClr val="FFFFFF"/>
+            </a:solidFill>
+            <a:prstDash val="solid"/>
+          </a:ln>
+        </p:spPr>
+      </p:sp>
+      <p:sp>
+        <p:nvSpPr>
+          <p:cNvPr id="102" name="Shape 99"/>
+          <p:cNvSpPr/>
+          <p:nvPr/>
+        </p:nvSpPr>
+        <p:spPr>
+          <a:xfrm>
+            <a:off x="10432605" y="4526280"/>
+            <a:ext cx="21434" cy="201168"/>
+          </a:xfrm>
+          <a:prstGeom prst="rect">
+            <a:avLst/>
+          </a:prstGeom>
+          <a:solidFill>
+            <a:srgbClr val="C9D0D8"/>
+          </a:solidFill>
+          <a:ln w="6350">
+            <a:solidFill>
+              <a:srgbClr val="FFFFFF"/>
+            </a:solidFill>
+            <a:prstDash val="solid"/>
+          </a:ln>
+        </p:spPr>
+      </p:sp>
+      <p:sp>
+        <p:nvSpPr>
+          <p:cNvPr id="103" name="Shape 100"/>
+          <p:cNvSpPr/>
+          <p:nvPr/>
+        </p:nvSpPr>
+        <p:spPr>
+          <a:xfrm>
+            <a:off x="10454039" y="4526280"/>
+            <a:ext cx="499937" cy="201168"/>
           </a:xfrm>
           <a:prstGeom prst="rect">
             <a:avLst/>
@@ -7619,9 +8962,9 @@
           <a:solidFill>
             <a:srgbClr val="00A3C4"/>
           </a:solidFill>
-          <a:ln w="12700">
+          <a:ln w="6350">
             <a:solidFill>
-              <a:srgbClr val="00A3C4"/>
+              <a:srgbClr val="FFFFFF"/>
             </a:solidFill>
             <a:prstDash val="solid"/>
           </a:ln>
@@ -7629,14 +8972,53 @@
       </p:sp>
       <p:sp>
         <p:nvSpPr>
-          <p:cNvPr id="57" name="Text 54"/>
+          <p:cNvPr id="104" name="Text 101"/>
           <p:cNvSpPr txBox="1"/>
           <p:nvPr/>
         </p:nvSpPr>
         <p:spPr>
           <a:xfrm>
-            <a:off x="10963656" y="4023360"/>
-            <a:ext cx="457200" cy="237744"/>
+            <a:off x="10454039" y="4526280"/>
+            <a:ext cx="499937" cy="201168"/>
+          </a:xfrm>
+          <a:prstGeom prst="rect">
+            <a:avLst/>
+          </a:prstGeom>
+          <a:noFill/>
+          <a:ln/>
+        </p:spPr>
+        <p:txBody>
+          <a:bodyPr wrap="square" lIns="0" tIns="0" rIns="0" bIns="0" rtlCol="0" anchor="ctr"/>
+          <a:lstStyle/>
+          <a:p>
+            <a:pPr algn="ctr" indent="0" marL="0">
+              <a:buNone/>
+            </a:pPr>
+            <a:r>
+              <a:rPr lang="en-US" sz="750" b="1" dirty="0">
+                <a:solidFill>
+                  <a:srgbClr val="FFFFFF"/>
+                </a:solidFill>
+                <a:latin typeface="Malgun Gothic" pitchFamily="34" charset="0"/>
+                <a:ea typeface="Malgun Gothic" pitchFamily="34" charset="-122"/>
+                <a:cs typeface="Malgun Gothic" pitchFamily="34" charset="-120"/>
+              </a:rPr>
+              <a:t>19</a:t>
+            </a:r>
+            <a:endParaRPr lang="en-US" sz="750" dirty="0"/>
+          </a:p>
+        </p:txBody>
+      </p:sp>
+      <p:sp>
+        <p:nvSpPr>
+          <p:cNvPr id="105" name="Text 102"/>
+          <p:cNvSpPr txBox="1"/>
+          <p:nvPr/>
+        </p:nvSpPr>
+        <p:spPr>
+          <a:xfrm>
+            <a:off x="11009376" y="4498848"/>
+            <a:ext cx="411480" cy="256032"/>
           </a:xfrm>
           <a:prstGeom prst="rect">
             <a:avLst/>
@@ -7668,14 +9050,14 @@
       </p:sp>
       <p:sp>
         <p:nvSpPr>
-          <p:cNvPr id="58" name="Text 55"/>
+          <p:cNvPr id="106" name="Text 103"/>
           <p:cNvSpPr txBox="1"/>
           <p:nvPr/>
         </p:nvSpPr>
         <p:spPr>
           <a:xfrm>
-            <a:off x="7406640" y="4297680"/>
-            <a:ext cx="804672" cy="237744"/>
+            <a:off x="7406640" y="4800600"/>
+            <a:ext cx="804672" cy="256032"/>
           </a:xfrm>
           <a:prstGeom prst="rect">
             <a:avLst/>
@@ -7707,24 +9089,24 @@
       </p:sp>
       <p:sp>
         <p:nvSpPr>
-          <p:cNvPr id="59" name="Shape 56"/>
+          <p:cNvPr id="107" name="Shape 104"/>
           <p:cNvSpPr/>
           <p:nvPr/>
         </p:nvSpPr>
         <p:spPr>
           <a:xfrm>
-            <a:off x="8275320" y="4325112"/>
-            <a:ext cx="2530767" cy="182880"/>
+            <a:off x="8275320" y="4828032"/>
+            <a:ext cx="3751" cy="201168"/>
           </a:xfrm>
           <a:prstGeom prst="rect">
             <a:avLst/>
           </a:prstGeom>
           <a:solidFill>
-            <a:srgbClr val="9FB0C6"/>
+            <a:srgbClr val="16305B"/>
           </a:solidFill>
-          <a:ln w="12700">
+          <a:ln w="6350">
             <a:solidFill>
-              <a:srgbClr val="9FB0C6"/>
+              <a:srgbClr val="FFFFFF"/>
             </a:solidFill>
             <a:prstDash val="solid"/>
           </a:ln>
@@ -7732,14 +9114,39 @@
       </p:sp>
       <p:sp>
         <p:nvSpPr>
-          <p:cNvPr id="60" name="Text 57"/>
+          <p:cNvPr id="108" name="Shape 105"/>
+          <p:cNvSpPr/>
+          <p:nvPr/>
+        </p:nvSpPr>
+        <p:spPr>
+          <a:xfrm>
+            <a:off x="8279071" y="4828032"/>
+            <a:ext cx="743476" cy="201168"/>
+          </a:xfrm>
+          <a:prstGeom prst="rect">
+            <a:avLst/>
+          </a:prstGeom>
+          <a:solidFill>
+            <a:srgbClr val="3D6FB0"/>
+          </a:solidFill>
+          <a:ln w="6350">
+            <a:solidFill>
+              <a:srgbClr val="FFFFFF"/>
+            </a:solidFill>
+            <a:prstDash val="solid"/>
+          </a:ln>
+        </p:spPr>
+      </p:sp>
+      <p:sp>
+        <p:nvSpPr>
+          <p:cNvPr id="109" name="Text 106"/>
           <p:cNvSpPr txBox="1"/>
           <p:nvPr/>
         </p:nvSpPr>
         <p:spPr>
           <a:xfrm>
-            <a:off x="8275320" y="4325112"/>
-            <a:ext cx="2475903" cy="182880"/>
+            <a:off x="8279071" y="4828032"/>
+            <a:ext cx="743476" cy="201168"/>
           </a:xfrm>
           <a:prstGeom prst="rect">
             <a:avLst/>
@@ -7751,11 +9158,11 @@
           <a:bodyPr wrap="square" lIns="0" tIns="0" rIns="0" bIns="0" rtlCol="0" anchor="ctr"/>
           <a:lstStyle/>
           <a:p>
-            <a:pPr algn="r" indent="0" marL="0">
+            <a:pPr algn="ctr" indent="0" marL="0">
               <a:buNone/>
             </a:pPr>
             <a:r>
-              <a:rPr lang="en-US" sz="800" b="1" dirty="0">
+              <a:rPr lang="en-US" sz="750" b="1" dirty="0">
                 <a:solidFill>
                   <a:srgbClr val="FFFFFF"/>
                 </a:solidFill>
@@ -7763,32 +9170,32 @@
                 <a:ea typeface="Malgun Gothic" pitchFamily="34" charset="-122"/>
                 <a:cs typeface="Malgun Gothic" pitchFamily="34" charset="-120"/>
               </a:rPr>
-              <a:t>96</a:t>
+              <a:t>28</a:t>
             </a:r>
-            <a:endParaRPr lang="en-US" sz="800" dirty="0"/>
+            <a:endParaRPr lang="en-US" sz="750" dirty="0"/>
           </a:p>
         </p:txBody>
       </p:sp>
       <p:sp>
         <p:nvSpPr>
-          <p:cNvPr id="61" name="Shape 58"/>
+          <p:cNvPr id="110" name="Shape 107"/>
           <p:cNvSpPr/>
           <p:nvPr/>
         </p:nvSpPr>
         <p:spPr>
           <a:xfrm>
-            <a:off x="10806087" y="4325112"/>
-            <a:ext cx="102705" cy="182880"/>
+            <a:off x="9022547" y="4828032"/>
+            <a:ext cx="147891" cy="201168"/>
           </a:xfrm>
           <a:prstGeom prst="rect">
             <a:avLst/>
           </a:prstGeom>
           <a:solidFill>
-            <a:srgbClr val="7FD6E8"/>
+            <a:srgbClr val="B7CDEB"/>
           </a:solidFill>
-          <a:ln w="12700">
+          <a:ln w="6350">
             <a:solidFill>
-              <a:srgbClr val="7FD6E8"/>
+              <a:srgbClr val="FFFFFF"/>
             </a:solidFill>
             <a:prstDash val="solid"/>
           </a:ln>
@@ -7796,14 +9203,153 @@
       </p:sp>
       <p:sp>
         <p:nvSpPr>
-          <p:cNvPr id="62" name="Text 59"/>
+          <p:cNvPr id="111" name="Shape 108"/>
+          <p:cNvSpPr/>
+          <p:nvPr/>
+        </p:nvSpPr>
+        <p:spPr>
+          <a:xfrm>
+            <a:off x="9170438" y="4828032"/>
+            <a:ext cx="1576972" cy="201168"/>
+          </a:xfrm>
+          <a:prstGeom prst="rect">
+            <a:avLst/>
+          </a:prstGeom>
+          <a:solidFill>
+            <a:srgbClr val="E08A2E"/>
+          </a:solidFill>
+          <a:ln w="6350">
+            <a:solidFill>
+              <a:srgbClr val="FFFFFF"/>
+            </a:solidFill>
+            <a:prstDash val="solid"/>
+          </a:ln>
+        </p:spPr>
+      </p:sp>
+      <p:sp>
+        <p:nvSpPr>
+          <p:cNvPr id="112" name="Text 109"/>
           <p:cNvSpPr txBox="1"/>
           <p:nvPr/>
         </p:nvSpPr>
         <p:spPr>
           <a:xfrm>
-            <a:off x="10963656" y="4297680"/>
-            <a:ext cx="457200" cy="237744"/>
+            <a:off x="9170438" y="4828032"/>
+            <a:ext cx="1576972" cy="201168"/>
+          </a:xfrm>
+          <a:prstGeom prst="rect">
+            <a:avLst/>
+          </a:prstGeom>
+          <a:noFill/>
+          <a:ln/>
+        </p:spPr>
+        <p:txBody>
+          <a:bodyPr wrap="square" lIns="0" tIns="0" rIns="0" bIns="0" rtlCol="0" anchor="ctr"/>
+          <a:lstStyle/>
+          <a:p>
+            <a:pPr algn="ctr" indent="0" marL="0">
+              <a:buNone/>
+            </a:pPr>
+            <a:r>
+              <a:rPr lang="en-US" sz="750" b="1" dirty="0">
+                <a:solidFill>
+                  <a:srgbClr val="FFFFFF"/>
+                </a:solidFill>
+                <a:latin typeface="Malgun Gothic" pitchFamily="34" charset="0"/>
+                <a:ea typeface="Malgun Gothic" pitchFamily="34" charset="-122"/>
+                <a:cs typeface="Malgun Gothic" pitchFamily="34" charset="-120"/>
+              </a:rPr>
+              <a:t>59</a:t>
+            </a:r>
+            <a:endParaRPr lang="en-US" sz="750" dirty="0"/>
+          </a:p>
+        </p:txBody>
+      </p:sp>
+      <p:sp>
+        <p:nvSpPr>
+          <p:cNvPr id="113" name="Shape 110"/>
+          <p:cNvSpPr/>
+          <p:nvPr/>
+        </p:nvSpPr>
+        <p:spPr>
+          <a:xfrm>
+            <a:off x="10747410" y="4828032"/>
+            <a:ext cx="28132" cy="201168"/>
+          </a:xfrm>
+          <a:prstGeom prst="rect">
+            <a:avLst/>
+          </a:prstGeom>
+          <a:solidFill>
+            <a:srgbClr val="F2C14E"/>
+          </a:solidFill>
+          <a:ln w="6350">
+            <a:solidFill>
+              <a:srgbClr val="FFFFFF"/>
+            </a:solidFill>
+            <a:prstDash val="solid"/>
+          </a:ln>
+        </p:spPr>
+      </p:sp>
+      <p:sp>
+        <p:nvSpPr>
+          <p:cNvPr id="114" name="Shape 111"/>
+          <p:cNvSpPr/>
+          <p:nvPr/>
+        </p:nvSpPr>
+        <p:spPr>
+          <a:xfrm>
+            <a:off x="10775542" y="4828032"/>
+            <a:ext cx="74482" cy="201168"/>
+          </a:xfrm>
+          <a:prstGeom prst="rect">
+            <a:avLst/>
+          </a:prstGeom>
+          <a:solidFill>
+            <a:srgbClr val="C9D0D8"/>
+          </a:solidFill>
+          <a:ln w="6350">
+            <a:solidFill>
+              <a:srgbClr val="FFFFFF"/>
+            </a:solidFill>
+            <a:prstDash val="solid"/>
+          </a:ln>
+        </p:spPr>
+      </p:sp>
+      <p:sp>
+        <p:nvSpPr>
+          <p:cNvPr id="115" name="Shape 112"/>
+          <p:cNvSpPr/>
+          <p:nvPr/>
+        </p:nvSpPr>
+        <p:spPr>
+          <a:xfrm>
+            <a:off x="10850024" y="4828032"/>
+            <a:ext cx="104488" cy="201168"/>
+          </a:xfrm>
+          <a:prstGeom prst="rect">
+            <a:avLst/>
+          </a:prstGeom>
+          <a:solidFill>
+            <a:srgbClr val="00A3C4"/>
+          </a:solidFill>
+          <a:ln w="6350">
+            <a:solidFill>
+              <a:srgbClr val="FFFFFF"/>
+            </a:solidFill>
+            <a:prstDash val="solid"/>
+          </a:ln>
+        </p:spPr>
+      </p:sp>
+      <p:sp>
+        <p:nvSpPr>
+          <p:cNvPr id="116" name="Text 113"/>
+          <p:cNvSpPr txBox="1"/>
+          <p:nvPr/>
+        </p:nvSpPr>
+        <p:spPr>
+          <a:xfrm>
+            <a:off x="11009376" y="4800600"/>
+            <a:ext cx="411480" cy="256032"/>
           </a:xfrm>
           <a:prstGeom prst="rect">
             <a:avLst/>
@@ -7835,14 +9381,14 @@
       </p:sp>
       <p:sp>
         <p:nvSpPr>
-          <p:cNvPr id="63" name="Text 60"/>
+          <p:cNvPr id="117" name="Text 114"/>
           <p:cNvSpPr txBox="1"/>
           <p:nvPr/>
         </p:nvSpPr>
         <p:spPr>
           <a:xfrm>
-            <a:off x="7406640" y="4572000"/>
-            <a:ext cx="804672" cy="237744"/>
+            <a:off x="7406640" y="5102352"/>
+            <a:ext cx="804672" cy="256032"/>
           </a:xfrm>
           <a:prstGeom prst="rect">
             <a:avLst/>
@@ -7874,24 +9420,24 @@
       </p:sp>
       <p:sp>
         <p:nvSpPr>
-          <p:cNvPr id="64" name="Shape 61"/>
+          <p:cNvPr id="118" name="Shape 115"/>
           <p:cNvSpPr/>
           <p:nvPr/>
         </p:nvSpPr>
         <p:spPr>
           <a:xfrm>
-            <a:off x="8275320" y="4599432"/>
-            <a:ext cx="2449129" cy="182880"/>
+            <a:off x="8275320" y="5129784"/>
+            <a:ext cx="627199" cy="201168"/>
           </a:xfrm>
           <a:prstGeom prst="rect">
             <a:avLst/>
           </a:prstGeom>
           <a:solidFill>
-            <a:srgbClr val="9FB0C6"/>
+            <a:srgbClr val="16305B"/>
           </a:solidFill>
-          <a:ln w="12700">
+          <a:ln w="6350">
             <a:solidFill>
-              <a:srgbClr val="9FB0C6"/>
+              <a:srgbClr val="FFFFFF"/>
             </a:solidFill>
             <a:prstDash val="solid"/>
           </a:ln>
@@ -7899,14 +9445,14 @@
       </p:sp>
       <p:sp>
         <p:nvSpPr>
-          <p:cNvPr id="65" name="Text 62"/>
+          <p:cNvPr id="119" name="Text 116"/>
           <p:cNvSpPr txBox="1"/>
           <p:nvPr/>
         </p:nvSpPr>
         <p:spPr>
           <a:xfrm>
-            <a:off x="8275320" y="4599432"/>
-            <a:ext cx="2394265" cy="182880"/>
+            <a:off x="8275320" y="5129784"/>
+            <a:ext cx="627199" cy="201168"/>
           </a:xfrm>
           <a:prstGeom prst="rect">
             <a:avLst/>
@@ -7918,11 +9464,11 @@
           <a:bodyPr wrap="square" lIns="0" tIns="0" rIns="0" bIns="0" rtlCol="0" anchor="ctr"/>
           <a:lstStyle/>
           <a:p>
-            <a:pPr algn="r" indent="0" marL="0">
+            <a:pPr algn="ctr" indent="0" marL="0">
               <a:buNone/>
             </a:pPr>
             <a:r>
-              <a:rPr lang="en-US" sz="800" b="1" dirty="0">
+              <a:rPr lang="en-US" sz="750" b="1" dirty="0">
                 <a:solidFill>
                   <a:srgbClr val="FFFFFF"/>
                 </a:solidFill>
@@ -7930,32 +9476,32 @@
                 <a:ea typeface="Malgun Gothic" pitchFamily="34" charset="-122"/>
                 <a:cs typeface="Malgun Gothic" pitchFamily="34" charset="-120"/>
               </a:rPr>
-              <a:t>93</a:t>
+              <a:t>23</a:t>
             </a:r>
-            <a:endParaRPr lang="en-US" sz="800" dirty="0"/>
+            <a:endParaRPr lang="en-US" sz="750" dirty="0"/>
           </a:p>
         </p:txBody>
       </p:sp>
       <p:sp>
         <p:nvSpPr>
-          <p:cNvPr id="66" name="Shape 63"/>
+          <p:cNvPr id="120" name="Shape 117"/>
           <p:cNvSpPr/>
           <p:nvPr/>
         </p:nvSpPr>
         <p:spPr>
           <a:xfrm>
-            <a:off x="10724449" y="4599432"/>
-            <a:ext cx="184343" cy="182880"/>
+            <a:off x="8902519" y="5129784"/>
+            <a:ext cx="520567" cy="201168"/>
           </a:xfrm>
           <a:prstGeom prst="rect">
             <a:avLst/>
           </a:prstGeom>
           <a:solidFill>
-            <a:srgbClr val="7FD6E8"/>
+            <a:srgbClr val="3D6FB0"/>
           </a:solidFill>
-          <a:ln w="12700">
+          <a:ln w="6350">
             <a:solidFill>
-              <a:srgbClr val="7FD6E8"/>
+              <a:srgbClr val="FFFFFF"/>
             </a:solidFill>
             <a:prstDash val="solid"/>
           </a:ln>
@@ -7963,14 +9509,306 @@
       </p:sp>
       <p:sp>
         <p:nvSpPr>
-          <p:cNvPr id="67" name="Text 64"/>
+          <p:cNvPr id="121" name="Text 118"/>
           <p:cNvSpPr txBox="1"/>
           <p:nvPr/>
         </p:nvSpPr>
         <p:spPr>
           <a:xfrm>
-            <a:off x="10963656" y="4572000"/>
-            <a:ext cx="457200" cy="237744"/>
+            <a:off x="8902519" y="5129784"/>
+            <a:ext cx="520567" cy="201168"/>
+          </a:xfrm>
+          <a:prstGeom prst="rect">
+            <a:avLst/>
+          </a:prstGeom>
+          <a:noFill/>
+          <a:ln/>
+        </p:spPr>
+        <p:txBody>
+          <a:bodyPr wrap="square" lIns="0" tIns="0" rIns="0" bIns="0" rtlCol="0" anchor="ctr"/>
+          <a:lstStyle/>
+          <a:p>
+            <a:pPr algn="ctr" indent="0" marL="0">
+              <a:buNone/>
+            </a:pPr>
+            <a:r>
+              <a:rPr lang="en-US" sz="750" b="1" dirty="0">
+                <a:solidFill>
+                  <a:srgbClr val="FFFFFF"/>
+                </a:solidFill>
+                <a:latin typeface="Malgun Gothic" pitchFamily="34" charset="0"/>
+                <a:ea typeface="Malgun Gothic" pitchFamily="34" charset="-122"/>
+                <a:cs typeface="Malgun Gothic" pitchFamily="34" charset="-120"/>
+              </a:rPr>
+              <a:t>19</a:t>
+            </a:r>
+            <a:endParaRPr lang="en-US" sz="750" dirty="0"/>
+          </a:p>
+        </p:txBody>
+      </p:sp>
+      <p:sp>
+        <p:nvSpPr>
+          <p:cNvPr id="122" name="Shape 119"/>
+          <p:cNvSpPr/>
+          <p:nvPr/>
+        </p:nvSpPr>
+        <p:spPr>
+          <a:xfrm>
+            <a:off x="9423086" y="5129784"/>
+            <a:ext cx="668458" cy="201168"/>
+          </a:xfrm>
+          <a:prstGeom prst="rect">
+            <a:avLst/>
+          </a:prstGeom>
+          <a:solidFill>
+            <a:srgbClr val="7FA6D9"/>
+          </a:solidFill>
+          <a:ln w="6350">
+            <a:solidFill>
+              <a:srgbClr val="FFFFFF"/>
+            </a:solidFill>
+            <a:prstDash val="solid"/>
+          </a:ln>
+        </p:spPr>
+      </p:sp>
+      <p:sp>
+        <p:nvSpPr>
+          <p:cNvPr id="123" name="Text 120"/>
+          <p:cNvSpPr txBox="1"/>
+          <p:nvPr/>
+        </p:nvSpPr>
+        <p:spPr>
+          <a:xfrm>
+            <a:off x="9423086" y="5129784"/>
+            <a:ext cx="668458" cy="201168"/>
+          </a:xfrm>
+          <a:prstGeom prst="rect">
+            <a:avLst/>
+          </a:prstGeom>
+          <a:noFill/>
+          <a:ln/>
+        </p:spPr>
+        <p:txBody>
+          <a:bodyPr wrap="square" lIns="0" tIns="0" rIns="0" bIns="0" rtlCol="0" anchor="ctr"/>
+          <a:lstStyle/>
+          <a:p>
+            <a:pPr algn="ctr" indent="0" marL="0">
+              <a:buNone/>
+            </a:pPr>
+            <a:r>
+              <a:rPr lang="en-US" sz="750" b="1" dirty="0">
+                <a:solidFill>
+                  <a:srgbClr val="16305B"/>
+                </a:solidFill>
+                <a:latin typeface="Malgun Gothic" pitchFamily="34" charset="0"/>
+                <a:ea typeface="Malgun Gothic" pitchFamily="34" charset="-122"/>
+                <a:cs typeface="Malgun Gothic" pitchFamily="34" charset="-120"/>
+              </a:rPr>
+              <a:t>25</a:t>
+            </a:r>
+            <a:endParaRPr lang="en-US" sz="750" dirty="0"/>
+          </a:p>
+        </p:txBody>
+      </p:sp>
+      <p:sp>
+        <p:nvSpPr>
+          <p:cNvPr id="124" name="Shape 121"/>
+          <p:cNvSpPr/>
+          <p:nvPr/>
+        </p:nvSpPr>
+        <p:spPr>
+          <a:xfrm>
+            <a:off x="10091544" y="5129784"/>
+            <a:ext cx="549234" cy="201168"/>
+          </a:xfrm>
+          <a:prstGeom prst="rect">
+            <a:avLst/>
+          </a:prstGeom>
+          <a:solidFill>
+            <a:srgbClr val="B7CDEB"/>
+          </a:solidFill>
+          <a:ln w="6350">
+            <a:solidFill>
+              <a:srgbClr val="FFFFFF"/>
+            </a:solidFill>
+            <a:prstDash val="solid"/>
+          </a:ln>
+        </p:spPr>
+      </p:sp>
+      <p:sp>
+        <p:nvSpPr>
+          <p:cNvPr id="125" name="Text 122"/>
+          <p:cNvSpPr txBox="1"/>
+          <p:nvPr/>
+        </p:nvSpPr>
+        <p:spPr>
+          <a:xfrm>
+            <a:off x="10091544" y="5129784"/>
+            <a:ext cx="549234" cy="201168"/>
+          </a:xfrm>
+          <a:prstGeom prst="rect">
+            <a:avLst/>
+          </a:prstGeom>
+          <a:noFill/>
+          <a:ln/>
+        </p:spPr>
+        <p:txBody>
+          <a:bodyPr wrap="square" lIns="0" tIns="0" rIns="0" bIns="0" rtlCol="0" anchor="ctr"/>
+          <a:lstStyle/>
+          <a:p>
+            <a:pPr algn="ctr" indent="0" marL="0">
+              <a:buNone/>
+            </a:pPr>
+            <a:r>
+              <a:rPr lang="en-US" sz="750" b="1" dirty="0">
+                <a:solidFill>
+                  <a:srgbClr val="16305B"/>
+                </a:solidFill>
+                <a:latin typeface="Malgun Gothic" pitchFamily="34" charset="0"/>
+                <a:ea typeface="Malgun Gothic" pitchFamily="34" charset="-122"/>
+                <a:cs typeface="Malgun Gothic" pitchFamily="34" charset="-120"/>
+              </a:rPr>
+              <a:t>21</a:t>
+            </a:r>
+            <a:endParaRPr lang="en-US" sz="750" dirty="0"/>
+          </a:p>
+        </p:txBody>
+      </p:sp>
+      <p:sp>
+        <p:nvSpPr>
+          <p:cNvPr id="126" name="Shape 123"/>
+          <p:cNvSpPr/>
+          <p:nvPr/>
+        </p:nvSpPr>
+        <p:spPr>
+          <a:xfrm>
+            <a:off x="10640779" y="5129784"/>
+            <a:ext cx="4019" cy="201168"/>
+          </a:xfrm>
+          <a:prstGeom prst="rect">
+            <a:avLst/>
+          </a:prstGeom>
+          <a:solidFill>
+            <a:srgbClr val="E08A2E"/>
+          </a:solidFill>
+          <a:ln w="6350">
+            <a:solidFill>
+              <a:srgbClr val="FFFFFF"/>
+            </a:solidFill>
+            <a:prstDash val="solid"/>
+          </a:ln>
+        </p:spPr>
+      </p:sp>
+      <p:sp>
+        <p:nvSpPr>
+          <p:cNvPr id="127" name="Shape 124"/>
+          <p:cNvSpPr/>
+          <p:nvPr/>
+        </p:nvSpPr>
+        <p:spPr>
+          <a:xfrm>
+            <a:off x="10644797" y="5129784"/>
+            <a:ext cx="28667" cy="201168"/>
+          </a:xfrm>
+          <a:prstGeom prst="rect">
+            <a:avLst/>
+          </a:prstGeom>
+          <a:solidFill>
+            <a:srgbClr val="F2C14E"/>
+          </a:solidFill>
+          <a:ln w="6350">
+            <a:solidFill>
+              <a:srgbClr val="FFFFFF"/>
+            </a:solidFill>
+            <a:prstDash val="solid"/>
+          </a:ln>
+        </p:spPr>
+      </p:sp>
+      <p:sp>
+        <p:nvSpPr>
+          <p:cNvPr id="128" name="Shape 125"/>
+          <p:cNvSpPr/>
+          <p:nvPr/>
+        </p:nvSpPr>
+        <p:spPr>
+          <a:xfrm>
+            <a:off x="10673465" y="5129784"/>
+            <a:ext cx="18486" cy="201168"/>
+          </a:xfrm>
+          <a:prstGeom prst="rect">
+            <a:avLst/>
+          </a:prstGeom>
+          <a:solidFill>
+            <a:srgbClr val="8E99A6"/>
+          </a:solidFill>
+          <a:ln w="6350">
+            <a:solidFill>
+              <a:srgbClr val="FFFFFF"/>
+            </a:solidFill>
+            <a:prstDash val="solid"/>
+          </a:ln>
+        </p:spPr>
+      </p:sp>
+      <p:sp>
+        <p:nvSpPr>
+          <p:cNvPr id="129" name="Shape 126"/>
+          <p:cNvSpPr/>
+          <p:nvPr/>
+        </p:nvSpPr>
+        <p:spPr>
+          <a:xfrm>
+            <a:off x="10691951" y="5129784"/>
+            <a:ext cx="75017" cy="201168"/>
+          </a:xfrm>
+          <a:prstGeom prst="rect">
+            <a:avLst/>
+          </a:prstGeom>
+          <a:solidFill>
+            <a:srgbClr val="C9D0D8"/>
+          </a:solidFill>
+          <a:ln w="6350">
+            <a:solidFill>
+              <a:srgbClr val="FFFFFF"/>
+            </a:solidFill>
+            <a:prstDash val="solid"/>
+          </a:ln>
+        </p:spPr>
+      </p:sp>
+      <p:sp>
+        <p:nvSpPr>
+          <p:cNvPr id="130" name="Shape 127"/>
+          <p:cNvSpPr/>
+          <p:nvPr/>
+        </p:nvSpPr>
+        <p:spPr>
+          <a:xfrm>
+            <a:off x="10766969" y="5129784"/>
+            <a:ext cx="187543" cy="201168"/>
+          </a:xfrm>
+          <a:prstGeom prst="rect">
+            <a:avLst/>
+          </a:prstGeom>
+          <a:solidFill>
+            <a:srgbClr val="00A3C4"/>
+          </a:solidFill>
+          <a:ln w="6350">
+            <a:solidFill>
+              <a:srgbClr val="FFFFFF"/>
+            </a:solidFill>
+            <a:prstDash val="solid"/>
+          </a:ln>
+        </p:spPr>
+      </p:sp>
+      <p:sp>
+        <p:nvSpPr>
+          <p:cNvPr id="131" name="Text 128"/>
+          <p:cNvSpPr txBox="1"/>
+          <p:nvPr/>
+        </p:nvSpPr>
+        <p:spPr>
+          <a:xfrm>
+            <a:off x="11009376" y="5102352"/>
+            <a:ext cx="411480" cy="256032"/>
           </a:xfrm>
           <a:prstGeom prst="rect">
             <a:avLst/>
@@ -8002,41 +9840,14 @@
       </p:sp>
       <p:sp>
         <p:nvSpPr>
-          <p:cNvPr id="68" name="Shape 65"/>
-          <p:cNvSpPr/>
-          <p:nvPr/>
-        </p:nvSpPr>
-        <p:spPr>
-          <a:xfrm>
-            <a:off x="7406640" y="4901184"/>
-            <a:ext cx="4005072" cy="731520"/>
-          </a:xfrm>
-          <a:prstGeom prst="roundRect">
-            <a:avLst>
-              <a:gd name="adj" fmla="val 7500"/>
-            </a:avLst>
-          </a:prstGeom>
-          <a:solidFill>
-            <a:srgbClr val="E8F6FA"/>
-          </a:solidFill>
-          <a:ln w="9525">
-            <a:solidFill>
-              <a:srgbClr val="00A3C4"/>
-            </a:solidFill>
-            <a:prstDash val="solid"/>
-          </a:ln>
-        </p:spPr>
-      </p:sp>
-      <p:sp>
-        <p:nvSpPr>
-          <p:cNvPr id="69" name="Text 66"/>
+          <p:cNvPr id="132" name="Text 129"/>
           <p:cNvSpPr txBox="1"/>
           <p:nvPr/>
         </p:nvSpPr>
         <p:spPr>
           <a:xfrm>
-            <a:off x="7534656" y="4901184"/>
-            <a:ext cx="3749040" cy="731520"/>
+            <a:off x="7406640" y="5449824"/>
+            <a:ext cx="4005072" cy="219456"/>
           </a:xfrm>
           <a:prstGeom prst="rect">
             <a:avLst/>
@@ -8049,69 +9860,26 @@
           <a:lstStyle/>
           <a:p>
             <a:pPr indent="0" marL="0">
-              <a:lnSpc>
-                <a:spcPct val="125000"/>
-              </a:lnSpc>
               <a:buNone/>
             </a:pPr>
             <a:r>
-              <a:rPr lang="en-US" sz="900" dirty="0">
+              <a:rPr lang="en-US" sz="800" i="1" dirty="0">
                 <a:solidFill>
-                  <a:srgbClr val="1C2733"/>
+                  <a:srgbClr val="6B7A8F"/>
                 </a:solidFill>
                 <a:latin typeface="Malgun Gothic" pitchFamily="34" charset="0"/>
                 <a:ea typeface="Malgun Gothic" pitchFamily="34" charset="-122"/>
                 <a:cs typeface="Malgun Gothic" pitchFamily="34" charset="-120"/>
               </a:rPr>
-              <a:t>온도편차 → 변동의 97%가 변수 하나씩의 효과</a:t>
+              <a:t>막대 안 숫자 = 변수별 단독 효과(%) · 오른쪽 % = 교호작용</a:t>
             </a:r>
-            <a:endParaRPr lang="en-US" sz="900" dirty="0"/>
-          </a:p>
-          <a:p>
-            <a:pPr indent="0" marL="0">
-              <a:lnSpc>
-                <a:spcPct val="125000"/>
-              </a:lnSpc>
-              <a:buNone/>
-            </a:pPr>
-            <a:r>
-              <a:rPr lang="en-US" sz="900" b="1" dirty="0">
-                <a:solidFill>
-                  <a:srgbClr val="0088A6"/>
-                </a:solidFill>
-                <a:latin typeface="Malgun Gothic" pitchFamily="34" charset="0"/>
-                <a:ea typeface="Malgun Gothic" pitchFamily="34" charset="-122"/>
-                <a:cs typeface="Malgun Gothic" pitchFamily="34" charset="-120"/>
-              </a:rPr>
-              <a:t>2차 균일도 → 변동의 19%(약 1/5)가 변수 조합에서 생김</a:t>
-            </a:r>
-            <a:endParaRPr lang="en-US" sz="900" dirty="0"/>
-          </a:p>
-          <a:p>
-            <a:pPr indent="0" marL="0">
-              <a:lnSpc>
-                <a:spcPct val="125000"/>
-              </a:lnSpc>
-              <a:buNone/>
-            </a:pPr>
-            <a:r>
-              <a:rPr lang="en-US" sz="900" b="1" dirty="0">
-                <a:solidFill>
-                  <a:srgbClr val="16305B"/>
-                </a:solidFill>
-                <a:latin typeface="Malgun Gothic" pitchFamily="34" charset="0"/>
-                <a:ea typeface="Malgun Gothic" pitchFamily="34" charset="-122"/>
-                <a:cs typeface="Malgun Gothic" pitchFamily="34" charset="-120"/>
-              </a:rPr>
-              <a:t>→ 균일도는 변수를 하나씩 조정해서는 최적점을 찾기 어려움</a:t>
-            </a:r>
-            <a:endParaRPr lang="en-US" sz="900" dirty="0"/>
+            <a:endParaRPr lang="en-US" sz="800" dirty="0"/>
           </a:p>
         </p:txBody>
       </p:sp>
       <p:sp>
         <p:nvSpPr>
-          <p:cNvPr id="70" name="Shape 67"/>
+          <p:cNvPr id="133" name="Shape 130"/>
           <p:cNvSpPr/>
           <p:nvPr/>
         </p:nvSpPr>
@@ -8138,7 +9906,7 @@
       </p:sp>
       <p:sp>
         <p:nvSpPr>
-          <p:cNvPr id="71" name="Text 68"/>
+          <p:cNvPr id="134" name="Text 131"/>
           <p:cNvSpPr txBox="1"/>
           <p:nvPr/>
         </p:nvSpPr>
